--- a/documents/presentations/Jannis_Meyer_Presentation_06_07_2026_extended.pptx
+++ b/documents/presentations/Jannis_Meyer_Presentation_06_07_2026_extended.pptx
@@ -5,7 +5,7 @@
     <p:sldMasterId id="2284242785" r:id="rId4"/>
   </p:sldMasterIdLst>
   <p:notesMasterIdLst>
-    <p:notesMasterId r:id="rId24"/>
+    <p:notesMasterId r:id="rId25"/>
   </p:notesMasterIdLst>
   <p:sldIdLst>
     <p:sldId id="256" r:id="rId5"/>
@@ -13,20 +13,21 @@
     <p:sldId id="296" r:id="rId7"/>
     <p:sldId id="297" r:id="rId8"/>
     <p:sldId id="286" r:id="rId9"/>
-    <p:sldId id="299" r:id="rId10"/>
-    <p:sldId id="300" r:id="rId11"/>
-    <p:sldId id="301" r:id="rId12"/>
-    <p:sldId id="298" r:id="rId13"/>
-    <p:sldId id="302" r:id="rId14"/>
-    <p:sldId id="304" r:id="rId15"/>
-    <p:sldId id="305" r:id="rId16"/>
-    <p:sldId id="306" r:id="rId17"/>
-    <p:sldId id="307" r:id="rId18"/>
-    <p:sldId id="308" r:id="rId19"/>
-    <p:sldId id="309" r:id="rId20"/>
-    <p:sldId id="310" r:id="rId21"/>
-    <p:sldId id="311" r:id="rId22"/>
-    <p:sldId id="303" r:id="rId23"/>
+    <p:sldId id="312" r:id="rId10"/>
+    <p:sldId id="301" r:id="rId11"/>
+    <p:sldId id="300" r:id="rId12"/>
+    <p:sldId id="299" r:id="rId13"/>
+    <p:sldId id="298" r:id="rId14"/>
+    <p:sldId id="302" r:id="rId15"/>
+    <p:sldId id="304" r:id="rId16"/>
+    <p:sldId id="305" r:id="rId17"/>
+    <p:sldId id="306" r:id="rId18"/>
+    <p:sldId id="307" r:id="rId19"/>
+    <p:sldId id="308" r:id="rId20"/>
+    <p:sldId id="309" r:id="rId21"/>
+    <p:sldId id="310" r:id="rId22"/>
+    <p:sldId id="311" r:id="rId23"/>
+    <p:sldId id="303" r:id="rId24"/>
   </p:sldIdLst>
   <p:sldSz cx="9144000" cy="5143500" type="screen16x9"/>
   <p:notesSz cx="9144000" cy="6858000"/>
@@ -358,6 +359,111 @@
         <p:cNvPr id="1" name="">
           <a:extLst>
             <a:ext uri="{FF2B5EF4-FFF2-40B4-BE49-F238E27FC236}">
+              <a16:creationId xmlns:a16="http://schemas.microsoft.com/office/drawing/2014/main" id="{BD9713E8-7E23-C53F-A2B7-7DA3FC6B053C}"/>
+            </a:ext>
+          </a:extLst>
+        </p:cNvPr>
+        <p:cNvGrpSpPr/>
+        <p:nvPr/>
+      </p:nvGrpSpPr>
+      <p:grpSpPr>
+        <a:xfrm>
+          <a:off x="0" y="0"/>
+          <a:ext cx="0" cy="0"/>
+          <a:chOff x="0" y="0"/>
+          <a:chExt cx="0" cy="0"/>
+        </a:xfrm>
+      </p:grpSpPr>
+      <p:sp>
+        <p:nvSpPr>
+          <p:cNvPr id="2" name="Slide Image Placeholder 1">
+            <a:extLst>
+              <a:ext uri="{FF2B5EF4-FFF2-40B4-BE49-F238E27FC236}">
+                <a16:creationId xmlns:a16="http://schemas.microsoft.com/office/drawing/2014/main" id="{57D82575-8C9D-EC7D-86DD-DC4B643AB3B7}"/>
+              </a:ext>
+            </a:extLst>
+          </p:cNvPr>
+          <p:cNvSpPr>
+            <a:spLocks noGrp="1" noRot="1" noChangeAspect="1"/>
+          </p:cNvSpPr>
+          <p:nvPr>
+            <p:ph type="sldImg"/>
+          </p:nvPr>
+        </p:nvSpPr>
+        <p:spPr>
+          <a:xfrm>
+            <a:off x="2514600" y="857250"/>
+            <a:ext cx="4114800" cy="2314575"/>
+          </a:xfrm>
+          <a:prstGeom prst="rect">
+            <a:avLst/>
+          </a:prstGeom>
+          <a:noFill/>
+          <a:ln w="12700">
+            <a:solidFill>
+              <a:prstClr val="black"/>
+            </a:solidFill>
+          </a:ln>
+        </p:spPr>
+      </p:sp>
+      <p:sp>
+        <p:nvSpPr>
+          <p:cNvPr id="3" name="Notes Placeholder 2">
+            <a:extLst>
+              <a:ext uri="{FF2B5EF4-FFF2-40B4-BE49-F238E27FC236}">
+                <a16:creationId xmlns:a16="http://schemas.microsoft.com/office/drawing/2014/main" id="{F69E6708-94EC-1D21-425B-EF7C3C48E725}"/>
+              </a:ext>
+            </a:extLst>
+          </p:cNvPr>
+          <p:cNvSpPr>
+            <a:spLocks noGrp="1"/>
+          </p:cNvSpPr>
+          <p:nvPr>
+            <p:ph type="body" idx="1"/>
+          </p:nvPr>
+        </p:nvSpPr>
+        <p:spPr>
+          <a:xfrm>
+            <a:off x="914400" y="3300413"/>
+            <a:ext cx="7315200" cy="2700337"/>
+          </a:xfrm>
+          <a:prstGeom prst="rect">
+            <a:avLst/>
+          </a:prstGeom>
+        </p:spPr>
+        <p:txBody>
+          <a:bodyPr/>
+          <a:lstStyle/>
+          <a:p>
+            <a:pPr marL="171450" indent="-171450">
+              <a:buFontTx/>
+              <a:buChar char="-"/>
+            </a:pPr>
+            <a:endParaRPr lang="en-US" dirty="0"/>
+          </a:p>
+        </p:txBody>
+      </p:sp>
+    </p:spTree>
+    <p:extLst>
+      <p:ext uri="{BB962C8B-B14F-4D97-AF65-F5344CB8AC3E}">
+        <p14:creationId xmlns:p14="http://schemas.microsoft.com/office/powerpoint/2010/main" val="376915049"/>
+      </p:ext>
+    </p:extLst>
+  </p:cSld>
+  <p:clrMapOvr>
+    <a:masterClrMapping/>
+  </p:clrMapOvr>
+</p:notes>
+</file>
+
+<file path=ppt/notesSlides/notesSlide11.xml><?xml version="1.0" encoding="utf-8"?>
+<p:notes xmlns:a="http://schemas.openxmlformats.org/drawingml/2006/main" xmlns:r="http://schemas.openxmlformats.org/officeDocument/2006/relationships" xmlns:p="http://schemas.openxmlformats.org/presentationml/2006/main">
+  <p:cSld>
+    <p:spTree>
+      <p:nvGrpSpPr>
+        <p:cNvPr id="1" name="">
+          <a:extLst>
+            <a:ext uri="{FF2B5EF4-FFF2-40B4-BE49-F238E27FC236}">
               <a16:creationId xmlns:a16="http://schemas.microsoft.com/office/drawing/2014/main" id="{F8913A74-A868-DB05-9DE4-3163F367B014}"/>
             </a:ext>
           </a:extLst>
@@ -455,7 +561,7 @@
 </p:notes>
 </file>
 
-<file path=ppt/notesSlides/notesSlide11.xml><?xml version="1.0" encoding="utf-8"?>
+<file path=ppt/notesSlides/notesSlide12.xml><?xml version="1.0" encoding="utf-8"?>
 <p:notes xmlns:a="http://schemas.openxmlformats.org/drawingml/2006/main" xmlns:r="http://schemas.openxmlformats.org/officeDocument/2006/relationships" xmlns:p="http://schemas.openxmlformats.org/presentationml/2006/main">
   <p:cSld>
     <p:spTree>
@@ -560,7 +666,7 @@
 </p:notes>
 </file>
 
-<file path=ppt/notesSlides/notesSlide12.xml><?xml version="1.0" encoding="utf-8"?>
+<file path=ppt/notesSlides/notesSlide13.xml><?xml version="1.0" encoding="utf-8"?>
 <p:notes xmlns:a="http://schemas.openxmlformats.org/drawingml/2006/main" xmlns:r="http://schemas.openxmlformats.org/officeDocument/2006/relationships" xmlns:p="http://schemas.openxmlformats.org/presentationml/2006/main">
   <p:cSld>
     <p:spTree>
@@ -665,7 +771,7 @@
 </p:notes>
 </file>
 
-<file path=ppt/notesSlides/notesSlide13.xml><?xml version="1.0" encoding="utf-8"?>
+<file path=ppt/notesSlides/notesSlide14.xml><?xml version="1.0" encoding="utf-8"?>
 <p:notes xmlns:a="http://schemas.openxmlformats.org/drawingml/2006/main" xmlns:r="http://schemas.openxmlformats.org/officeDocument/2006/relationships" xmlns:p="http://schemas.openxmlformats.org/presentationml/2006/main">
   <p:cSld>
     <p:spTree>
@@ -753,10 +859,7 @@
               <a:buFontTx/>
               <a:buNone/>
             </a:pPr>
-            <a:r>
-              <a:rPr lang="en-US" dirty="0"/>
-              <a:t>- black: discard</a:t>
-            </a:r>
+            <a:endParaRPr lang="en-US" dirty="0"/>
           </a:p>
         </p:txBody>
       </p:sp>
@@ -773,7 +876,7 @@
 </p:notes>
 </file>
 
-<file path=ppt/notesSlides/notesSlide14.xml><?xml version="1.0" encoding="utf-8"?>
+<file path=ppt/notesSlides/notesSlide15.xml><?xml version="1.0" encoding="utf-8"?>
 <p:notes xmlns:a="http://schemas.openxmlformats.org/drawingml/2006/main" xmlns:r="http://schemas.openxmlformats.org/officeDocument/2006/relationships" xmlns:p="http://schemas.openxmlformats.org/presentationml/2006/main">
   <p:cSld>
     <p:spTree>
@@ -878,7 +981,7 @@
 </p:notes>
 </file>
 
-<file path=ppt/notesSlides/notesSlide15.xml><?xml version="1.0" encoding="utf-8"?>
+<file path=ppt/notesSlides/notesSlide16.xml><?xml version="1.0" encoding="utf-8"?>
 <p:notes xmlns:a="http://schemas.openxmlformats.org/drawingml/2006/main" xmlns:r="http://schemas.openxmlformats.org/officeDocument/2006/relationships" xmlns:p="http://schemas.openxmlformats.org/presentationml/2006/main">
   <p:cSld>
     <p:spTree>
@@ -983,7 +1086,7 @@
 </p:notes>
 </file>
 
-<file path=ppt/notesSlides/notesSlide16.xml><?xml version="1.0" encoding="utf-8"?>
+<file path=ppt/notesSlides/notesSlide17.xml><?xml version="1.0" encoding="utf-8"?>
 <p:notes xmlns:a="http://schemas.openxmlformats.org/drawingml/2006/main" xmlns:r="http://schemas.openxmlformats.org/officeDocument/2006/relationships" xmlns:p="http://schemas.openxmlformats.org/presentationml/2006/main">
   <p:cSld>
     <p:spTree>
@@ -1091,7 +1194,7 @@
 </p:notes>
 </file>
 
-<file path=ppt/notesSlides/notesSlide17.xml><?xml version="1.0" encoding="utf-8"?>
+<file path=ppt/notesSlides/notesSlide18.xml><?xml version="1.0" encoding="utf-8"?>
 <p:notes xmlns:a="http://schemas.openxmlformats.org/drawingml/2006/main" xmlns:r="http://schemas.openxmlformats.org/officeDocument/2006/relationships" xmlns:p="http://schemas.openxmlformats.org/presentationml/2006/main">
   <p:cSld>
     <p:spTree>
@@ -1196,7 +1299,7 @@
 </p:notes>
 </file>
 
-<file path=ppt/notesSlides/notesSlide18.xml><?xml version="1.0" encoding="utf-8"?>
+<file path=ppt/notesSlides/notesSlide19.xml><?xml version="1.0" encoding="utf-8"?>
 <p:notes xmlns:a="http://schemas.openxmlformats.org/drawingml/2006/main" xmlns:r="http://schemas.openxmlformats.org/officeDocument/2006/relationships" xmlns:p="http://schemas.openxmlformats.org/presentationml/2006/main">
   <p:cSld>
     <p:spTree>
@@ -1301,7 +1404,90 @@
 </p:notes>
 </file>
 
-<file path=ppt/notesSlides/notesSlide19.xml><?xml version="1.0" encoding="utf-8"?>
+<file path=ppt/notesSlides/notesSlide2.xml><?xml version="1.0" encoding="utf-8"?>
+<p:notes xmlns:a="http://schemas.openxmlformats.org/drawingml/2006/main" xmlns:r="http://schemas.openxmlformats.org/officeDocument/2006/relationships" xmlns:p="http://schemas.openxmlformats.org/presentationml/2006/main">
+  <p:cSld>
+    <p:spTree>
+      <p:nvGrpSpPr>
+        <p:cNvPr id="1" name=""/>
+        <p:cNvGrpSpPr/>
+        <p:nvPr/>
+      </p:nvGrpSpPr>
+      <p:grpSpPr>
+        <a:xfrm>
+          <a:off x="0" y="0"/>
+          <a:ext cx="0" cy="0"/>
+          <a:chOff x="0" y="0"/>
+          <a:chExt cx="0" cy="0"/>
+        </a:xfrm>
+      </p:grpSpPr>
+      <p:sp>
+        <p:nvSpPr>
+          <p:cNvPr id="2" name="Slide Image Placeholder 1"/>
+          <p:cNvSpPr>
+            <a:spLocks noGrp="1" noRot="1" noChangeAspect="1"/>
+          </p:cNvSpPr>
+          <p:nvPr>
+            <p:ph type="sldImg"/>
+          </p:nvPr>
+        </p:nvSpPr>
+        <p:spPr>
+          <a:xfrm>
+            <a:off x="2514600" y="857250"/>
+            <a:ext cx="4114800" cy="2314575"/>
+          </a:xfrm>
+          <a:prstGeom prst="rect">
+            <a:avLst/>
+          </a:prstGeom>
+          <a:noFill/>
+          <a:ln w="12700">
+            <a:solidFill>
+              <a:prstClr val="black"/>
+            </a:solidFill>
+          </a:ln>
+        </p:spPr>
+      </p:sp>
+      <p:sp>
+        <p:nvSpPr>
+          <p:cNvPr id="3" name="Notes Placeholder 2"/>
+          <p:cNvSpPr>
+            <a:spLocks noGrp="1"/>
+          </p:cNvSpPr>
+          <p:nvPr>
+            <p:ph type="body" idx="1"/>
+          </p:nvPr>
+        </p:nvSpPr>
+        <p:spPr>
+          <a:xfrm>
+            <a:off x="914400" y="3300413"/>
+            <a:ext cx="7315200" cy="2700337"/>
+          </a:xfrm>
+          <a:prstGeom prst="rect">
+            <a:avLst/>
+          </a:prstGeom>
+        </p:spPr>
+        <p:txBody>
+          <a:bodyPr/>
+          <a:lstStyle/>
+          <a:p>
+            <a:endParaRPr lang="en-US" dirty="0"/>
+          </a:p>
+        </p:txBody>
+      </p:sp>
+    </p:spTree>
+    <p:extLst>
+      <p:ext uri="{BB962C8B-B14F-4D97-AF65-F5344CB8AC3E}">
+        <p14:creationId xmlns:p14="http://schemas.microsoft.com/office/powerpoint/2010/main" val="1496618303"/>
+      </p:ext>
+    </p:extLst>
+  </p:cSld>
+  <p:clrMapOvr>
+    <a:masterClrMapping/>
+  </p:clrMapOvr>
+</p:notes>
+</file>
+
+<file path=ppt/notesSlides/notesSlide20.xml><?xml version="1.0" encoding="utf-8"?>
 <p:notes xmlns:a="http://schemas.openxmlformats.org/drawingml/2006/main" xmlns:r="http://schemas.openxmlformats.org/officeDocument/2006/relationships" xmlns:p="http://schemas.openxmlformats.org/presentationml/2006/main">
   <p:cSld>
     <p:spTree>
@@ -1397,89 +1583,6 @@
     <p:extLst>
       <p:ext uri="{BB962C8B-B14F-4D97-AF65-F5344CB8AC3E}">
         <p14:creationId xmlns:p14="http://schemas.microsoft.com/office/powerpoint/2010/main" val="253353425"/>
-      </p:ext>
-    </p:extLst>
-  </p:cSld>
-  <p:clrMapOvr>
-    <a:masterClrMapping/>
-  </p:clrMapOvr>
-</p:notes>
-</file>
-
-<file path=ppt/notesSlides/notesSlide2.xml><?xml version="1.0" encoding="utf-8"?>
-<p:notes xmlns:a="http://schemas.openxmlformats.org/drawingml/2006/main" xmlns:r="http://schemas.openxmlformats.org/officeDocument/2006/relationships" xmlns:p="http://schemas.openxmlformats.org/presentationml/2006/main">
-  <p:cSld>
-    <p:spTree>
-      <p:nvGrpSpPr>
-        <p:cNvPr id="1" name=""/>
-        <p:cNvGrpSpPr/>
-        <p:nvPr/>
-      </p:nvGrpSpPr>
-      <p:grpSpPr>
-        <a:xfrm>
-          <a:off x="0" y="0"/>
-          <a:ext cx="0" cy="0"/>
-          <a:chOff x="0" y="0"/>
-          <a:chExt cx="0" cy="0"/>
-        </a:xfrm>
-      </p:grpSpPr>
-      <p:sp>
-        <p:nvSpPr>
-          <p:cNvPr id="2" name="Slide Image Placeholder 1"/>
-          <p:cNvSpPr>
-            <a:spLocks noGrp="1" noRot="1" noChangeAspect="1"/>
-          </p:cNvSpPr>
-          <p:nvPr>
-            <p:ph type="sldImg"/>
-          </p:nvPr>
-        </p:nvSpPr>
-        <p:spPr>
-          <a:xfrm>
-            <a:off x="2514600" y="857250"/>
-            <a:ext cx="4114800" cy="2314575"/>
-          </a:xfrm>
-          <a:prstGeom prst="rect">
-            <a:avLst/>
-          </a:prstGeom>
-          <a:noFill/>
-          <a:ln w="12700">
-            <a:solidFill>
-              <a:prstClr val="black"/>
-            </a:solidFill>
-          </a:ln>
-        </p:spPr>
-      </p:sp>
-      <p:sp>
-        <p:nvSpPr>
-          <p:cNvPr id="3" name="Notes Placeholder 2"/>
-          <p:cNvSpPr>
-            <a:spLocks noGrp="1"/>
-          </p:cNvSpPr>
-          <p:nvPr>
-            <p:ph type="body" idx="1"/>
-          </p:nvPr>
-        </p:nvSpPr>
-        <p:spPr>
-          <a:xfrm>
-            <a:off x="914400" y="3300413"/>
-            <a:ext cx="7315200" cy="2700337"/>
-          </a:xfrm>
-          <a:prstGeom prst="rect">
-            <a:avLst/>
-          </a:prstGeom>
-        </p:spPr>
-        <p:txBody>
-          <a:bodyPr/>
-          <a:lstStyle/>
-          <a:p>
-            <a:endParaRPr lang="en-US" dirty="0"/>
-          </a:p>
-        </p:txBody>
-      </p:sp>
-    </p:spTree>
-    <p:extLst>
-      <p:ext uri="{BB962C8B-B14F-4D97-AF65-F5344CB8AC3E}">
-        <p14:creationId xmlns:p14="http://schemas.microsoft.com/office/powerpoint/2010/main" val="1496618303"/>
       </p:ext>
     </p:extLst>
   </p:cSld>
@@ -1812,7 +1915,7 @@
         <p:cNvPr id="1" name="">
           <a:extLst>
             <a:ext uri="{FF2B5EF4-FFF2-40B4-BE49-F238E27FC236}">
-              <a16:creationId xmlns:a16="http://schemas.microsoft.com/office/drawing/2014/main" id="{BD14973B-E51E-FE48-A457-2C39A84F31B2}"/>
+              <a16:creationId xmlns:a16="http://schemas.microsoft.com/office/drawing/2014/main" id="{318B1621-8BDB-B4DD-BFF6-4A4A13EAF313}"/>
             </a:ext>
           </a:extLst>
         </p:cNvPr>
@@ -1832,7 +1935,7 @@
           <p:cNvPr id="2" name="Slide Image Placeholder 1">
             <a:extLst>
               <a:ext uri="{FF2B5EF4-FFF2-40B4-BE49-F238E27FC236}">
-                <a16:creationId xmlns:a16="http://schemas.microsoft.com/office/drawing/2014/main" id="{E3C78778-BE6F-A199-3EDC-09525DED6F07}"/>
+                <a16:creationId xmlns:a16="http://schemas.microsoft.com/office/drawing/2014/main" id="{34812535-F9D6-A891-2506-2703DFF1EFC0}"/>
               </a:ext>
             </a:extLst>
           </p:cNvPr>
@@ -1864,7 +1967,7 @@
           <p:cNvPr id="3" name="Notes Placeholder 2">
             <a:extLst>
               <a:ext uri="{FF2B5EF4-FFF2-40B4-BE49-F238E27FC236}">
-                <a16:creationId xmlns:a16="http://schemas.microsoft.com/office/drawing/2014/main" id="{61E4949C-59CE-8F46-43E0-68FFBF39751F}"/>
+                <a16:creationId xmlns:a16="http://schemas.microsoft.com/office/drawing/2014/main" id="{CC7F941D-0BFD-DAD0-FD22-D9BB545C30D6}"/>
               </a:ext>
             </a:extLst>
           </p:cNvPr>
@@ -1892,27 +1995,14 @@
               <a:buFontTx/>
               <a:buChar char="-"/>
             </a:pPr>
-            <a:r>
-              <a:rPr lang="en-US" dirty="0"/>
-              <a:t>TUSREC24, 72 scans</a:t>
-            </a:r>
-          </a:p>
-          <a:p>
-            <a:pPr marL="171450" indent="-171450">
-              <a:buFontTx/>
-              <a:buChar char="-"/>
-            </a:pPr>
-            <a:r>
-              <a:rPr lang="en-US" dirty="0"/>
-              <a:t>Slight correlation between transform magnitude and error, especially for large values</a:t>
-            </a:r>
+            <a:endParaRPr lang="en-US" dirty="0"/>
           </a:p>
         </p:txBody>
       </p:sp>
     </p:spTree>
     <p:extLst>
       <p:ext uri="{BB962C8B-B14F-4D97-AF65-F5344CB8AC3E}">
-        <p14:creationId xmlns:p14="http://schemas.microsoft.com/office/powerpoint/2010/main" val="596583392"/>
+        <p14:creationId xmlns:p14="http://schemas.microsoft.com/office/powerpoint/2010/main" val="3162423440"/>
       </p:ext>
     </p:extLst>
   </p:cSld>
@@ -1923,6 +2013,198 @@
 </file>
 
 <file path=ppt/notesSlides/notesSlide7.xml><?xml version="1.0" encoding="utf-8"?>
+<p:notes xmlns:a="http://schemas.openxmlformats.org/drawingml/2006/main" xmlns:r="http://schemas.openxmlformats.org/officeDocument/2006/relationships" xmlns:p="http://schemas.openxmlformats.org/presentationml/2006/main">
+  <p:cSld>
+    <p:spTree>
+      <p:nvGrpSpPr>
+        <p:cNvPr id="1" name="">
+          <a:extLst>
+            <a:ext uri="{FF2B5EF4-FFF2-40B4-BE49-F238E27FC236}">
+              <a16:creationId xmlns:a16="http://schemas.microsoft.com/office/drawing/2014/main" id="{CFA89E11-F854-381E-81FF-78627306C2E4}"/>
+            </a:ext>
+          </a:extLst>
+        </p:cNvPr>
+        <p:cNvGrpSpPr/>
+        <p:nvPr/>
+      </p:nvGrpSpPr>
+      <p:grpSpPr>
+        <a:xfrm>
+          <a:off x="0" y="0"/>
+          <a:ext cx="0" cy="0"/>
+          <a:chOff x="0" y="0"/>
+          <a:chExt cx="0" cy="0"/>
+        </a:xfrm>
+      </p:grpSpPr>
+      <p:sp>
+        <p:nvSpPr>
+          <p:cNvPr id="2" name="Slide Image Placeholder 1">
+            <a:extLst>
+              <a:ext uri="{FF2B5EF4-FFF2-40B4-BE49-F238E27FC236}">
+                <a16:creationId xmlns:a16="http://schemas.microsoft.com/office/drawing/2014/main" id="{29AD516A-FCAB-3BAD-E4AA-0D468D9B7607}"/>
+              </a:ext>
+            </a:extLst>
+          </p:cNvPr>
+          <p:cNvSpPr>
+            <a:spLocks noGrp="1" noRot="1" noChangeAspect="1"/>
+          </p:cNvSpPr>
+          <p:nvPr>
+            <p:ph type="sldImg"/>
+          </p:nvPr>
+        </p:nvSpPr>
+        <p:spPr>
+          <a:xfrm>
+            <a:off x="2514600" y="857250"/>
+            <a:ext cx="4114800" cy="2314575"/>
+          </a:xfrm>
+          <a:prstGeom prst="rect">
+            <a:avLst/>
+          </a:prstGeom>
+          <a:noFill/>
+          <a:ln w="12700">
+            <a:solidFill>
+              <a:prstClr val="black"/>
+            </a:solidFill>
+          </a:ln>
+        </p:spPr>
+      </p:sp>
+      <p:sp>
+        <p:nvSpPr>
+          <p:cNvPr id="3" name="Notes Placeholder 2">
+            <a:extLst>
+              <a:ext uri="{FF2B5EF4-FFF2-40B4-BE49-F238E27FC236}">
+                <a16:creationId xmlns:a16="http://schemas.microsoft.com/office/drawing/2014/main" id="{D8821611-294A-235E-8221-D36A650DEAFE}"/>
+              </a:ext>
+            </a:extLst>
+          </p:cNvPr>
+          <p:cNvSpPr>
+            <a:spLocks noGrp="1"/>
+          </p:cNvSpPr>
+          <p:nvPr>
+            <p:ph type="body" idx="1"/>
+          </p:nvPr>
+        </p:nvSpPr>
+        <p:spPr>
+          <a:xfrm>
+            <a:off x="914400" y="3300413"/>
+            <a:ext cx="7315200" cy="2700337"/>
+          </a:xfrm>
+          <a:prstGeom prst="rect">
+            <a:avLst/>
+          </a:prstGeom>
+        </p:spPr>
+        <p:txBody>
+          <a:bodyPr/>
+          <a:lstStyle/>
+          <a:p>
+            <a:pPr marL="171450" marR="0" lvl="0" indent="-171450" algn="l" defTabSz="285750" rtl="0" eaLnBrk="1" fontAlgn="auto" latinLnBrk="0" hangingPunct="1">
+              <a:lnSpc>
+                <a:spcPct val="100000"/>
+              </a:lnSpc>
+              <a:spcBef>
+                <a:spcPts val="0"/>
+              </a:spcBef>
+              <a:spcAft>
+                <a:spcPts val="0"/>
+              </a:spcAft>
+              <a:buClrTx/>
+              <a:buSzTx/>
+              <a:buFontTx/>
+              <a:buChar char="-"/>
+              <a:tabLst/>
+              <a:defRPr/>
+            </a:pPr>
+            <a:r>
+              <a:rPr lang="en-US" dirty="0"/>
+              <a:t>TUSREC24, one scan each</a:t>
+            </a:r>
+          </a:p>
+          <a:p>
+            <a:pPr marL="171450" marR="0" lvl="0" indent="-171450" algn="l" defTabSz="285750" rtl="0" eaLnBrk="1" fontAlgn="auto" latinLnBrk="0" hangingPunct="1">
+              <a:lnSpc>
+                <a:spcPct val="100000"/>
+              </a:lnSpc>
+              <a:spcBef>
+                <a:spcPts val="0"/>
+              </a:spcBef>
+              <a:spcAft>
+                <a:spcPts val="0"/>
+              </a:spcAft>
+              <a:buClrTx/>
+              <a:buSzTx/>
+              <a:buFontTx/>
+              <a:buChar char="-"/>
+              <a:tabLst/>
+              <a:defRPr/>
+            </a:pPr>
+            <a:r>
+              <a:rPr lang="en-US" dirty="0"/>
+              <a:t>Only translation</a:t>
+            </a:r>
+          </a:p>
+          <a:p>
+            <a:pPr marL="171450" marR="0" lvl="0" indent="-171450" algn="l" defTabSz="285750" rtl="0" eaLnBrk="1" fontAlgn="auto" latinLnBrk="0" hangingPunct="1">
+              <a:lnSpc>
+                <a:spcPct val="100000"/>
+              </a:lnSpc>
+              <a:spcBef>
+                <a:spcPts val="0"/>
+              </a:spcBef>
+              <a:spcAft>
+                <a:spcPts val="0"/>
+              </a:spcAft>
+              <a:buClrTx/>
+              <a:buSzTx/>
+              <a:buFontTx/>
+              <a:buChar char="-"/>
+              <a:tabLst/>
+              <a:defRPr/>
+            </a:pPr>
+            <a:r>
+              <a:rPr lang="en-US" dirty="0"/>
+              <a:t>General direction is fine</a:t>
+            </a:r>
+          </a:p>
+          <a:p>
+            <a:pPr marL="171450" indent="-171450">
+              <a:buFontTx/>
+              <a:buChar char="-"/>
+            </a:pPr>
+            <a:r>
+              <a:rPr lang="en-US" dirty="0"/>
+              <a:t>Again no jitter for </a:t>
+            </a:r>
+            <a:r>
+              <a:rPr lang="en-US" dirty="0" err="1"/>
+              <a:t>DualTrack</a:t>
+            </a:r>
+            <a:endParaRPr lang="en-US" dirty="0"/>
+          </a:p>
+          <a:p>
+            <a:pPr marL="171450" indent="-171450">
+              <a:buFontTx/>
+              <a:buChar char="-"/>
+            </a:pPr>
+            <a:r>
+              <a:rPr lang="en-US" dirty="0"/>
+              <a:t>IR retains jitter</a:t>
+            </a:r>
+          </a:p>
+        </p:txBody>
+      </p:sp>
+    </p:spTree>
+    <p:extLst>
+      <p:ext uri="{BB962C8B-B14F-4D97-AF65-F5344CB8AC3E}">
+        <p14:creationId xmlns:p14="http://schemas.microsoft.com/office/powerpoint/2010/main" val="4000627120"/>
+      </p:ext>
+    </p:extLst>
+  </p:cSld>
+  <p:clrMapOvr>
+    <a:masterClrMapping/>
+  </p:clrMapOvr>
+</p:notes>
+</file>
+
+<file path=ppt/notesSlides/notesSlide8.xml><?xml version="1.0" encoding="utf-8"?>
 <p:notes xmlns:a="http://schemas.openxmlformats.org/drawingml/2006/main" xmlns:r="http://schemas.openxmlformats.org/officeDocument/2006/relationships" xmlns:p="http://schemas.openxmlformats.org/presentationml/2006/main">
   <p:cSld>
     <p:spTree>
@@ -2058,7 +2340,7 @@
 </p:notes>
 </file>
 
-<file path=ppt/notesSlides/notesSlide8.xml><?xml version="1.0" encoding="utf-8"?>
+<file path=ppt/notesSlides/notesSlide9.xml><?xml version="1.0" encoding="utf-8"?>
 <p:notes xmlns:a="http://schemas.openxmlformats.org/drawingml/2006/main" xmlns:r="http://schemas.openxmlformats.org/officeDocument/2006/relationships" xmlns:p="http://schemas.openxmlformats.org/presentationml/2006/main">
   <p:cSld>
     <p:spTree>
@@ -2066,7 +2348,7 @@
         <p:cNvPr id="1" name="">
           <a:extLst>
             <a:ext uri="{FF2B5EF4-FFF2-40B4-BE49-F238E27FC236}">
-              <a16:creationId xmlns:a16="http://schemas.microsoft.com/office/drawing/2014/main" id="{CFA89E11-F854-381E-81FF-78627306C2E4}"/>
+              <a16:creationId xmlns:a16="http://schemas.microsoft.com/office/drawing/2014/main" id="{BD14973B-E51E-FE48-A457-2C39A84F31B2}"/>
             </a:ext>
           </a:extLst>
         </p:cNvPr>
@@ -2086,7 +2368,7 @@
           <p:cNvPr id="2" name="Slide Image Placeholder 1">
             <a:extLst>
               <a:ext uri="{FF2B5EF4-FFF2-40B4-BE49-F238E27FC236}">
-                <a16:creationId xmlns:a16="http://schemas.microsoft.com/office/drawing/2014/main" id="{29AD516A-FCAB-3BAD-E4AA-0D468D9B7607}"/>
+                <a16:creationId xmlns:a16="http://schemas.microsoft.com/office/drawing/2014/main" id="{E3C78778-BE6F-A199-3EDC-09525DED6F07}"/>
               </a:ext>
             </a:extLst>
           </p:cNvPr>
@@ -2118,7 +2400,7 @@
           <p:cNvPr id="3" name="Notes Placeholder 2">
             <a:extLst>
               <a:ext uri="{FF2B5EF4-FFF2-40B4-BE49-F238E27FC236}">
-                <a16:creationId xmlns:a16="http://schemas.microsoft.com/office/drawing/2014/main" id="{D8821611-294A-235E-8221-D36A650DEAFE}"/>
+                <a16:creationId xmlns:a16="http://schemas.microsoft.com/office/drawing/2014/main" id="{61E4949C-59CE-8F46-43E0-68FFBF39751F}"/>
               </a:ext>
             </a:extLst>
           </p:cNvPr>
@@ -2142,65 +2424,14 @@
           <a:bodyPr/>
           <a:lstStyle/>
           <a:p>
-            <a:pPr marL="171450" marR="0" lvl="0" indent="-171450" algn="l" defTabSz="285750" rtl="0" eaLnBrk="1" fontAlgn="auto" latinLnBrk="0" hangingPunct="1">
-              <a:lnSpc>
-                <a:spcPct val="100000"/>
-              </a:lnSpc>
-              <a:spcBef>
-                <a:spcPts val="0"/>
-              </a:spcBef>
-              <a:spcAft>
-                <a:spcPts val="0"/>
-              </a:spcAft>
-              <a:buClrTx/>
-              <a:buSzTx/>
-              <a:buFontTx/>
-              <a:buChar char="-"/>
-              <a:tabLst/>
-              <a:defRPr/>
-            </a:pPr>
-            <a:r>
-              <a:rPr lang="en-US" dirty="0"/>
-              <a:t>TUSREC24, one scan each</a:t>
-            </a:r>
-          </a:p>
-          <a:p>
-            <a:pPr marL="171450" marR="0" lvl="0" indent="-171450" algn="l" defTabSz="285750" rtl="0" eaLnBrk="1" fontAlgn="auto" latinLnBrk="0" hangingPunct="1">
-              <a:lnSpc>
-                <a:spcPct val="100000"/>
-              </a:lnSpc>
-              <a:spcBef>
-                <a:spcPts val="0"/>
-              </a:spcBef>
-              <a:spcAft>
-                <a:spcPts val="0"/>
-              </a:spcAft>
-              <a:buClrTx/>
-              <a:buSzTx/>
-              <a:buFontTx/>
-              <a:buChar char="-"/>
-              <a:tabLst/>
-              <a:defRPr/>
-            </a:pPr>
-            <a:r>
-              <a:rPr lang="en-US" dirty="0"/>
-              <a:t>General direction is fine</a:t>
-            </a:r>
-          </a:p>
-          <a:p>
             <a:pPr marL="171450" indent="-171450">
               <a:buFontTx/>
               <a:buChar char="-"/>
             </a:pPr>
             <a:r>
               <a:rPr lang="en-US" dirty="0"/>
-              <a:t>Again no jitter for </a:t>
+              <a:t>TUSREC24, 72 scans</a:t>
             </a:r>
-            <a:r>
-              <a:rPr lang="en-US" dirty="0" err="1"/>
-              <a:t>DualTrack</a:t>
-            </a:r>
-            <a:endParaRPr lang="en-US" dirty="0"/>
           </a:p>
           <a:p>
             <a:pPr marL="171450" indent="-171450">
@@ -2209,7 +2440,7 @@
             </a:pPr>
             <a:r>
               <a:rPr lang="en-US" dirty="0"/>
-              <a:t>IR retains jitter</a:t>
+              <a:t>Slight correlation between transform magnitude and error, especially for large values</a:t>
             </a:r>
           </a:p>
         </p:txBody>
@@ -2217,112 +2448,7 @@
     </p:spTree>
     <p:extLst>
       <p:ext uri="{BB962C8B-B14F-4D97-AF65-F5344CB8AC3E}">
-        <p14:creationId xmlns:p14="http://schemas.microsoft.com/office/powerpoint/2010/main" val="4000627120"/>
-      </p:ext>
-    </p:extLst>
-  </p:cSld>
-  <p:clrMapOvr>
-    <a:masterClrMapping/>
-  </p:clrMapOvr>
-</p:notes>
-</file>
-
-<file path=ppt/notesSlides/notesSlide9.xml><?xml version="1.0" encoding="utf-8"?>
-<p:notes xmlns:a="http://schemas.openxmlformats.org/drawingml/2006/main" xmlns:r="http://schemas.openxmlformats.org/officeDocument/2006/relationships" xmlns:p="http://schemas.openxmlformats.org/presentationml/2006/main">
-  <p:cSld>
-    <p:spTree>
-      <p:nvGrpSpPr>
-        <p:cNvPr id="1" name="">
-          <a:extLst>
-            <a:ext uri="{FF2B5EF4-FFF2-40B4-BE49-F238E27FC236}">
-              <a16:creationId xmlns:a16="http://schemas.microsoft.com/office/drawing/2014/main" id="{BD9713E8-7E23-C53F-A2B7-7DA3FC6B053C}"/>
-            </a:ext>
-          </a:extLst>
-        </p:cNvPr>
-        <p:cNvGrpSpPr/>
-        <p:nvPr/>
-      </p:nvGrpSpPr>
-      <p:grpSpPr>
-        <a:xfrm>
-          <a:off x="0" y="0"/>
-          <a:ext cx="0" cy="0"/>
-          <a:chOff x="0" y="0"/>
-          <a:chExt cx="0" cy="0"/>
-        </a:xfrm>
-      </p:grpSpPr>
-      <p:sp>
-        <p:nvSpPr>
-          <p:cNvPr id="2" name="Slide Image Placeholder 1">
-            <a:extLst>
-              <a:ext uri="{FF2B5EF4-FFF2-40B4-BE49-F238E27FC236}">
-                <a16:creationId xmlns:a16="http://schemas.microsoft.com/office/drawing/2014/main" id="{57D82575-8C9D-EC7D-86DD-DC4B643AB3B7}"/>
-              </a:ext>
-            </a:extLst>
-          </p:cNvPr>
-          <p:cNvSpPr>
-            <a:spLocks noGrp="1" noRot="1" noChangeAspect="1"/>
-          </p:cNvSpPr>
-          <p:nvPr>
-            <p:ph type="sldImg"/>
-          </p:nvPr>
-        </p:nvSpPr>
-        <p:spPr>
-          <a:xfrm>
-            <a:off x="2514600" y="857250"/>
-            <a:ext cx="4114800" cy="2314575"/>
-          </a:xfrm>
-          <a:prstGeom prst="rect">
-            <a:avLst/>
-          </a:prstGeom>
-          <a:noFill/>
-          <a:ln w="12700">
-            <a:solidFill>
-              <a:prstClr val="black"/>
-            </a:solidFill>
-          </a:ln>
-        </p:spPr>
-      </p:sp>
-      <p:sp>
-        <p:nvSpPr>
-          <p:cNvPr id="3" name="Notes Placeholder 2">
-            <a:extLst>
-              <a:ext uri="{FF2B5EF4-FFF2-40B4-BE49-F238E27FC236}">
-                <a16:creationId xmlns:a16="http://schemas.microsoft.com/office/drawing/2014/main" id="{F69E6708-94EC-1D21-425B-EF7C3C48E725}"/>
-              </a:ext>
-            </a:extLst>
-          </p:cNvPr>
-          <p:cNvSpPr>
-            <a:spLocks noGrp="1"/>
-          </p:cNvSpPr>
-          <p:nvPr>
-            <p:ph type="body" idx="1"/>
-          </p:nvPr>
-        </p:nvSpPr>
-        <p:spPr>
-          <a:xfrm>
-            <a:off x="914400" y="3300413"/>
-            <a:ext cx="7315200" cy="2700337"/>
-          </a:xfrm>
-          <a:prstGeom prst="rect">
-            <a:avLst/>
-          </a:prstGeom>
-        </p:spPr>
-        <p:txBody>
-          <a:bodyPr/>
-          <a:lstStyle/>
-          <a:p>
-            <a:pPr marL="171450" indent="-171450">
-              <a:buFontTx/>
-              <a:buChar char="-"/>
-            </a:pPr>
-            <a:endParaRPr lang="en-US" dirty="0"/>
-          </a:p>
-        </p:txBody>
-      </p:sp>
-    </p:spTree>
-    <p:extLst>
-      <p:ext uri="{BB962C8B-B14F-4D97-AF65-F5344CB8AC3E}">
-        <p14:creationId xmlns:p14="http://schemas.microsoft.com/office/powerpoint/2010/main" val="376915049"/>
+        <p14:creationId xmlns:p14="http://schemas.microsoft.com/office/powerpoint/2010/main" val="596583392"/>
       </p:ext>
     </p:extLst>
   </p:cSld>
@@ -4068,6 +4194,1146 @@
         <p:cNvPr id="1" name="">
           <a:extLst>
             <a:ext uri="{FF2B5EF4-FFF2-40B4-BE49-F238E27FC236}">
+              <a16:creationId xmlns:a16="http://schemas.microsoft.com/office/drawing/2014/main" id="{0CDEE615-AAEB-85FD-6A44-E1614A639C07}"/>
+            </a:ext>
+          </a:extLst>
+        </p:cNvPr>
+        <p:cNvGrpSpPr/>
+        <p:nvPr/>
+      </p:nvGrpSpPr>
+      <p:grpSpPr>
+        <a:xfrm>
+          <a:off x="0" y="0"/>
+          <a:ext cx="0" cy="0"/>
+          <a:chOff x="0" y="0"/>
+          <a:chExt cx="0" cy="0"/>
+        </a:xfrm>
+      </p:grpSpPr>
+      <p:sp>
+        <p:nvSpPr>
+          <p:cNvPr id="4" name="Title 3">
+            <a:extLst>
+              <a:ext uri="{FF2B5EF4-FFF2-40B4-BE49-F238E27FC236}">
+                <a16:creationId xmlns:a16="http://schemas.microsoft.com/office/drawing/2014/main" id="{859D0D0E-5139-8637-F4ED-74D6CAAA275C}"/>
+              </a:ext>
+            </a:extLst>
+          </p:cNvPr>
+          <p:cNvSpPr>
+            <a:spLocks noGrp="1"/>
+          </p:cNvSpPr>
+          <p:nvPr>
+            <p:ph type="title" idx="2"/>
+          </p:nvPr>
+        </p:nvSpPr>
+        <p:spPr/>
+        <p:txBody>
+          <a:bodyPr/>
+          <a:lstStyle/>
+          <a:p>
+            <a:pPr marL="0">
+              <a:buClr>
+                <a:srgbClr val="9E3611"/>
+              </a:buClr>
+            </a:pPr>
+            <a:r>
+              <a:rPr lang="en-US" sz="2400" dirty="0">
+                <a:ea typeface="游ゴシック Medium"/>
+                <a:cs typeface="Times New Roman"/>
+              </a:rPr>
+              <a:t>   Image Registration: Problem</a:t>
+            </a:r>
+          </a:p>
+        </p:txBody>
+      </p:sp>
+      <p:sp>
+        <p:nvSpPr>
+          <p:cNvPr id="5" name="Text Placeholder 1">
+            <a:extLst>
+              <a:ext uri="{FF2B5EF4-FFF2-40B4-BE49-F238E27FC236}">
+                <a16:creationId xmlns:a16="http://schemas.microsoft.com/office/drawing/2014/main" id="{26618D5B-77FA-8994-A5A3-4939BDC58824}"/>
+              </a:ext>
+            </a:extLst>
+          </p:cNvPr>
+          <p:cNvSpPr txBox="1">
+            <a:spLocks/>
+          </p:cNvSpPr>
+          <p:nvPr/>
+        </p:nvSpPr>
+        <p:spPr>
+          <a:xfrm>
+            <a:off x="323528" y="587025"/>
+            <a:ext cx="8218099" cy="4305013"/>
+          </a:xfrm>
+          <a:prstGeom prst="rect">
+            <a:avLst/>
+          </a:prstGeom>
+          <a:noFill/>
+        </p:spPr>
+        <p:txBody>
+          <a:bodyPr vert="horz" lIns="91440" tIns="45720" rIns="91440" bIns="45720" rtlCol="0" anchor="t">
+            <a:noAutofit/>
+          </a:bodyPr>
+          <a:lstStyle>
+            <a:lvl1pPr marL="137160" indent="-137160" algn="l" defTabSz="685800" rtl="0" eaLnBrk="1" latinLnBrk="0" hangingPunct="1">
+              <a:lnSpc>
+                <a:spcPct val="90000"/>
+              </a:lnSpc>
+              <a:spcBef>
+                <a:spcPts val="900"/>
+              </a:spcBef>
+              <a:buClr>
+                <a:schemeClr val="accent1">
+                  <a:lumMod val="75000"/>
+                </a:schemeClr>
+              </a:buClr>
+              <a:buSzPct val="100000"/>
+              <a:buFont typeface="Arial" panose="020B0604020202020204" pitchFamily="34" charset="0"/>
+              <a:buChar char="•"/>
+              <a:defRPr kumimoji="1" sz="1500" b="1" kern="1200">
+                <a:solidFill>
+                  <a:schemeClr val="tx1"/>
+                </a:solidFill>
+                <a:latin typeface="游ゴシック Medium" panose="020B0500000000000000" pitchFamily="50" charset="-128"/>
+                <a:ea typeface="游ゴシック Medium" panose="020B0500000000000000" pitchFamily="50" charset="-128"/>
+                <a:cs typeface="+mn-cs"/>
+              </a:defRPr>
+            </a:lvl1pPr>
+            <a:lvl2pPr marL="342900" indent="-137160" algn="l" defTabSz="685800" rtl="0" eaLnBrk="1" latinLnBrk="0" hangingPunct="1">
+              <a:lnSpc>
+                <a:spcPct val="90000"/>
+              </a:lnSpc>
+              <a:spcBef>
+                <a:spcPts val="300"/>
+              </a:spcBef>
+              <a:spcAft>
+                <a:spcPts val="150"/>
+              </a:spcAft>
+              <a:buClr>
+                <a:schemeClr val="accent1">
+                  <a:lumMod val="75000"/>
+                </a:schemeClr>
+              </a:buClr>
+              <a:buSzPct val="100000"/>
+              <a:buFont typeface="Arial" panose="020B0604020202020204" pitchFamily="34" charset="0"/>
+              <a:buChar char="•"/>
+              <a:defRPr kumimoji="1" sz="1350" b="1" kern="1200">
+                <a:solidFill>
+                  <a:schemeClr val="tx1"/>
+                </a:solidFill>
+                <a:latin typeface="游ゴシック Medium" panose="020B0500000000000000" pitchFamily="50" charset="-128"/>
+                <a:ea typeface="游ゴシック Medium" panose="020B0500000000000000" pitchFamily="50" charset="-128"/>
+                <a:cs typeface="+mn-cs"/>
+              </a:defRPr>
+            </a:lvl2pPr>
+            <a:lvl3pPr marL="548640" indent="-137160" algn="l" defTabSz="685800" rtl="0" eaLnBrk="1" latinLnBrk="0" hangingPunct="1">
+              <a:lnSpc>
+                <a:spcPct val="90000"/>
+              </a:lnSpc>
+              <a:spcBef>
+                <a:spcPts val="300"/>
+              </a:spcBef>
+              <a:spcAft>
+                <a:spcPts val="150"/>
+              </a:spcAft>
+              <a:buClr>
+                <a:schemeClr val="accent1">
+                  <a:lumMod val="75000"/>
+                </a:schemeClr>
+              </a:buClr>
+              <a:buSzPct val="100000"/>
+              <a:buFont typeface="Arial" panose="020B0604020202020204" pitchFamily="34" charset="0"/>
+              <a:buChar char="•"/>
+              <a:defRPr kumimoji="1" sz="1200" b="1" kern="1200">
+                <a:solidFill>
+                  <a:schemeClr val="tx1"/>
+                </a:solidFill>
+                <a:latin typeface="游ゴシック Medium" panose="020B0500000000000000" pitchFamily="50" charset="-128"/>
+                <a:ea typeface="游ゴシック Medium" panose="020B0500000000000000" pitchFamily="50" charset="-128"/>
+                <a:cs typeface="+mn-cs"/>
+              </a:defRPr>
+            </a:lvl3pPr>
+            <a:lvl4pPr marL="754380" indent="-137160" algn="l" defTabSz="685800" rtl="0" eaLnBrk="1" latinLnBrk="0" hangingPunct="1">
+              <a:lnSpc>
+                <a:spcPct val="90000"/>
+              </a:lnSpc>
+              <a:spcBef>
+                <a:spcPts val="300"/>
+              </a:spcBef>
+              <a:spcAft>
+                <a:spcPts val="150"/>
+              </a:spcAft>
+              <a:buClr>
+                <a:schemeClr val="accent1">
+                  <a:lumMod val="75000"/>
+                </a:schemeClr>
+              </a:buClr>
+              <a:buSzPct val="100000"/>
+              <a:buFont typeface="Arial" panose="020B0604020202020204" pitchFamily="34" charset="0"/>
+              <a:buChar char="•"/>
+              <a:defRPr kumimoji="1" sz="1200" b="1" kern="1200">
+                <a:solidFill>
+                  <a:schemeClr val="tx1"/>
+                </a:solidFill>
+                <a:latin typeface="游ゴシック Medium" panose="020B0500000000000000" pitchFamily="50" charset="-128"/>
+                <a:ea typeface="游ゴシック Medium" panose="020B0500000000000000" pitchFamily="50" charset="-128"/>
+                <a:cs typeface="+mn-cs"/>
+              </a:defRPr>
+            </a:lvl4pPr>
+            <a:lvl5pPr marL="960120" indent="-137160" algn="l" defTabSz="685800" rtl="0" eaLnBrk="1" latinLnBrk="0" hangingPunct="1">
+              <a:lnSpc>
+                <a:spcPct val="90000"/>
+              </a:lnSpc>
+              <a:spcBef>
+                <a:spcPts val="300"/>
+              </a:spcBef>
+              <a:spcAft>
+                <a:spcPts val="150"/>
+              </a:spcAft>
+              <a:buClr>
+                <a:schemeClr val="accent1">
+                  <a:lumMod val="75000"/>
+                </a:schemeClr>
+              </a:buClr>
+              <a:buSzPct val="100000"/>
+              <a:buFont typeface="Arial" panose="020B0604020202020204" pitchFamily="34" charset="0"/>
+              <a:buChar char="•"/>
+              <a:defRPr kumimoji="1" sz="1200" b="1" kern="1200">
+                <a:solidFill>
+                  <a:schemeClr val="tx1"/>
+                </a:solidFill>
+                <a:latin typeface="游ゴシック Medium" panose="020B0500000000000000" pitchFamily="50" charset="-128"/>
+                <a:ea typeface="游ゴシック Medium" panose="020B0500000000000000" pitchFamily="50" charset="-128"/>
+                <a:cs typeface="+mn-cs"/>
+              </a:defRPr>
+            </a:lvl5pPr>
+            <a:lvl6pPr marL="1200000" indent="-171450" algn="l" defTabSz="685800" rtl="0" eaLnBrk="1" latinLnBrk="0" hangingPunct="1">
+              <a:lnSpc>
+                <a:spcPct val="90000"/>
+              </a:lnSpc>
+              <a:spcBef>
+                <a:spcPts val="300"/>
+              </a:spcBef>
+              <a:spcAft>
+                <a:spcPts val="150"/>
+              </a:spcAft>
+              <a:buClr>
+                <a:schemeClr val="accent1">
+                  <a:lumMod val="75000"/>
+                </a:schemeClr>
+              </a:buClr>
+              <a:buSzPct val="100000"/>
+              <a:buFont typeface="Arial" panose="020B0604020202020204" pitchFamily="34" charset="0"/>
+              <a:buChar char="•"/>
+              <a:defRPr kumimoji="1" sz="1200" kern="1200">
+                <a:solidFill>
+                  <a:schemeClr val="tx1"/>
+                </a:solidFill>
+                <a:latin typeface="+mn-lt"/>
+                <a:ea typeface="+mn-ea"/>
+                <a:cs typeface="+mn-cs"/>
+              </a:defRPr>
+            </a:lvl6pPr>
+            <a:lvl7pPr marL="1425000" indent="-171450" algn="l" defTabSz="685800" rtl="0" eaLnBrk="1" latinLnBrk="0" hangingPunct="1">
+              <a:lnSpc>
+                <a:spcPct val="90000"/>
+              </a:lnSpc>
+              <a:spcBef>
+                <a:spcPts val="300"/>
+              </a:spcBef>
+              <a:spcAft>
+                <a:spcPts val="150"/>
+              </a:spcAft>
+              <a:buClr>
+                <a:schemeClr val="accent1">
+                  <a:lumMod val="75000"/>
+                </a:schemeClr>
+              </a:buClr>
+              <a:buSzPct val="100000"/>
+              <a:buFont typeface="Arial" panose="020B0604020202020204" pitchFamily="34" charset="0"/>
+              <a:buChar char="•"/>
+              <a:defRPr kumimoji="1" sz="1200" kern="1200">
+                <a:solidFill>
+                  <a:schemeClr val="tx1"/>
+                </a:solidFill>
+                <a:latin typeface="+mn-lt"/>
+                <a:ea typeface="+mn-ea"/>
+                <a:cs typeface="+mn-cs"/>
+              </a:defRPr>
+            </a:lvl7pPr>
+            <a:lvl8pPr marL="1650000" indent="-171450" algn="l" defTabSz="685800" rtl="0" eaLnBrk="1" latinLnBrk="0" hangingPunct="1">
+              <a:lnSpc>
+                <a:spcPct val="90000"/>
+              </a:lnSpc>
+              <a:spcBef>
+                <a:spcPts val="300"/>
+              </a:spcBef>
+              <a:spcAft>
+                <a:spcPts val="150"/>
+              </a:spcAft>
+              <a:buClr>
+                <a:schemeClr val="accent1">
+                  <a:lumMod val="75000"/>
+                </a:schemeClr>
+              </a:buClr>
+              <a:buSzPct val="100000"/>
+              <a:buFont typeface="Arial" panose="020B0604020202020204" pitchFamily="34" charset="0"/>
+              <a:buChar char="•"/>
+              <a:defRPr kumimoji="1" sz="1200" kern="1200">
+                <a:solidFill>
+                  <a:schemeClr val="tx1"/>
+                </a:solidFill>
+                <a:latin typeface="+mn-lt"/>
+                <a:ea typeface="+mn-ea"/>
+                <a:cs typeface="+mn-cs"/>
+              </a:defRPr>
+            </a:lvl8pPr>
+            <a:lvl9pPr marL="1875000" indent="-171450" algn="l" defTabSz="685800" rtl="0" eaLnBrk="1" latinLnBrk="0" hangingPunct="1">
+              <a:lnSpc>
+                <a:spcPct val="90000"/>
+              </a:lnSpc>
+              <a:spcBef>
+                <a:spcPts val="300"/>
+              </a:spcBef>
+              <a:spcAft>
+                <a:spcPts val="150"/>
+              </a:spcAft>
+              <a:buClr>
+                <a:schemeClr val="accent1">
+                  <a:lumMod val="75000"/>
+                </a:schemeClr>
+              </a:buClr>
+              <a:buSzPct val="100000"/>
+              <a:buFont typeface="Arial" panose="020B0604020202020204" pitchFamily="34" charset="0"/>
+              <a:buChar char="•"/>
+              <a:defRPr kumimoji="1" sz="1200" kern="1200">
+                <a:solidFill>
+                  <a:schemeClr val="tx1"/>
+                </a:solidFill>
+                <a:latin typeface="+mn-lt"/>
+                <a:ea typeface="+mn-ea"/>
+                <a:cs typeface="+mn-cs"/>
+              </a:defRPr>
+            </a:lvl9pPr>
+          </a:lstStyle>
+          <a:p>
+            <a:pPr marL="0" indent="0">
+              <a:buClr>
+                <a:srgbClr val="9E3611"/>
+              </a:buClr>
+              <a:buNone/>
+            </a:pPr>
+            <a:r>
+              <a:rPr lang="en-US" sz="2000" dirty="0">
+                <a:ea typeface="游ゴシック Medium"/>
+                <a:cs typeface="Times New Roman"/>
+              </a:rPr>
+              <a:t>Problem</a:t>
+            </a:r>
+            <a:r>
+              <a:rPr lang="en-US" sz="2000" b="0" dirty="0">
+                <a:ea typeface="游ゴシック Medium"/>
+                <a:cs typeface="Times New Roman"/>
+              </a:rPr>
+              <a:t>:</a:t>
+            </a:r>
+          </a:p>
+          <a:p>
+            <a:pPr marL="0" indent="0">
+              <a:buClr>
+                <a:srgbClr val="9E3611"/>
+              </a:buClr>
+              <a:buNone/>
+            </a:pPr>
+            <a:r>
+              <a:rPr lang="en-US" sz="2000" b="0" dirty="0">
+                <a:ea typeface="游ゴシック Medium"/>
+                <a:cs typeface="Times New Roman"/>
+              </a:rPr>
+              <a:t>2D IR does not account for out-of-plane motion (z axis) nor pitch and roll</a:t>
+            </a:r>
+          </a:p>
+          <a:p>
+            <a:pPr marL="0" indent="0">
+              <a:buClr>
+                <a:srgbClr val="9E3611"/>
+              </a:buClr>
+              <a:buNone/>
+            </a:pPr>
+            <a:r>
+              <a:rPr lang="en-US" sz="2000" b="0" dirty="0">
+                <a:ea typeface="游ゴシック Medium"/>
+                <a:cs typeface="Times New Roman"/>
+              </a:rPr>
+              <a:t>	  y                                                           </a:t>
+            </a:r>
+            <a:r>
+              <a:rPr lang="en-US" sz="2000" b="0" dirty="0" err="1">
+                <a:ea typeface="游ゴシック Medium"/>
+                <a:cs typeface="Times New Roman"/>
+              </a:rPr>
+              <a:t>y</a:t>
+            </a:r>
+            <a:endParaRPr lang="en-US" sz="2000" b="0" dirty="0">
+              <a:ea typeface="游ゴシック Medium"/>
+              <a:cs typeface="Times New Roman"/>
+            </a:endParaRPr>
+          </a:p>
+          <a:p>
+            <a:pPr marL="0" indent="0">
+              <a:buClr>
+                <a:srgbClr val="9E3611"/>
+              </a:buClr>
+              <a:buNone/>
+            </a:pPr>
+            <a:endParaRPr lang="en-US" sz="2000" b="0" dirty="0">
+              <a:ea typeface="游ゴシック Medium"/>
+              <a:cs typeface="Times New Roman"/>
+            </a:endParaRPr>
+          </a:p>
+          <a:p>
+            <a:pPr marL="0" indent="0">
+              <a:buClr>
+                <a:srgbClr val="9E3611"/>
+              </a:buClr>
+              <a:buNone/>
+            </a:pPr>
+            <a:r>
+              <a:rPr lang="en-US" sz="2000" b="0" dirty="0">
+                <a:ea typeface="游ゴシック Medium"/>
+                <a:cs typeface="Times New Roman"/>
+              </a:rPr>
+              <a:t>								       x						</a:t>
+            </a:r>
+          </a:p>
+          <a:p>
+            <a:pPr marL="0" indent="0">
+              <a:buClr>
+                <a:srgbClr val="9E3611"/>
+              </a:buClr>
+              <a:buNone/>
+            </a:pPr>
+            <a:r>
+              <a:rPr lang="en-US" sz="2000" b="0" dirty="0">
+                <a:ea typeface="游ゴシック Medium"/>
+                <a:cs typeface="Times New Roman"/>
+              </a:rPr>
+              <a:t>		        x						z</a:t>
+            </a:r>
+          </a:p>
+          <a:p>
+            <a:pPr marL="0" indent="0">
+              <a:buClr>
+                <a:srgbClr val="9E3611"/>
+              </a:buClr>
+              <a:buNone/>
+            </a:pPr>
+            <a:r>
+              <a:rPr lang="en-US" sz="2000" dirty="0">
+                <a:solidFill>
+                  <a:schemeClr val="accent1"/>
+                </a:solidFill>
+              </a:rPr>
+              <a:t>➔ </a:t>
+            </a:r>
+            <a:r>
+              <a:rPr lang="en-US" sz="2000" b="0" dirty="0"/>
+              <a:t>Features present in one picture are not necessarily present in the other (spawning feature problem)</a:t>
+            </a:r>
+          </a:p>
+          <a:p>
+            <a:pPr marL="0" indent="0">
+              <a:buClr>
+                <a:srgbClr val="9E3611"/>
+              </a:buClr>
+              <a:buNone/>
+            </a:pPr>
+            <a:r>
+              <a:rPr lang="en-US" sz="2000" dirty="0">
+                <a:solidFill>
+                  <a:schemeClr val="accent1"/>
+                </a:solidFill>
+              </a:rPr>
+              <a:t>➔ </a:t>
+            </a:r>
+            <a:r>
+              <a:rPr lang="en-US" sz="2000" b="0" dirty="0"/>
+              <a:t>2D IR cannot find a transform which makes the two images align perfectly</a:t>
+            </a:r>
+          </a:p>
+          <a:p>
+            <a:pPr marL="0" indent="0">
+              <a:buClr>
+                <a:srgbClr val="9E3611"/>
+              </a:buClr>
+              <a:buNone/>
+            </a:pPr>
+            <a:r>
+              <a:rPr lang="en-US" sz="2000" dirty="0">
+                <a:solidFill>
+                  <a:schemeClr val="accent1"/>
+                </a:solidFill>
+              </a:rPr>
+              <a:t>➔ </a:t>
+            </a:r>
+            <a:r>
+              <a:rPr lang="en-US" sz="2000" b="0" dirty="0"/>
+              <a:t>GT transform will not yield a perfect error metric</a:t>
+            </a:r>
+            <a:endParaRPr lang="en-US" sz="2000" b="0" dirty="0">
+              <a:ea typeface="游ゴシック Medium"/>
+              <a:cs typeface="Times New Roman"/>
+            </a:endParaRPr>
+          </a:p>
+        </p:txBody>
+      </p:sp>
+      <p:sp>
+        <p:nvSpPr>
+          <p:cNvPr id="6" name="Slide Number Placeholder 2">
+            <a:extLst>
+              <a:ext uri="{FF2B5EF4-FFF2-40B4-BE49-F238E27FC236}">
+                <a16:creationId xmlns:a16="http://schemas.microsoft.com/office/drawing/2014/main" id="{3AB306FF-6212-2853-245A-1687794578FA}"/>
+              </a:ext>
+            </a:extLst>
+          </p:cNvPr>
+          <p:cNvSpPr txBox="1">
+            <a:spLocks/>
+          </p:cNvSpPr>
+          <p:nvPr/>
+        </p:nvSpPr>
+        <p:spPr>
+          <a:xfrm>
+            <a:off x="8483346" y="4704588"/>
+            <a:ext cx="480060" cy="273844"/>
+          </a:xfrm>
+          <a:prstGeom prst="rect">
+            <a:avLst/>
+          </a:prstGeom>
+          <a:noFill/>
+        </p:spPr>
+        <p:txBody>
+          <a:bodyPr vert="horz" lIns="91440" tIns="45720" rIns="91440" bIns="45720" rtlCol="0" anchor="ctr">
+            <a:normAutofit/>
+          </a:bodyPr>
+          <a:lstStyle>
+            <a:defPPr>
+              <a:defRPr lang="en-US"/>
+            </a:defPPr>
+            <a:lvl1pPr marL="0" algn="ctr" defTabSz="457200" rtl="0" eaLnBrk="1" latinLnBrk="0" hangingPunct="1">
+              <a:defRPr sz="1050" b="1" kern="1200">
+                <a:solidFill>
+                  <a:srgbClr val="FFFFFF"/>
+                </a:solidFill>
+                <a:latin typeface="+mj-lt"/>
+                <a:ea typeface="+mn-ea"/>
+                <a:cs typeface="+mn-cs"/>
+              </a:defRPr>
+            </a:lvl1pPr>
+            <a:lvl2pPr marL="457200" algn="l" defTabSz="457200" rtl="0" eaLnBrk="1" latinLnBrk="0" hangingPunct="1">
+              <a:defRPr sz="1800" kern="1200">
+                <a:solidFill>
+                  <a:schemeClr val="tx1"/>
+                </a:solidFill>
+                <a:latin typeface="+mn-lt"/>
+                <a:ea typeface="+mn-ea"/>
+                <a:cs typeface="+mn-cs"/>
+              </a:defRPr>
+            </a:lvl2pPr>
+            <a:lvl3pPr marL="914400" algn="l" defTabSz="457200" rtl="0" eaLnBrk="1" latinLnBrk="0" hangingPunct="1">
+              <a:defRPr sz="1800" kern="1200">
+                <a:solidFill>
+                  <a:schemeClr val="tx1"/>
+                </a:solidFill>
+                <a:latin typeface="+mn-lt"/>
+                <a:ea typeface="+mn-ea"/>
+                <a:cs typeface="+mn-cs"/>
+              </a:defRPr>
+            </a:lvl3pPr>
+            <a:lvl4pPr marL="1371600" algn="l" defTabSz="457200" rtl="0" eaLnBrk="1" latinLnBrk="0" hangingPunct="1">
+              <a:defRPr sz="1800" kern="1200">
+                <a:solidFill>
+                  <a:schemeClr val="tx1"/>
+                </a:solidFill>
+                <a:latin typeface="+mn-lt"/>
+                <a:ea typeface="+mn-ea"/>
+                <a:cs typeface="+mn-cs"/>
+              </a:defRPr>
+            </a:lvl4pPr>
+            <a:lvl5pPr marL="1828800" algn="l" defTabSz="457200" rtl="0" eaLnBrk="1" latinLnBrk="0" hangingPunct="1">
+              <a:defRPr sz="1800" kern="1200">
+                <a:solidFill>
+                  <a:schemeClr val="tx1"/>
+                </a:solidFill>
+                <a:latin typeface="+mn-lt"/>
+                <a:ea typeface="+mn-ea"/>
+                <a:cs typeface="+mn-cs"/>
+              </a:defRPr>
+            </a:lvl5pPr>
+            <a:lvl6pPr marL="2286000" algn="l" defTabSz="457200" rtl="0" eaLnBrk="1" latinLnBrk="0" hangingPunct="1">
+              <a:defRPr sz="1800" kern="1200">
+                <a:solidFill>
+                  <a:schemeClr val="tx1"/>
+                </a:solidFill>
+                <a:latin typeface="+mn-lt"/>
+                <a:ea typeface="+mn-ea"/>
+                <a:cs typeface="+mn-cs"/>
+              </a:defRPr>
+            </a:lvl6pPr>
+            <a:lvl7pPr marL="2743200" algn="l" defTabSz="457200" rtl="0" eaLnBrk="1" latinLnBrk="0" hangingPunct="1">
+              <a:defRPr sz="1800" kern="1200">
+                <a:solidFill>
+                  <a:schemeClr val="tx1"/>
+                </a:solidFill>
+                <a:latin typeface="+mn-lt"/>
+                <a:ea typeface="+mn-ea"/>
+                <a:cs typeface="+mn-cs"/>
+              </a:defRPr>
+            </a:lvl7pPr>
+            <a:lvl8pPr marL="3200400" algn="l" defTabSz="457200" rtl="0" eaLnBrk="1" latinLnBrk="0" hangingPunct="1">
+              <a:defRPr sz="1800" kern="1200">
+                <a:solidFill>
+                  <a:schemeClr val="tx1"/>
+                </a:solidFill>
+                <a:latin typeface="+mn-lt"/>
+                <a:ea typeface="+mn-ea"/>
+                <a:cs typeface="+mn-cs"/>
+              </a:defRPr>
+            </a:lvl8pPr>
+            <a:lvl9pPr marL="3657600" algn="l" defTabSz="457200" rtl="0" eaLnBrk="1" latinLnBrk="0" hangingPunct="1">
+              <a:defRPr sz="1800" kern="1200">
+                <a:solidFill>
+                  <a:schemeClr val="tx1"/>
+                </a:solidFill>
+                <a:latin typeface="+mn-lt"/>
+                <a:ea typeface="+mn-ea"/>
+                <a:cs typeface="+mn-cs"/>
+              </a:defRPr>
+            </a:lvl9pPr>
+          </a:lstStyle>
+          <a:p>
+            <a:fld id="{7475F232-FFFE-5E6C-5554-2F165DAD28C0}" type="slidenum">
+              <a:rPr lang="en-JP" smtClean="0"/>
+              <a:pPr/>
+              <a:t>10</a:t>
+            </a:fld>
+            <a:endParaRPr lang="en-JP" dirty="0"/>
+          </a:p>
+        </p:txBody>
+      </p:sp>
+      <p:sp>
+        <p:nvSpPr>
+          <p:cNvPr id="2" name="Rectangle 1">
+            <a:extLst>
+              <a:ext uri="{FF2B5EF4-FFF2-40B4-BE49-F238E27FC236}">
+                <a16:creationId xmlns:a16="http://schemas.microsoft.com/office/drawing/2014/main" id="{B3492867-713B-53BD-0E58-DD806D3F62EE}"/>
+              </a:ext>
+            </a:extLst>
+          </p:cNvPr>
+          <p:cNvSpPr/>
+          <p:nvPr/>
+        </p:nvSpPr>
+        <p:spPr>
+          <a:xfrm>
+            <a:off x="1547664" y="1851670"/>
+            <a:ext cx="792088" cy="792088"/>
+          </a:xfrm>
+          <a:prstGeom prst="rect">
+            <a:avLst/>
+          </a:prstGeom>
+        </p:spPr>
+        <p:style>
+          <a:lnRef idx="2">
+            <a:schemeClr val="accent1">
+              <a:shade val="15000"/>
+            </a:schemeClr>
+          </a:lnRef>
+          <a:fillRef idx="1">
+            <a:schemeClr val="accent1"/>
+          </a:fillRef>
+          <a:effectRef idx="0">
+            <a:schemeClr val="accent1"/>
+          </a:effectRef>
+          <a:fontRef idx="minor">
+            <a:schemeClr val="lt1"/>
+          </a:fontRef>
+        </p:style>
+        <p:txBody>
+          <a:bodyPr rtlCol="0" anchor="ctr"/>
+          <a:lstStyle/>
+          <a:p>
+            <a:pPr algn="ctr"/>
+            <a:endParaRPr lang="en-US"/>
+          </a:p>
+        </p:txBody>
+      </p:sp>
+      <p:sp>
+        <p:nvSpPr>
+          <p:cNvPr id="3" name="Rectangle 2">
+            <a:extLst>
+              <a:ext uri="{FF2B5EF4-FFF2-40B4-BE49-F238E27FC236}">
+                <a16:creationId xmlns:a16="http://schemas.microsoft.com/office/drawing/2014/main" id="{C51DAF8C-1498-EDC2-5A45-DEAE5FC3278B}"/>
+              </a:ext>
+            </a:extLst>
+          </p:cNvPr>
+          <p:cNvSpPr/>
+          <p:nvPr/>
+        </p:nvSpPr>
+        <p:spPr>
+          <a:xfrm>
+            <a:off x="2987824" y="1851670"/>
+            <a:ext cx="792088" cy="792088"/>
+          </a:xfrm>
+          <a:prstGeom prst="rect">
+            <a:avLst/>
+          </a:prstGeom>
+        </p:spPr>
+        <p:style>
+          <a:lnRef idx="2">
+            <a:schemeClr val="accent1">
+              <a:shade val="15000"/>
+            </a:schemeClr>
+          </a:lnRef>
+          <a:fillRef idx="1">
+            <a:schemeClr val="accent1"/>
+          </a:fillRef>
+          <a:effectRef idx="0">
+            <a:schemeClr val="accent1"/>
+          </a:effectRef>
+          <a:fontRef idx="minor">
+            <a:schemeClr val="lt1"/>
+          </a:fontRef>
+        </p:style>
+        <p:txBody>
+          <a:bodyPr rtlCol="0" anchor="ctr"/>
+          <a:lstStyle/>
+          <a:p>
+            <a:pPr algn="ctr"/>
+            <a:endParaRPr lang="en-US"/>
+          </a:p>
+        </p:txBody>
+      </p:sp>
+      <p:sp>
+        <p:nvSpPr>
+          <p:cNvPr id="8" name="Rectangle 7">
+            <a:extLst>
+              <a:ext uri="{FF2B5EF4-FFF2-40B4-BE49-F238E27FC236}">
+                <a16:creationId xmlns:a16="http://schemas.microsoft.com/office/drawing/2014/main" id="{492FE8E0-B909-D391-C20A-98A17EFCAFA1}"/>
+              </a:ext>
+            </a:extLst>
+          </p:cNvPr>
+          <p:cNvSpPr/>
+          <p:nvPr/>
+        </p:nvSpPr>
+        <p:spPr>
+          <a:xfrm>
+            <a:off x="5521545" y="1851670"/>
+            <a:ext cx="792088" cy="792088"/>
+          </a:xfrm>
+          <a:prstGeom prst="rect">
+            <a:avLst/>
+          </a:prstGeom>
+          <a:scene3d>
+            <a:camera prst="orthographicFront">
+              <a:rot lat="19799999" lon="3299968" rev="0"/>
+            </a:camera>
+            <a:lightRig rig="threePt" dir="t"/>
+          </a:scene3d>
+        </p:spPr>
+        <p:style>
+          <a:lnRef idx="2">
+            <a:schemeClr val="accent1">
+              <a:shade val="15000"/>
+            </a:schemeClr>
+          </a:lnRef>
+          <a:fillRef idx="1">
+            <a:schemeClr val="accent1"/>
+          </a:fillRef>
+          <a:effectRef idx="0">
+            <a:schemeClr val="accent1"/>
+          </a:effectRef>
+          <a:fontRef idx="minor">
+            <a:schemeClr val="lt1"/>
+          </a:fontRef>
+        </p:style>
+        <p:txBody>
+          <a:bodyPr rtlCol="0" anchor="ctr"/>
+          <a:lstStyle/>
+          <a:p>
+            <a:pPr algn="ctr"/>
+            <a:endParaRPr lang="en-US"/>
+          </a:p>
+        </p:txBody>
+      </p:sp>
+      <p:sp>
+        <p:nvSpPr>
+          <p:cNvPr id="9" name="Rectangle 8">
+            <a:extLst>
+              <a:ext uri="{FF2B5EF4-FFF2-40B4-BE49-F238E27FC236}">
+                <a16:creationId xmlns:a16="http://schemas.microsoft.com/office/drawing/2014/main" id="{D2923DA5-5419-E853-70EE-478CB5895B8E}"/>
+              </a:ext>
+            </a:extLst>
+          </p:cNvPr>
+          <p:cNvSpPr/>
+          <p:nvPr/>
+        </p:nvSpPr>
+        <p:spPr>
+          <a:xfrm>
+            <a:off x="6516216" y="1851670"/>
+            <a:ext cx="792088" cy="792088"/>
+          </a:xfrm>
+          <a:prstGeom prst="rect">
+            <a:avLst/>
+          </a:prstGeom>
+          <a:scene3d>
+            <a:camera prst="orthographicFront">
+              <a:rot lat="19799999" lon="3299968" rev="0"/>
+            </a:camera>
+            <a:lightRig rig="threePt" dir="t"/>
+          </a:scene3d>
+        </p:spPr>
+        <p:style>
+          <a:lnRef idx="2">
+            <a:schemeClr val="accent1">
+              <a:shade val="15000"/>
+            </a:schemeClr>
+          </a:lnRef>
+          <a:fillRef idx="1">
+            <a:schemeClr val="accent1"/>
+          </a:fillRef>
+          <a:effectRef idx="0">
+            <a:schemeClr val="accent1"/>
+          </a:effectRef>
+          <a:fontRef idx="minor">
+            <a:schemeClr val="lt1"/>
+          </a:fontRef>
+        </p:style>
+        <p:txBody>
+          <a:bodyPr rtlCol="0" anchor="ctr"/>
+          <a:lstStyle/>
+          <a:p>
+            <a:pPr algn="ctr"/>
+            <a:endParaRPr lang="en-US"/>
+          </a:p>
+        </p:txBody>
+      </p:sp>
+      <p:cxnSp>
+        <p:nvCxnSpPr>
+          <p:cNvPr id="11" name="Straight Arrow Connector 10">
+            <a:extLst>
+              <a:ext uri="{FF2B5EF4-FFF2-40B4-BE49-F238E27FC236}">
+                <a16:creationId xmlns:a16="http://schemas.microsoft.com/office/drawing/2014/main" id="{2E0FC7E9-0368-4B6E-EE65-2103BB15D0F2}"/>
+              </a:ext>
+            </a:extLst>
+          </p:cNvPr>
+          <p:cNvCxnSpPr>
+            <a:cxnSpLocks/>
+          </p:cNvCxnSpPr>
+          <p:nvPr/>
+        </p:nvCxnSpPr>
+        <p:spPr>
+          <a:xfrm>
+            <a:off x="2411760" y="2251425"/>
+            <a:ext cx="504056" cy="0"/>
+          </a:xfrm>
+          <a:prstGeom prst="straightConnector1">
+            <a:avLst/>
+          </a:prstGeom>
+          <a:ln>
+            <a:headEnd type="triangle"/>
+            <a:tailEnd type="triangle"/>
+          </a:ln>
+        </p:spPr>
+        <p:style>
+          <a:lnRef idx="1">
+            <a:schemeClr val="accent1"/>
+          </a:lnRef>
+          <a:fillRef idx="0">
+            <a:schemeClr val="accent1"/>
+          </a:fillRef>
+          <a:effectRef idx="0">
+            <a:schemeClr val="accent1"/>
+          </a:effectRef>
+          <a:fontRef idx="minor">
+            <a:schemeClr val="tx1"/>
+          </a:fontRef>
+        </p:style>
+      </p:cxnSp>
+      <p:cxnSp>
+        <p:nvCxnSpPr>
+          <p:cNvPr id="13" name="Straight Arrow Connector 12">
+            <a:extLst>
+              <a:ext uri="{FF2B5EF4-FFF2-40B4-BE49-F238E27FC236}">
+                <a16:creationId xmlns:a16="http://schemas.microsoft.com/office/drawing/2014/main" id="{45AAC163-8BF5-3C22-18DA-3D11C3110ECE}"/>
+              </a:ext>
+            </a:extLst>
+          </p:cNvPr>
+          <p:cNvCxnSpPr>
+            <a:cxnSpLocks/>
+          </p:cNvCxnSpPr>
+          <p:nvPr/>
+        </p:nvCxnSpPr>
+        <p:spPr>
+          <a:xfrm>
+            <a:off x="6156176" y="2265019"/>
+            <a:ext cx="504056" cy="0"/>
+          </a:xfrm>
+          <a:prstGeom prst="straightConnector1">
+            <a:avLst/>
+          </a:prstGeom>
+          <a:ln>
+            <a:headEnd type="triangle"/>
+            <a:tailEnd type="triangle"/>
+          </a:ln>
+        </p:spPr>
+        <p:style>
+          <a:lnRef idx="1">
+            <a:schemeClr val="accent1"/>
+          </a:lnRef>
+          <a:fillRef idx="0">
+            <a:schemeClr val="accent1"/>
+          </a:fillRef>
+          <a:effectRef idx="0">
+            <a:schemeClr val="accent1"/>
+          </a:effectRef>
+          <a:fontRef idx="minor">
+            <a:schemeClr val="tx1"/>
+          </a:fontRef>
+        </p:style>
+      </p:cxnSp>
+      <p:cxnSp>
+        <p:nvCxnSpPr>
+          <p:cNvPr id="17" name="Straight Arrow Connector 16">
+            <a:extLst>
+              <a:ext uri="{FF2B5EF4-FFF2-40B4-BE49-F238E27FC236}">
+                <a16:creationId xmlns:a16="http://schemas.microsoft.com/office/drawing/2014/main" id="{E1CF09BC-FC37-0628-91C8-391B321031B7}"/>
+              </a:ext>
+            </a:extLst>
+          </p:cNvPr>
+          <p:cNvCxnSpPr/>
+          <p:nvPr/>
+        </p:nvCxnSpPr>
+        <p:spPr>
+          <a:xfrm flipV="1">
+            <a:off x="1187624" y="1851670"/>
+            <a:ext cx="0" cy="1008112"/>
+          </a:xfrm>
+          <a:prstGeom prst="straightConnector1">
+            <a:avLst/>
+          </a:prstGeom>
+          <a:ln>
+            <a:solidFill>
+              <a:schemeClr val="tx1"/>
+            </a:solidFill>
+            <a:tailEnd type="triangle"/>
+          </a:ln>
+        </p:spPr>
+        <p:style>
+          <a:lnRef idx="1">
+            <a:schemeClr val="accent1"/>
+          </a:lnRef>
+          <a:fillRef idx="0">
+            <a:schemeClr val="accent1"/>
+          </a:fillRef>
+          <a:effectRef idx="0">
+            <a:schemeClr val="accent1"/>
+          </a:effectRef>
+          <a:fontRef idx="minor">
+            <a:schemeClr val="tx1"/>
+          </a:fontRef>
+        </p:style>
+      </p:cxnSp>
+      <p:cxnSp>
+        <p:nvCxnSpPr>
+          <p:cNvPr id="20" name="Straight Arrow Connector 19">
+            <a:extLst>
+              <a:ext uri="{FF2B5EF4-FFF2-40B4-BE49-F238E27FC236}">
+                <a16:creationId xmlns:a16="http://schemas.microsoft.com/office/drawing/2014/main" id="{F0E52777-E938-7B27-8B01-5E90D1C2E7C4}"/>
+              </a:ext>
+            </a:extLst>
+          </p:cNvPr>
+          <p:cNvCxnSpPr/>
+          <p:nvPr/>
+        </p:nvCxnSpPr>
+        <p:spPr>
+          <a:xfrm>
+            <a:off x="1187624" y="2859782"/>
+            <a:ext cx="1152128" cy="0"/>
+          </a:xfrm>
+          <a:prstGeom prst="straightConnector1">
+            <a:avLst/>
+          </a:prstGeom>
+          <a:ln>
+            <a:solidFill>
+              <a:schemeClr val="tx1"/>
+            </a:solidFill>
+            <a:tailEnd type="triangle"/>
+          </a:ln>
+        </p:spPr>
+        <p:style>
+          <a:lnRef idx="1">
+            <a:schemeClr val="accent1"/>
+          </a:lnRef>
+          <a:fillRef idx="0">
+            <a:schemeClr val="accent1"/>
+          </a:fillRef>
+          <a:effectRef idx="0">
+            <a:schemeClr val="accent1"/>
+          </a:effectRef>
+          <a:fontRef idx="minor">
+            <a:schemeClr val="tx1"/>
+          </a:fontRef>
+        </p:style>
+      </p:cxnSp>
+      <p:cxnSp>
+        <p:nvCxnSpPr>
+          <p:cNvPr id="21" name="Straight Arrow Connector 20">
+            <a:extLst>
+              <a:ext uri="{FF2B5EF4-FFF2-40B4-BE49-F238E27FC236}">
+                <a16:creationId xmlns:a16="http://schemas.microsoft.com/office/drawing/2014/main" id="{EDE11D03-01C0-AC1D-769E-8F550BC2D25F}"/>
+              </a:ext>
+            </a:extLst>
+          </p:cNvPr>
+          <p:cNvCxnSpPr/>
+          <p:nvPr/>
+        </p:nvCxnSpPr>
+        <p:spPr>
+          <a:xfrm flipV="1">
+            <a:off x="5580112" y="1853233"/>
+            <a:ext cx="0" cy="1008112"/>
+          </a:xfrm>
+          <a:prstGeom prst="straightConnector1">
+            <a:avLst/>
+          </a:prstGeom>
+          <a:ln>
+            <a:solidFill>
+              <a:schemeClr val="tx1"/>
+            </a:solidFill>
+            <a:tailEnd type="triangle"/>
+          </a:ln>
+        </p:spPr>
+        <p:style>
+          <a:lnRef idx="1">
+            <a:schemeClr val="accent1"/>
+          </a:lnRef>
+          <a:fillRef idx="0">
+            <a:schemeClr val="accent1"/>
+          </a:fillRef>
+          <a:effectRef idx="0">
+            <a:schemeClr val="accent1"/>
+          </a:effectRef>
+          <a:fontRef idx="minor">
+            <a:schemeClr val="tx1"/>
+          </a:fontRef>
+        </p:style>
+      </p:cxnSp>
+      <p:cxnSp>
+        <p:nvCxnSpPr>
+          <p:cNvPr id="22" name="Straight Arrow Connector 21">
+            <a:extLst>
+              <a:ext uri="{FF2B5EF4-FFF2-40B4-BE49-F238E27FC236}">
+                <a16:creationId xmlns:a16="http://schemas.microsoft.com/office/drawing/2014/main" id="{7FBF172C-0E26-7B99-3F0D-7FB62ADDDD75}"/>
+              </a:ext>
+            </a:extLst>
+          </p:cNvPr>
+          <p:cNvCxnSpPr>
+            <a:cxnSpLocks/>
+          </p:cNvCxnSpPr>
+          <p:nvPr/>
+        </p:nvCxnSpPr>
+        <p:spPr>
+          <a:xfrm flipV="1">
+            <a:off x="5580112" y="2355726"/>
+            <a:ext cx="792088" cy="522755"/>
+          </a:xfrm>
+          <a:prstGeom prst="straightConnector1">
+            <a:avLst/>
+          </a:prstGeom>
+          <a:ln>
+            <a:solidFill>
+              <a:schemeClr val="tx1"/>
+            </a:solidFill>
+            <a:tailEnd type="triangle"/>
+          </a:ln>
+        </p:spPr>
+        <p:style>
+          <a:lnRef idx="1">
+            <a:schemeClr val="accent1"/>
+          </a:lnRef>
+          <a:fillRef idx="0">
+            <a:schemeClr val="accent1"/>
+          </a:fillRef>
+          <a:effectRef idx="0">
+            <a:schemeClr val="accent1"/>
+          </a:effectRef>
+          <a:fontRef idx="minor">
+            <a:schemeClr val="tx1"/>
+          </a:fontRef>
+        </p:style>
+      </p:cxnSp>
+      <p:cxnSp>
+        <p:nvCxnSpPr>
+          <p:cNvPr id="25" name="Straight Arrow Connector 24">
+            <a:extLst>
+              <a:ext uri="{FF2B5EF4-FFF2-40B4-BE49-F238E27FC236}">
+                <a16:creationId xmlns:a16="http://schemas.microsoft.com/office/drawing/2014/main" id="{8819258C-7F9D-E6B6-5ECB-484EF04F58E4}"/>
+              </a:ext>
+            </a:extLst>
+          </p:cNvPr>
+          <p:cNvCxnSpPr>
+            <a:cxnSpLocks/>
+          </p:cNvCxnSpPr>
+          <p:nvPr/>
+        </p:nvCxnSpPr>
+        <p:spPr>
+          <a:xfrm>
+            <a:off x="5588496" y="2878481"/>
+            <a:ext cx="927720" cy="0"/>
+          </a:xfrm>
+          <a:prstGeom prst="straightConnector1">
+            <a:avLst/>
+          </a:prstGeom>
+          <a:ln>
+            <a:solidFill>
+              <a:schemeClr val="tx1"/>
+            </a:solidFill>
+            <a:tailEnd type="triangle"/>
+          </a:ln>
+        </p:spPr>
+        <p:style>
+          <a:lnRef idx="1">
+            <a:schemeClr val="accent1"/>
+          </a:lnRef>
+          <a:fillRef idx="0">
+            <a:schemeClr val="accent1"/>
+          </a:fillRef>
+          <a:effectRef idx="0">
+            <a:schemeClr val="accent1"/>
+          </a:effectRef>
+          <a:fontRef idx="minor">
+            <a:schemeClr val="tx1"/>
+          </a:fontRef>
+        </p:style>
+      </p:cxnSp>
+    </p:spTree>
+    <p:extLst>
+      <p:ext uri="{BB962C8B-B14F-4D97-AF65-F5344CB8AC3E}">
+        <p14:creationId xmlns:p14="http://schemas.microsoft.com/office/powerpoint/2010/main" val="3197450399"/>
+      </p:ext>
+    </p:extLst>
+  </p:cSld>
+  <p:clrMapOvr>
+    <a:masterClrMapping/>
+  </p:clrMapOvr>
+</p:sld>
+</file>
+
+<file path=ppt/slides/slide11.xml><?xml version="1.0" encoding="utf-8"?>
+<p:sld xmlns:a="http://schemas.openxmlformats.org/drawingml/2006/main" xmlns:r="http://schemas.openxmlformats.org/officeDocument/2006/relationships" xmlns:p="http://schemas.openxmlformats.org/presentationml/2006/main">
+  <p:cSld>
+    <p:spTree>
+      <p:nvGrpSpPr>
+        <p:cNvPr id="1" name="">
+          <a:extLst>
+            <a:ext uri="{FF2B5EF4-FFF2-40B4-BE49-F238E27FC236}">
               <a16:creationId xmlns:a16="http://schemas.microsoft.com/office/drawing/2014/main" id="{5E2489B8-59B9-7747-9CFF-C36951006DD2}"/>
             </a:ext>
           </a:extLst>
@@ -4246,7 +5512,7 @@
             <a:fld id="{7475F232-FFFE-5E6C-5554-2F165DAD28C0}" type="slidenum">
               <a:rPr lang="en-JP" smtClean="0"/>
               <a:pPr/>
-              <a:t>10</a:t>
+              <a:t>11</a:t>
             </a:fld>
             <a:endParaRPr lang="en-JP" dirty="0"/>
           </a:p>
@@ -4549,7 +5815,21 @@
                 <a:ea typeface="游ゴシック Medium"/>
                 <a:cs typeface="Times New Roman"/>
               </a:rPr>
-              <a:t>Use only center for IR</a:t>
+              <a:t>Use only center for IR (</a:t>
+            </a:r>
+            <a:r>
+              <a:rPr lang="en-US" sz="2000" b="0" dirty="0" err="1">
+                <a:ea typeface="游ゴシック Medium"/>
+                <a:cs typeface="Times New Roman"/>
+              </a:rPr>
+              <a:t>SimpleITK</a:t>
+            </a:r>
+            <a:r>
+              <a:rPr lang="en-US" sz="2000" b="0" dirty="0">
+                <a:ea typeface="游ゴシック Medium"/>
+                <a:cs typeface="Times New Roman"/>
+              </a:rPr>
+              <a:t>: Region of Interest)</a:t>
             </a:r>
           </a:p>
           <a:p>
@@ -4615,7 +5895,7 @@
 </p:sld>
 </file>
 
-<file path=ppt/slides/slide11.xml><?xml version="1.0" encoding="utf-8"?>
+<file path=ppt/slides/slide12.xml><?xml version="1.0" encoding="utf-8"?>
 <p:sld xmlns:a="http://schemas.openxmlformats.org/drawingml/2006/main" xmlns:r="http://schemas.openxmlformats.org/officeDocument/2006/relationships" xmlns:p="http://schemas.openxmlformats.org/presentationml/2006/main">
   <p:cSld>
     <p:spTree>
@@ -4801,7 +6081,7 @@
             <a:fld id="{7475F232-FFFE-5E6C-5554-2F165DAD28C0}" type="slidenum">
               <a:rPr lang="en-JP" smtClean="0"/>
               <a:pPr/>
-              <a:t>11</a:t>
+              <a:t>12</a:t>
             </a:fld>
             <a:endParaRPr lang="en-JP" dirty="0"/>
           </a:p>
@@ -5220,7 +6500,7 @@
 </p:sld>
 </file>
 
-<file path=ppt/slides/slide12.xml><?xml version="1.0" encoding="utf-8"?>
+<file path=ppt/slides/slide13.xml><?xml version="1.0" encoding="utf-8"?>
 <p:sld xmlns:a="http://schemas.openxmlformats.org/drawingml/2006/main" xmlns:r="http://schemas.openxmlformats.org/officeDocument/2006/relationships" xmlns:p="http://schemas.openxmlformats.org/presentationml/2006/main">
   <p:cSld>
     <p:spTree>
@@ -5406,7 +6686,7 @@
             <a:fld id="{7475F232-FFFE-5E6C-5554-2F165DAD28C0}" type="slidenum">
               <a:rPr lang="en-JP" smtClean="0"/>
               <a:pPr/>
-              <a:t>12</a:t>
+              <a:t>13</a:t>
             </a:fld>
             <a:endParaRPr lang="en-JP" dirty="0"/>
           </a:p>
@@ -5787,6 +7067,31 @@
               </a:rPr>
               <a:t>Consider for IR if similar</a:t>
             </a:r>
+            <a:r>
+              <a:rPr lang="en-US" sz="1800" b="0" dirty="0">
+                <a:ea typeface="游ゴシック Medium"/>
+                <a:cs typeface="Times New Roman"/>
+              </a:rPr>
+              <a:t> (</a:t>
+            </a:r>
+            <a:r>
+              <a:rPr lang="en-US" sz="1800" b="0" dirty="0" err="1">
+                <a:ea typeface="游ゴシック Medium"/>
+                <a:cs typeface="Times New Roman"/>
+              </a:rPr>
+              <a:t>SimpleITK</a:t>
+            </a:r>
+            <a:r>
+              <a:rPr lang="en-US" sz="1800" b="0" dirty="0">
+                <a:ea typeface="游ゴシック Medium"/>
+                <a:cs typeface="Times New Roman"/>
+              </a:rPr>
+              <a:t>: Mask)</a:t>
+            </a:r>
+            <a:endParaRPr lang="en-US" sz="1850" b="0" dirty="0">
+              <a:ea typeface="游ゴシック Medium"/>
+              <a:cs typeface="Times New Roman"/>
+            </a:endParaRPr>
           </a:p>
           <a:p>
             <a:pPr marL="205740" lvl="1" indent="0">
@@ -5862,7 +7167,7 @@
 </p:sld>
 </file>
 
-<file path=ppt/slides/slide13.xml><?xml version="1.0" encoding="utf-8"?>
+<file path=ppt/slides/slide14.xml><?xml version="1.0" encoding="utf-8"?>
 <p:sld xmlns:a="http://schemas.openxmlformats.org/drawingml/2006/main" xmlns:r="http://schemas.openxmlformats.org/officeDocument/2006/relationships" xmlns:p="http://schemas.openxmlformats.org/presentationml/2006/main">
   <p:cSld>
     <p:spTree>
@@ -6048,7 +7353,7 @@
             <a:fld id="{7475F232-FFFE-5E6C-5554-2F165DAD28C0}" type="slidenum">
               <a:rPr lang="en-JP" smtClean="0"/>
               <a:pPr/>
-              <a:t>13</a:t>
+              <a:t>14</a:t>
             </a:fld>
             <a:endParaRPr lang="en-JP" dirty="0"/>
           </a:p>
@@ -6858,8 +8163,8 @@
         </p:nvSpPr>
         <p:spPr>
           <a:xfrm>
-            <a:off x="5840686" y="4019779"/>
-            <a:ext cx="2021052" cy="729545"/>
+            <a:off x="5856581" y="3929407"/>
+            <a:ext cx="2021052" cy="1123721"/>
           </a:xfrm>
           <a:prstGeom prst="rect">
             <a:avLst/>
@@ -7120,6 +8425,21 @@
               <a:buNone/>
             </a:pPr>
             <a:r>
+              <a:rPr lang="en-US" sz="2000" dirty="0">
+                <a:ea typeface="游ゴシック Medium"/>
+                <a:cs typeface="Times New Roman"/>
+              </a:rPr>
+              <a:t>Mask</a:t>
+            </a:r>
+          </a:p>
+          <a:p>
+            <a:pPr marL="0" indent="0">
+              <a:buClr>
+                <a:srgbClr val="9E3611"/>
+              </a:buClr>
+              <a:buNone/>
+            </a:pPr>
+            <a:r>
               <a:rPr lang="en-US" sz="2000" b="0" dirty="0">
                 <a:ea typeface="游ゴシック Medium"/>
                 <a:cs typeface="Times New Roman"/>
@@ -7157,7 +8477,7 @@
 </p:sld>
 </file>
 
-<file path=ppt/slides/slide14.xml><?xml version="1.0" encoding="utf-8"?>
+<file path=ppt/slides/slide15.xml><?xml version="1.0" encoding="utf-8"?>
 <p:sld xmlns:a="http://schemas.openxmlformats.org/drawingml/2006/main" xmlns:r="http://schemas.openxmlformats.org/officeDocument/2006/relationships" xmlns:p="http://schemas.openxmlformats.org/presentationml/2006/main">
   <p:cSld>
     <p:spTree>
@@ -7343,7 +8663,7 @@
             <a:fld id="{7475F232-FFFE-5E6C-5554-2F165DAD28C0}" type="slidenum">
               <a:rPr lang="en-JP" smtClean="0"/>
               <a:pPr/>
-              <a:t>14</a:t>
+              <a:t>15</a:t>
             </a:fld>
             <a:endParaRPr lang="en-JP" dirty="0"/>
           </a:p>
@@ -7646,7 +8966,7 @@
                 <a:ea typeface="游ゴシック Medium"/>
                 <a:cs typeface="Times New Roman"/>
               </a:rPr>
-              <a:t>Improvement of &gt;200% for FDR, GPE and run time for TUSREC24, 72 scans</a:t>
+              <a:t>Improvement of &gt;200% for FDR, GPE and run time for TUSREC24 validation data set</a:t>
             </a:r>
           </a:p>
           <a:p>
@@ -7688,7 +9008,7 @@
                 <a:ea typeface="游ゴシック Medium"/>
                 <a:cs typeface="Times New Roman"/>
               </a:rPr>
-              <a:t>Improvement of 5% for FDR, 1,5% for runtime for TUSREC24, 72 scans</a:t>
+              <a:t>Improvement of 5% for FDR, 1,5% for runtime</a:t>
             </a:r>
           </a:p>
           <a:p>
@@ -7729,56 +9049,31 @@
             <a:endParaRPr lang="en-US" sz="2000" b="0" dirty="0"/>
           </a:p>
           <a:p>
-            <a:pPr marL="0" indent="0">
+            <a:pPr>
               <a:buClr>
                 <a:srgbClr val="9E3611"/>
               </a:buClr>
-              <a:buNone/>
-            </a:pPr>
-            <a:r>
-              <a:rPr lang="en-US" sz="2000" dirty="0">
-                <a:solidFill>
-                  <a:schemeClr val="accent1"/>
-                </a:solidFill>
-              </a:rPr>
-              <a:t>➔ </a:t>
-            </a:r>
-            <a:r>
-              <a:rPr lang="en-US" sz="2000" b="0" dirty="0">
-                <a:ea typeface="游ゴシック Medium"/>
-                <a:cs typeface="Times New Roman"/>
-              </a:rPr>
-              <a:t>TUSREC24, 72 scans:</a:t>
-            </a:r>
-          </a:p>
-          <a:p>
-            <a:pPr marL="0" indent="0">
-              <a:buClr>
-                <a:srgbClr val="9E3611"/>
-              </a:buClr>
-              <a:buNone/>
             </a:pPr>
             <a:r>
               <a:rPr lang="en-US" sz="2000" b="0" dirty="0">
                 <a:ea typeface="游ゴシック Medium"/>
                 <a:cs typeface="Times New Roman"/>
               </a:rPr>
-              <a:t>	DualTrack24: FDR 5.1mm, GPE 4.9mm</a:t>
+              <a:t>DualTrack24: FDR 5.1%, GPE 4.9mm</a:t>
             </a:r>
           </a:p>
           <a:p>
-            <a:pPr marL="0" indent="0">
+            <a:pPr>
               <a:buClr>
                 <a:srgbClr val="9E3611"/>
               </a:buClr>
-              <a:buNone/>
             </a:pPr>
             <a:r>
               <a:rPr lang="en-US" sz="2000" b="0" dirty="0">
                 <a:ea typeface="游ゴシック Medium"/>
                 <a:cs typeface="Times New Roman"/>
               </a:rPr>
-              <a:t>	IR with counter measures: FDR 11.4mm, GPE 9.9mm</a:t>
+              <a:t>IR with counter measures: FDR 11.4%, GPE 9.9mm</a:t>
             </a:r>
             <a:endParaRPr lang="en-US" sz="2000" b="0" dirty="0"/>
           </a:p>
@@ -7797,7 +9092,7 @@
 </p:sld>
 </file>
 
-<file path=ppt/slides/slide15.xml><?xml version="1.0" encoding="utf-8"?>
+<file path=ppt/slides/slide16.xml><?xml version="1.0" encoding="utf-8"?>
 <p:sld xmlns:a="http://schemas.openxmlformats.org/drawingml/2006/main" xmlns:r="http://schemas.openxmlformats.org/officeDocument/2006/relationships" xmlns:p="http://schemas.openxmlformats.org/presentationml/2006/main">
   <p:cSld>
     <p:spTree>
@@ -7983,7 +9278,7 @@
             <a:fld id="{7475F232-FFFE-5E6C-5554-2F165DAD28C0}" type="slidenum">
               <a:rPr lang="en-JP" smtClean="0"/>
               <a:pPr/>
-              <a:t>15</a:t>
+              <a:t>16</a:t>
             </a:fld>
             <a:endParaRPr lang="en-JP" dirty="0"/>
           </a:p>
@@ -8371,7 +9666,7 @@
 </p:sld>
 </file>
 
-<file path=ppt/slides/slide16.xml><?xml version="1.0" encoding="utf-8"?>
+<file path=ppt/slides/slide17.xml><?xml version="1.0" encoding="utf-8"?>
 <p:sld xmlns:a="http://schemas.openxmlformats.org/drawingml/2006/main" xmlns:r="http://schemas.openxmlformats.org/officeDocument/2006/relationships" xmlns:p="http://schemas.openxmlformats.org/presentationml/2006/main">
   <p:cSld>
     <p:spTree>
@@ -8557,7 +9852,7 @@
             <a:fld id="{7475F232-FFFE-5E6C-5554-2F165DAD28C0}" type="slidenum">
               <a:rPr lang="en-JP" smtClean="0"/>
               <a:pPr/>
-              <a:t>16</a:t>
+              <a:t>17</a:t>
             </a:fld>
             <a:endParaRPr lang="en-JP" dirty="0"/>
           </a:p>
@@ -8854,7 +10149,18 @@
             </a:pPr>
             <a:r>
               <a:rPr lang="en-US" sz="2000" b="0" dirty="0"/>
-              <a:t>(DualTrack24 in-between Pred – GT, TUSREC24 72 scans combined)</a:t>
+              <a:t>(DualTrack24 in-between Pred – GT, TUSREC24 </a:t>
+            </a:r>
+            <a:r>
+              <a:rPr lang="en-US" sz="2000" b="0" dirty="0">
+                <a:ea typeface="游ゴシック Medium"/>
+                <a:cs typeface="Times New Roman"/>
+              </a:rPr>
+              <a:t>validation data set, all scans </a:t>
+            </a:r>
+            <a:r>
+              <a:rPr lang="en-US" sz="2000" b="0" dirty="0"/>
+              <a:t>combined)</a:t>
             </a:r>
           </a:p>
           <a:p>
@@ -8953,7 +10259,7 @@
 </p:sld>
 </file>
 
-<file path=ppt/slides/slide17.xml><?xml version="1.0" encoding="utf-8"?>
+<file path=ppt/slides/slide18.xml><?xml version="1.0" encoding="utf-8"?>
 <p:sld xmlns:a="http://schemas.openxmlformats.org/drawingml/2006/main" xmlns:r="http://schemas.openxmlformats.org/officeDocument/2006/relationships" xmlns:p="http://schemas.openxmlformats.org/presentationml/2006/main">
   <p:cSld>
     <p:spTree>
@@ -9139,7 +10445,7 @@
             <a:fld id="{7475F232-FFFE-5E6C-5554-2F165DAD28C0}" type="slidenum">
               <a:rPr lang="en-JP" smtClean="0"/>
               <a:pPr/>
-              <a:t>17</a:t>
+              <a:t>18</a:t>
             </a:fld>
             <a:endParaRPr lang="en-JP" dirty="0"/>
           </a:p>
@@ -9977,7 +11283,18 @@
             </a:pPr>
             <a:r>
               <a:rPr lang="en-US" sz="2000" b="0" dirty="0"/>
-              <a:t>(DualTrack24 in-between Pred – GT, TUSREC24 72 scans combined)</a:t>
+              <a:t>(DualTrack24 in-between Pred – GT, TUSREC24 </a:t>
+            </a:r>
+            <a:r>
+              <a:rPr lang="en-US" sz="2000" b="0" dirty="0">
+                <a:ea typeface="游ゴシック Medium"/>
+                <a:cs typeface="Times New Roman"/>
+              </a:rPr>
+              <a:t>validation data set, all scans </a:t>
+            </a:r>
+            <a:r>
+              <a:rPr lang="en-US" sz="2000" b="0" dirty="0"/>
+              <a:t>combined)</a:t>
             </a:r>
           </a:p>
         </p:txBody>
@@ -10307,7 +11624,7 @@
 </p:sld>
 </file>
 
-<file path=ppt/slides/slide18.xml><?xml version="1.0" encoding="utf-8"?>
+<file path=ppt/slides/slide19.xml><?xml version="1.0" encoding="utf-8"?>
 <p:sld xmlns:a="http://schemas.openxmlformats.org/drawingml/2006/main" xmlns:r="http://schemas.openxmlformats.org/officeDocument/2006/relationships" xmlns:p="http://schemas.openxmlformats.org/presentationml/2006/main">
   <p:cSld>
     <p:spTree>
@@ -10493,7 +11810,7 @@
             <a:fld id="{7475F232-FFFE-5E6C-5554-2F165DAD28C0}" type="slidenum">
               <a:rPr lang="en-JP" smtClean="0"/>
               <a:pPr/>
-              <a:t>18</a:t>
+              <a:t>19</a:t>
             </a:fld>
             <a:endParaRPr lang="en-JP" dirty="0"/>
           </a:p>
@@ -10835,593 +12152,6 @@
     <p:extLst>
       <p:ext uri="{BB962C8B-B14F-4D97-AF65-F5344CB8AC3E}">
         <p14:creationId xmlns:p14="http://schemas.microsoft.com/office/powerpoint/2010/main" val="2953016911"/>
-      </p:ext>
-    </p:extLst>
-  </p:cSld>
-  <p:clrMapOvr>
-    <a:masterClrMapping/>
-  </p:clrMapOvr>
-</p:sld>
-</file>
-
-<file path=ppt/slides/slide19.xml><?xml version="1.0" encoding="utf-8"?>
-<p:sld xmlns:a="http://schemas.openxmlformats.org/drawingml/2006/main" xmlns:r="http://schemas.openxmlformats.org/officeDocument/2006/relationships" xmlns:p="http://schemas.openxmlformats.org/presentationml/2006/main">
-  <p:cSld>
-    <p:spTree>
-      <p:nvGrpSpPr>
-        <p:cNvPr id="1" name="">
-          <a:extLst>
-            <a:ext uri="{FF2B5EF4-FFF2-40B4-BE49-F238E27FC236}">
-              <a16:creationId xmlns:a16="http://schemas.microsoft.com/office/drawing/2014/main" id="{95F72A54-EFF1-0DD3-8B72-D1118A76A8FE}"/>
-            </a:ext>
-          </a:extLst>
-        </p:cNvPr>
-        <p:cNvGrpSpPr/>
-        <p:nvPr/>
-      </p:nvGrpSpPr>
-      <p:grpSpPr>
-        <a:xfrm>
-          <a:off x="0" y="0"/>
-          <a:ext cx="0" cy="0"/>
-          <a:chOff x="0" y="0"/>
-          <a:chExt cx="0" cy="0"/>
-        </a:xfrm>
-      </p:grpSpPr>
-      <p:sp>
-        <p:nvSpPr>
-          <p:cNvPr id="4" name="Title 3">
-            <a:extLst>
-              <a:ext uri="{FF2B5EF4-FFF2-40B4-BE49-F238E27FC236}">
-                <a16:creationId xmlns:a16="http://schemas.microsoft.com/office/drawing/2014/main" id="{693795D4-9769-767F-0C3B-A3C64F0911F9}"/>
-              </a:ext>
-            </a:extLst>
-          </p:cNvPr>
-          <p:cNvSpPr>
-            <a:spLocks noGrp="1"/>
-          </p:cNvSpPr>
-          <p:nvPr>
-            <p:ph type="title" idx="2"/>
-          </p:nvPr>
-        </p:nvSpPr>
-        <p:spPr/>
-        <p:txBody>
-          <a:bodyPr/>
-          <a:lstStyle/>
-          <a:p>
-            <a:pPr marL="0">
-              <a:buClr>
-                <a:srgbClr val="9E3611"/>
-              </a:buClr>
-            </a:pPr>
-            <a:r>
-              <a:rPr lang="en-US" sz="2400" dirty="0">
-                <a:ea typeface="游ゴシック Medium"/>
-                <a:cs typeface="Times New Roman"/>
-              </a:rPr>
-              <a:t>   Next steps</a:t>
-            </a:r>
-          </a:p>
-        </p:txBody>
-      </p:sp>
-      <p:sp>
-        <p:nvSpPr>
-          <p:cNvPr id="6" name="Slide Number Placeholder 2">
-            <a:extLst>
-              <a:ext uri="{FF2B5EF4-FFF2-40B4-BE49-F238E27FC236}">
-                <a16:creationId xmlns:a16="http://schemas.microsoft.com/office/drawing/2014/main" id="{2C3F9B93-2FCE-4745-B4A9-7BDAFE361884}"/>
-              </a:ext>
-            </a:extLst>
-          </p:cNvPr>
-          <p:cNvSpPr txBox="1">
-            <a:spLocks/>
-          </p:cNvSpPr>
-          <p:nvPr/>
-        </p:nvSpPr>
-        <p:spPr>
-          <a:xfrm>
-            <a:off x="8483346" y="4704588"/>
-            <a:ext cx="480060" cy="273844"/>
-          </a:xfrm>
-          <a:prstGeom prst="rect">
-            <a:avLst/>
-          </a:prstGeom>
-          <a:noFill/>
-        </p:spPr>
-        <p:txBody>
-          <a:bodyPr vert="horz" lIns="91440" tIns="45720" rIns="91440" bIns="45720" rtlCol="0" anchor="ctr">
-            <a:normAutofit/>
-          </a:bodyPr>
-          <a:lstStyle>
-            <a:defPPr>
-              <a:defRPr lang="en-US"/>
-            </a:defPPr>
-            <a:lvl1pPr marL="0" algn="ctr" defTabSz="457200" rtl="0" eaLnBrk="1" latinLnBrk="0" hangingPunct="1">
-              <a:defRPr sz="1050" b="1" kern="1200">
-                <a:solidFill>
-                  <a:srgbClr val="FFFFFF"/>
-                </a:solidFill>
-                <a:latin typeface="+mj-lt"/>
-                <a:ea typeface="+mn-ea"/>
-                <a:cs typeface="+mn-cs"/>
-              </a:defRPr>
-            </a:lvl1pPr>
-            <a:lvl2pPr marL="457200" algn="l" defTabSz="457200" rtl="0" eaLnBrk="1" latinLnBrk="0" hangingPunct="1">
-              <a:defRPr sz="1800" kern="1200">
-                <a:solidFill>
-                  <a:schemeClr val="tx1"/>
-                </a:solidFill>
-                <a:latin typeface="+mn-lt"/>
-                <a:ea typeface="+mn-ea"/>
-                <a:cs typeface="+mn-cs"/>
-              </a:defRPr>
-            </a:lvl2pPr>
-            <a:lvl3pPr marL="914400" algn="l" defTabSz="457200" rtl="0" eaLnBrk="1" latinLnBrk="0" hangingPunct="1">
-              <a:defRPr sz="1800" kern="1200">
-                <a:solidFill>
-                  <a:schemeClr val="tx1"/>
-                </a:solidFill>
-                <a:latin typeface="+mn-lt"/>
-                <a:ea typeface="+mn-ea"/>
-                <a:cs typeface="+mn-cs"/>
-              </a:defRPr>
-            </a:lvl3pPr>
-            <a:lvl4pPr marL="1371600" algn="l" defTabSz="457200" rtl="0" eaLnBrk="1" latinLnBrk="0" hangingPunct="1">
-              <a:defRPr sz="1800" kern="1200">
-                <a:solidFill>
-                  <a:schemeClr val="tx1"/>
-                </a:solidFill>
-                <a:latin typeface="+mn-lt"/>
-                <a:ea typeface="+mn-ea"/>
-                <a:cs typeface="+mn-cs"/>
-              </a:defRPr>
-            </a:lvl4pPr>
-            <a:lvl5pPr marL="1828800" algn="l" defTabSz="457200" rtl="0" eaLnBrk="1" latinLnBrk="0" hangingPunct="1">
-              <a:defRPr sz="1800" kern="1200">
-                <a:solidFill>
-                  <a:schemeClr val="tx1"/>
-                </a:solidFill>
-                <a:latin typeface="+mn-lt"/>
-                <a:ea typeface="+mn-ea"/>
-                <a:cs typeface="+mn-cs"/>
-              </a:defRPr>
-            </a:lvl5pPr>
-            <a:lvl6pPr marL="2286000" algn="l" defTabSz="457200" rtl="0" eaLnBrk="1" latinLnBrk="0" hangingPunct="1">
-              <a:defRPr sz="1800" kern="1200">
-                <a:solidFill>
-                  <a:schemeClr val="tx1"/>
-                </a:solidFill>
-                <a:latin typeface="+mn-lt"/>
-                <a:ea typeface="+mn-ea"/>
-                <a:cs typeface="+mn-cs"/>
-              </a:defRPr>
-            </a:lvl6pPr>
-            <a:lvl7pPr marL="2743200" algn="l" defTabSz="457200" rtl="0" eaLnBrk="1" latinLnBrk="0" hangingPunct="1">
-              <a:defRPr sz="1800" kern="1200">
-                <a:solidFill>
-                  <a:schemeClr val="tx1"/>
-                </a:solidFill>
-                <a:latin typeface="+mn-lt"/>
-                <a:ea typeface="+mn-ea"/>
-                <a:cs typeface="+mn-cs"/>
-              </a:defRPr>
-            </a:lvl7pPr>
-            <a:lvl8pPr marL="3200400" algn="l" defTabSz="457200" rtl="0" eaLnBrk="1" latinLnBrk="0" hangingPunct="1">
-              <a:defRPr sz="1800" kern="1200">
-                <a:solidFill>
-                  <a:schemeClr val="tx1"/>
-                </a:solidFill>
-                <a:latin typeface="+mn-lt"/>
-                <a:ea typeface="+mn-ea"/>
-                <a:cs typeface="+mn-cs"/>
-              </a:defRPr>
-            </a:lvl8pPr>
-            <a:lvl9pPr marL="3657600" algn="l" defTabSz="457200" rtl="0" eaLnBrk="1" latinLnBrk="0" hangingPunct="1">
-              <a:defRPr sz="1800" kern="1200">
-                <a:solidFill>
-                  <a:schemeClr val="tx1"/>
-                </a:solidFill>
-                <a:latin typeface="+mn-lt"/>
-                <a:ea typeface="+mn-ea"/>
-                <a:cs typeface="+mn-cs"/>
-              </a:defRPr>
-            </a:lvl9pPr>
-          </a:lstStyle>
-          <a:p>
-            <a:fld id="{7475F232-FFFE-5E6C-5554-2F165DAD28C0}" type="slidenum">
-              <a:rPr lang="en-JP" smtClean="0"/>
-              <a:pPr/>
-              <a:t>19</a:t>
-            </a:fld>
-            <a:endParaRPr lang="en-JP" dirty="0"/>
-          </a:p>
-        </p:txBody>
-      </p:sp>
-      <p:sp>
-        <p:nvSpPr>
-          <p:cNvPr id="7" name="Text Placeholder 1">
-            <a:extLst>
-              <a:ext uri="{FF2B5EF4-FFF2-40B4-BE49-F238E27FC236}">
-                <a16:creationId xmlns:a16="http://schemas.microsoft.com/office/drawing/2014/main" id="{891697E6-BCDC-260C-B1D3-FAE5FAF76FC5}"/>
-              </a:ext>
-            </a:extLst>
-          </p:cNvPr>
-          <p:cNvSpPr txBox="1">
-            <a:spLocks/>
-          </p:cNvSpPr>
-          <p:nvPr/>
-        </p:nvSpPr>
-        <p:spPr>
-          <a:xfrm>
-            <a:off x="323528" y="707816"/>
-            <a:ext cx="8218099" cy="4305013"/>
-          </a:xfrm>
-          <a:prstGeom prst="rect">
-            <a:avLst/>
-          </a:prstGeom>
-          <a:noFill/>
-        </p:spPr>
-        <p:txBody>
-          <a:bodyPr vert="horz" lIns="91440" tIns="45720" rIns="91440" bIns="45720" rtlCol="0" anchor="t">
-            <a:noAutofit/>
-          </a:bodyPr>
-          <a:lstStyle>
-            <a:lvl1pPr marL="137160" indent="-137160" algn="l" defTabSz="685800" rtl="0" eaLnBrk="1" latinLnBrk="0" hangingPunct="1">
-              <a:lnSpc>
-                <a:spcPct val="90000"/>
-              </a:lnSpc>
-              <a:spcBef>
-                <a:spcPts val="900"/>
-              </a:spcBef>
-              <a:buClr>
-                <a:schemeClr val="accent1">
-                  <a:lumMod val="75000"/>
-                </a:schemeClr>
-              </a:buClr>
-              <a:buSzPct val="100000"/>
-              <a:buFont typeface="Arial" panose="020B0604020202020204" pitchFamily="34" charset="0"/>
-              <a:buChar char="•"/>
-              <a:defRPr kumimoji="1" sz="1500" b="1" kern="1200">
-                <a:solidFill>
-                  <a:schemeClr val="tx1"/>
-                </a:solidFill>
-                <a:latin typeface="游ゴシック Medium" panose="020B0500000000000000" pitchFamily="50" charset="-128"/>
-                <a:ea typeface="游ゴシック Medium" panose="020B0500000000000000" pitchFamily="50" charset="-128"/>
-                <a:cs typeface="+mn-cs"/>
-              </a:defRPr>
-            </a:lvl1pPr>
-            <a:lvl2pPr marL="342900" indent="-137160" algn="l" defTabSz="685800" rtl="0" eaLnBrk="1" latinLnBrk="0" hangingPunct="1">
-              <a:lnSpc>
-                <a:spcPct val="90000"/>
-              </a:lnSpc>
-              <a:spcBef>
-                <a:spcPts val="300"/>
-              </a:spcBef>
-              <a:spcAft>
-                <a:spcPts val="150"/>
-              </a:spcAft>
-              <a:buClr>
-                <a:schemeClr val="accent1">
-                  <a:lumMod val="75000"/>
-                </a:schemeClr>
-              </a:buClr>
-              <a:buSzPct val="100000"/>
-              <a:buFont typeface="Arial" panose="020B0604020202020204" pitchFamily="34" charset="0"/>
-              <a:buChar char="•"/>
-              <a:defRPr kumimoji="1" sz="1350" b="1" kern="1200">
-                <a:solidFill>
-                  <a:schemeClr val="tx1"/>
-                </a:solidFill>
-                <a:latin typeface="游ゴシック Medium" panose="020B0500000000000000" pitchFamily="50" charset="-128"/>
-                <a:ea typeface="游ゴシック Medium" panose="020B0500000000000000" pitchFamily="50" charset="-128"/>
-                <a:cs typeface="+mn-cs"/>
-              </a:defRPr>
-            </a:lvl2pPr>
-            <a:lvl3pPr marL="548640" indent="-137160" algn="l" defTabSz="685800" rtl="0" eaLnBrk="1" latinLnBrk="0" hangingPunct="1">
-              <a:lnSpc>
-                <a:spcPct val="90000"/>
-              </a:lnSpc>
-              <a:spcBef>
-                <a:spcPts val="300"/>
-              </a:spcBef>
-              <a:spcAft>
-                <a:spcPts val="150"/>
-              </a:spcAft>
-              <a:buClr>
-                <a:schemeClr val="accent1">
-                  <a:lumMod val="75000"/>
-                </a:schemeClr>
-              </a:buClr>
-              <a:buSzPct val="100000"/>
-              <a:buFont typeface="Arial" panose="020B0604020202020204" pitchFamily="34" charset="0"/>
-              <a:buChar char="•"/>
-              <a:defRPr kumimoji="1" sz="1200" b="1" kern="1200">
-                <a:solidFill>
-                  <a:schemeClr val="tx1"/>
-                </a:solidFill>
-                <a:latin typeface="游ゴシック Medium" panose="020B0500000000000000" pitchFamily="50" charset="-128"/>
-                <a:ea typeface="游ゴシック Medium" panose="020B0500000000000000" pitchFamily="50" charset="-128"/>
-                <a:cs typeface="+mn-cs"/>
-              </a:defRPr>
-            </a:lvl3pPr>
-            <a:lvl4pPr marL="754380" indent="-137160" algn="l" defTabSz="685800" rtl="0" eaLnBrk="1" latinLnBrk="0" hangingPunct="1">
-              <a:lnSpc>
-                <a:spcPct val="90000"/>
-              </a:lnSpc>
-              <a:spcBef>
-                <a:spcPts val="300"/>
-              </a:spcBef>
-              <a:spcAft>
-                <a:spcPts val="150"/>
-              </a:spcAft>
-              <a:buClr>
-                <a:schemeClr val="accent1">
-                  <a:lumMod val="75000"/>
-                </a:schemeClr>
-              </a:buClr>
-              <a:buSzPct val="100000"/>
-              <a:buFont typeface="Arial" panose="020B0604020202020204" pitchFamily="34" charset="0"/>
-              <a:buChar char="•"/>
-              <a:defRPr kumimoji="1" sz="1200" b="1" kern="1200">
-                <a:solidFill>
-                  <a:schemeClr val="tx1"/>
-                </a:solidFill>
-                <a:latin typeface="游ゴシック Medium" panose="020B0500000000000000" pitchFamily="50" charset="-128"/>
-                <a:ea typeface="游ゴシック Medium" panose="020B0500000000000000" pitchFamily="50" charset="-128"/>
-                <a:cs typeface="+mn-cs"/>
-              </a:defRPr>
-            </a:lvl4pPr>
-            <a:lvl5pPr marL="960120" indent="-137160" algn="l" defTabSz="685800" rtl="0" eaLnBrk="1" latinLnBrk="0" hangingPunct="1">
-              <a:lnSpc>
-                <a:spcPct val="90000"/>
-              </a:lnSpc>
-              <a:spcBef>
-                <a:spcPts val="300"/>
-              </a:spcBef>
-              <a:spcAft>
-                <a:spcPts val="150"/>
-              </a:spcAft>
-              <a:buClr>
-                <a:schemeClr val="accent1">
-                  <a:lumMod val="75000"/>
-                </a:schemeClr>
-              </a:buClr>
-              <a:buSzPct val="100000"/>
-              <a:buFont typeface="Arial" panose="020B0604020202020204" pitchFamily="34" charset="0"/>
-              <a:buChar char="•"/>
-              <a:defRPr kumimoji="1" sz="1200" b="1" kern="1200">
-                <a:solidFill>
-                  <a:schemeClr val="tx1"/>
-                </a:solidFill>
-                <a:latin typeface="游ゴシック Medium" panose="020B0500000000000000" pitchFamily="50" charset="-128"/>
-                <a:ea typeface="游ゴシック Medium" panose="020B0500000000000000" pitchFamily="50" charset="-128"/>
-                <a:cs typeface="+mn-cs"/>
-              </a:defRPr>
-            </a:lvl5pPr>
-            <a:lvl6pPr marL="1200000" indent="-171450" algn="l" defTabSz="685800" rtl="0" eaLnBrk="1" latinLnBrk="0" hangingPunct="1">
-              <a:lnSpc>
-                <a:spcPct val="90000"/>
-              </a:lnSpc>
-              <a:spcBef>
-                <a:spcPts val="300"/>
-              </a:spcBef>
-              <a:spcAft>
-                <a:spcPts val="150"/>
-              </a:spcAft>
-              <a:buClr>
-                <a:schemeClr val="accent1">
-                  <a:lumMod val="75000"/>
-                </a:schemeClr>
-              </a:buClr>
-              <a:buSzPct val="100000"/>
-              <a:buFont typeface="Arial" panose="020B0604020202020204" pitchFamily="34" charset="0"/>
-              <a:buChar char="•"/>
-              <a:defRPr kumimoji="1" sz="1200" kern="1200">
-                <a:solidFill>
-                  <a:schemeClr val="tx1"/>
-                </a:solidFill>
-                <a:latin typeface="+mn-lt"/>
-                <a:ea typeface="+mn-ea"/>
-                <a:cs typeface="+mn-cs"/>
-              </a:defRPr>
-            </a:lvl6pPr>
-            <a:lvl7pPr marL="1425000" indent="-171450" algn="l" defTabSz="685800" rtl="0" eaLnBrk="1" latinLnBrk="0" hangingPunct="1">
-              <a:lnSpc>
-                <a:spcPct val="90000"/>
-              </a:lnSpc>
-              <a:spcBef>
-                <a:spcPts val="300"/>
-              </a:spcBef>
-              <a:spcAft>
-                <a:spcPts val="150"/>
-              </a:spcAft>
-              <a:buClr>
-                <a:schemeClr val="accent1">
-                  <a:lumMod val="75000"/>
-                </a:schemeClr>
-              </a:buClr>
-              <a:buSzPct val="100000"/>
-              <a:buFont typeface="Arial" panose="020B0604020202020204" pitchFamily="34" charset="0"/>
-              <a:buChar char="•"/>
-              <a:defRPr kumimoji="1" sz="1200" kern="1200">
-                <a:solidFill>
-                  <a:schemeClr val="tx1"/>
-                </a:solidFill>
-                <a:latin typeface="+mn-lt"/>
-                <a:ea typeface="+mn-ea"/>
-                <a:cs typeface="+mn-cs"/>
-              </a:defRPr>
-            </a:lvl7pPr>
-            <a:lvl8pPr marL="1650000" indent="-171450" algn="l" defTabSz="685800" rtl="0" eaLnBrk="1" latinLnBrk="0" hangingPunct="1">
-              <a:lnSpc>
-                <a:spcPct val="90000"/>
-              </a:lnSpc>
-              <a:spcBef>
-                <a:spcPts val="300"/>
-              </a:spcBef>
-              <a:spcAft>
-                <a:spcPts val="150"/>
-              </a:spcAft>
-              <a:buClr>
-                <a:schemeClr val="accent1">
-                  <a:lumMod val="75000"/>
-                </a:schemeClr>
-              </a:buClr>
-              <a:buSzPct val="100000"/>
-              <a:buFont typeface="Arial" panose="020B0604020202020204" pitchFamily="34" charset="0"/>
-              <a:buChar char="•"/>
-              <a:defRPr kumimoji="1" sz="1200" kern="1200">
-                <a:solidFill>
-                  <a:schemeClr val="tx1"/>
-                </a:solidFill>
-                <a:latin typeface="+mn-lt"/>
-                <a:ea typeface="+mn-ea"/>
-                <a:cs typeface="+mn-cs"/>
-              </a:defRPr>
-            </a:lvl8pPr>
-            <a:lvl9pPr marL="1875000" indent="-171450" algn="l" defTabSz="685800" rtl="0" eaLnBrk="1" latinLnBrk="0" hangingPunct="1">
-              <a:lnSpc>
-                <a:spcPct val="90000"/>
-              </a:lnSpc>
-              <a:spcBef>
-                <a:spcPts val="300"/>
-              </a:spcBef>
-              <a:spcAft>
-                <a:spcPts val="150"/>
-              </a:spcAft>
-              <a:buClr>
-                <a:schemeClr val="accent1">
-                  <a:lumMod val="75000"/>
-                </a:schemeClr>
-              </a:buClr>
-              <a:buSzPct val="100000"/>
-              <a:buFont typeface="Arial" panose="020B0604020202020204" pitchFamily="34" charset="0"/>
-              <a:buChar char="•"/>
-              <a:defRPr kumimoji="1" sz="1200" kern="1200">
-                <a:solidFill>
-                  <a:schemeClr val="tx1"/>
-                </a:solidFill>
-                <a:latin typeface="+mn-lt"/>
-                <a:ea typeface="+mn-ea"/>
-                <a:cs typeface="+mn-cs"/>
-              </a:defRPr>
-            </a:lvl9pPr>
-          </a:lstStyle>
-          <a:p>
-            <a:pPr>
-              <a:buClr>
-                <a:srgbClr val="9E3611"/>
-              </a:buClr>
-            </a:pPr>
-            <a:r>
-              <a:rPr lang="en-US" sz="2000" b="0" dirty="0">
-                <a:ea typeface="游ゴシック Medium"/>
-                <a:cs typeface="Times New Roman"/>
-              </a:rPr>
-              <a:t>Improve 2D IR</a:t>
-            </a:r>
-            <a:endParaRPr lang="en-US" sz="1850" b="0" dirty="0">
-              <a:ea typeface="游ゴシック Medium"/>
-              <a:cs typeface="Times New Roman"/>
-            </a:endParaRPr>
-          </a:p>
-          <a:p>
-            <a:pPr>
-              <a:buClr>
-                <a:srgbClr val="9E3611"/>
-              </a:buClr>
-            </a:pPr>
-            <a:r>
-              <a:rPr lang="en-US" sz="2000" b="0" dirty="0">
-                <a:ea typeface="游ゴシック Medium"/>
-                <a:cs typeface="Times New Roman"/>
-              </a:rPr>
-              <a:t>Combine with PGO</a:t>
-            </a:r>
-          </a:p>
-          <a:p>
-            <a:pPr lvl="1">
-              <a:buClr>
-                <a:srgbClr val="9E3611"/>
-              </a:buClr>
-            </a:pPr>
-            <a:r>
-              <a:rPr lang="en-US" sz="1850" b="0" dirty="0">
-                <a:ea typeface="游ゴシック Medium"/>
-                <a:cs typeface="Times New Roman"/>
-              </a:rPr>
-              <a:t>Jitter?</a:t>
-            </a:r>
-          </a:p>
-          <a:p>
-            <a:pPr lvl="1">
-              <a:buClr>
-                <a:srgbClr val="9E3611"/>
-              </a:buClr>
-            </a:pPr>
-            <a:r>
-              <a:rPr lang="en-US" sz="1850" b="0" dirty="0">
-                <a:ea typeface="游ゴシック Medium"/>
-                <a:cs typeface="Times New Roman"/>
-              </a:rPr>
-              <a:t>Error?</a:t>
-            </a:r>
-          </a:p>
-          <a:p>
-            <a:pPr>
-              <a:buClr>
-                <a:srgbClr val="9E3611"/>
-              </a:buClr>
-            </a:pPr>
-            <a:r>
-              <a:rPr lang="en-US" sz="2000" b="0" dirty="0">
-                <a:ea typeface="游ゴシック Medium"/>
-                <a:cs typeface="Times New Roman"/>
-              </a:rPr>
-              <a:t>Try </a:t>
-            </a:r>
-            <a:r>
-              <a:rPr lang="en-US" sz="2000" b="0">
-                <a:ea typeface="游ゴシック Medium"/>
-                <a:cs typeface="Times New Roman"/>
-              </a:rPr>
-              <a:t>3D IR</a:t>
-            </a:r>
-            <a:endParaRPr lang="en-US" sz="2000" b="0" dirty="0">
-              <a:ea typeface="游ゴシック Medium"/>
-              <a:cs typeface="Times New Roman"/>
-            </a:endParaRPr>
-          </a:p>
-          <a:p>
-            <a:pPr>
-              <a:buClr>
-                <a:srgbClr val="9E3611"/>
-              </a:buClr>
-            </a:pPr>
-            <a:endParaRPr lang="en-US" sz="2000" b="0" dirty="0">
-              <a:ea typeface="游ゴシック Medium"/>
-              <a:cs typeface="Times New Roman"/>
-            </a:endParaRPr>
-          </a:p>
-          <a:p>
-            <a:pPr>
-              <a:buClr>
-                <a:srgbClr val="9E3611"/>
-              </a:buClr>
-            </a:pPr>
-            <a:r>
-              <a:rPr lang="en-US" sz="2000" b="0" dirty="0">
-                <a:ea typeface="游ゴシック Medium"/>
-                <a:cs typeface="Times New Roman"/>
-              </a:rPr>
-              <a:t>Write Master Thesis</a:t>
-            </a:r>
-          </a:p>
-        </p:txBody>
-      </p:sp>
-    </p:spTree>
-    <p:extLst>
-      <p:ext uri="{BB962C8B-B14F-4D97-AF65-F5344CB8AC3E}">
-        <p14:creationId xmlns:p14="http://schemas.microsoft.com/office/powerpoint/2010/main" val="396175466"/>
       </p:ext>
     </p:extLst>
   </p:cSld>
@@ -11555,7 +12285,18 @@
             </a:pPr>
             <a:r>
               <a:rPr lang="en-US" sz="2000" b="0" dirty="0"/>
-              <a:t>Evaluate IR on whole scans (no application to PGO here yet): Find frame poses only using IR</a:t>
+              <a:t>Evaluate IR on TUSREC24 </a:t>
+            </a:r>
+            <a:r>
+              <a:rPr lang="en-US" sz="2000" b="0" dirty="0">
+                <a:ea typeface="游ゴシック Medium"/>
+                <a:cs typeface="Times New Roman"/>
+              </a:rPr>
+              <a:t>validation data set </a:t>
+            </a:r>
+            <a:r>
+              <a:rPr lang="en-US" sz="2000" b="0" dirty="0"/>
+              <a:t>(72 scans, no application to PGO here yet): Find frame poses only using IR</a:t>
             </a:r>
           </a:p>
           <a:p>
@@ -11717,6 +12458,582 @@
     <p:extLst>
       <p:ext uri="{BB962C8B-B14F-4D97-AF65-F5344CB8AC3E}">
         <p14:creationId xmlns:p14="http://schemas.microsoft.com/office/powerpoint/2010/main" val="3279021703"/>
+      </p:ext>
+    </p:extLst>
+  </p:cSld>
+  <p:clrMapOvr>
+    <a:masterClrMapping/>
+  </p:clrMapOvr>
+</p:sld>
+</file>
+
+<file path=ppt/slides/slide20.xml><?xml version="1.0" encoding="utf-8"?>
+<p:sld xmlns:a="http://schemas.openxmlformats.org/drawingml/2006/main" xmlns:r="http://schemas.openxmlformats.org/officeDocument/2006/relationships" xmlns:p="http://schemas.openxmlformats.org/presentationml/2006/main">
+  <p:cSld>
+    <p:spTree>
+      <p:nvGrpSpPr>
+        <p:cNvPr id="1" name="">
+          <a:extLst>
+            <a:ext uri="{FF2B5EF4-FFF2-40B4-BE49-F238E27FC236}">
+              <a16:creationId xmlns:a16="http://schemas.microsoft.com/office/drawing/2014/main" id="{95F72A54-EFF1-0DD3-8B72-D1118A76A8FE}"/>
+            </a:ext>
+          </a:extLst>
+        </p:cNvPr>
+        <p:cNvGrpSpPr/>
+        <p:nvPr/>
+      </p:nvGrpSpPr>
+      <p:grpSpPr>
+        <a:xfrm>
+          <a:off x="0" y="0"/>
+          <a:ext cx="0" cy="0"/>
+          <a:chOff x="0" y="0"/>
+          <a:chExt cx="0" cy="0"/>
+        </a:xfrm>
+      </p:grpSpPr>
+      <p:sp>
+        <p:nvSpPr>
+          <p:cNvPr id="4" name="Title 3">
+            <a:extLst>
+              <a:ext uri="{FF2B5EF4-FFF2-40B4-BE49-F238E27FC236}">
+                <a16:creationId xmlns:a16="http://schemas.microsoft.com/office/drawing/2014/main" id="{693795D4-9769-767F-0C3B-A3C64F0911F9}"/>
+              </a:ext>
+            </a:extLst>
+          </p:cNvPr>
+          <p:cNvSpPr>
+            <a:spLocks noGrp="1"/>
+          </p:cNvSpPr>
+          <p:nvPr>
+            <p:ph type="title" idx="2"/>
+          </p:nvPr>
+        </p:nvSpPr>
+        <p:spPr/>
+        <p:txBody>
+          <a:bodyPr/>
+          <a:lstStyle/>
+          <a:p>
+            <a:pPr marL="0">
+              <a:buClr>
+                <a:srgbClr val="9E3611"/>
+              </a:buClr>
+            </a:pPr>
+            <a:r>
+              <a:rPr lang="en-US" sz="2400" dirty="0">
+                <a:ea typeface="游ゴシック Medium"/>
+                <a:cs typeface="Times New Roman"/>
+              </a:rPr>
+              <a:t>   Next steps</a:t>
+            </a:r>
+          </a:p>
+        </p:txBody>
+      </p:sp>
+      <p:sp>
+        <p:nvSpPr>
+          <p:cNvPr id="6" name="Slide Number Placeholder 2">
+            <a:extLst>
+              <a:ext uri="{FF2B5EF4-FFF2-40B4-BE49-F238E27FC236}">
+                <a16:creationId xmlns:a16="http://schemas.microsoft.com/office/drawing/2014/main" id="{2C3F9B93-2FCE-4745-B4A9-7BDAFE361884}"/>
+              </a:ext>
+            </a:extLst>
+          </p:cNvPr>
+          <p:cNvSpPr txBox="1">
+            <a:spLocks/>
+          </p:cNvSpPr>
+          <p:nvPr/>
+        </p:nvSpPr>
+        <p:spPr>
+          <a:xfrm>
+            <a:off x="8483346" y="4704588"/>
+            <a:ext cx="480060" cy="273844"/>
+          </a:xfrm>
+          <a:prstGeom prst="rect">
+            <a:avLst/>
+          </a:prstGeom>
+          <a:noFill/>
+        </p:spPr>
+        <p:txBody>
+          <a:bodyPr vert="horz" lIns="91440" tIns="45720" rIns="91440" bIns="45720" rtlCol="0" anchor="ctr">
+            <a:normAutofit/>
+          </a:bodyPr>
+          <a:lstStyle>
+            <a:defPPr>
+              <a:defRPr lang="en-US"/>
+            </a:defPPr>
+            <a:lvl1pPr marL="0" algn="ctr" defTabSz="457200" rtl="0" eaLnBrk="1" latinLnBrk="0" hangingPunct="1">
+              <a:defRPr sz="1050" b="1" kern="1200">
+                <a:solidFill>
+                  <a:srgbClr val="FFFFFF"/>
+                </a:solidFill>
+                <a:latin typeface="+mj-lt"/>
+                <a:ea typeface="+mn-ea"/>
+                <a:cs typeface="+mn-cs"/>
+              </a:defRPr>
+            </a:lvl1pPr>
+            <a:lvl2pPr marL="457200" algn="l" defTabSz="457200" rtl="0" eaLnBrk="1" latinLnBrk="0" hangingPunct="1">
+              <a:defRPr sz="1800" kern="1200">
+                <a:solidFill>
+                  <a:schemeClr val="tx1"/>
+                </a:solidFill>
+                <a:latin typeface="+mn-lt"/>
+                <a:ea typeface="+mn-ea"/>
+                <a:cs typeface="+mn-cs"/>
+              </a:defRPr>
+            </a:lvl2pPr>
+            <a:lvl3pPr marL="914400" algn="l" defTabSz="457200" rtl="0" eaLnBrk="1" latinLnBrk="0" hangingPunct="1">
+              <a:defRPr sz="1800" kern="1200">
+                <a:solidFill>
+                  <a:schemeClr val="tx1"/>
+                </a:solidFill>
+                <a:latin typeface="+mn-lt"/>
+                <a:ea typeface="+mn-ea"/>
+                <a:cs typeface="+mn-cs"/>
+              </a:defRPr>
+            </a:lvl3pPr>
+            <a:lvl4pPr marL="1371600" algn="l" defTabSz="457200" rtl="0" eaLnBrk="1" latinLnBrk="0" hangingPunct="1">
+              <a:defRPr sz="1800" kern="1200">
+                <a:solidFill>
+                  <a:schemeClr val="tx1"/>
+                </a:solidFill>
+                <a:latin typeface="+mn-lt"/>
+                <a:ea typeface="+mn-ea"/>
+                <a:cs typeface="+mn-cs"/>
+              </a:defRPr>
+            </a:lvl4pPr>
+            <a:lvl5pPr marL="1828800" algn="l" defTabSz="457200" rtl="0" eaLnBrk="1" latinLnBrk="0" hangingPunct="1">
+              <a:defRPr sz="1800" kern="1200">
+                <a:solidFill>
+                  <a:schemeClr val="tx1"/>
+                </a:solidFill>
+                <a:latin typeface="+mn-lt"/>
+                <a:ea typeface="+mn-ea"/>
+                <a:cs typeface="+mn-cs"/>
+              </a:defRPr>
+            </a:lvl5pPr>
+            <a:lvl6pPr marL="2286000" algn="l" defTabSz="457200" rtl="0" eaLnBrk="1" latinLnBrk="0" hangingPunct="1">
+              <a:defRPr sz="1800" kern="1200">
+                <a:solidFill>
+                  <a:schemeClr val="tx1"/>
+                </a:solidFill>
+                <a:latin typeface="+mn-lt"/>
+                <a:ea typeface="+mn-ea"/>
+                <a:cs typeface="+mn-cs"/>
+              </a:defRPr>
+            </a:lvl6pPr>
+            <a:lvl7pPr marL="2743200" algn="l" defTabSz="457200" rtl="0" eaLnBrk="1" latinLnBrk="0" hangingPunct="1">
+              <a:defRPr sz="1800" kern="1200">
+                <a:solidFill>
+                  <a:schemeClr val="tx1"/>
+                </a:solidFill>
+                <a:latin typeface="+mn-lt"/>
+                <a:ea typeface="+mn-ea"/>
+                <a:cs typeface="+mn-cs"/>
+              </a:defRPr>
+            </a:lvl7pPr>
+            <a:lvl8pPr marL="3200400" algn="l" defTabSz="457200" rtl="0" eaLnBrk="1" latinLnBrk="0" hangingPunct="1">
+              <a:defRPr sz="1800" kern="1200">
+                <a:solidFill>
+                  <a:schemeClr val="tx1"/>
+                </a:solidFill>
+                <a:latin typeface="+mn-lt"/>
+                <a:ea typeface="+mn-ea"/>
+                <a:cs typeface="+mn-cs"/>
+              </a:defRPr>
+            </a:lvl8pPr>
+            <a:lvl9pPr marL="3657600" algn="l" defTabSz="457200" rtl="0" eaLnBrk="1" latinLnBrk="0" hangingPunct="1">
+              <a:defRPr sz="1800" kern="1200">
+                <a:solidFill>
+                  <a:schemeClr val="tx1"/>
+                </a:solidFill>
+                <a:latin typeface="+mn-lt"/>
+                <a:ea typeface="+mn-ea"/>
+                <a:cs typeface="+mn-cs"/>
+              </a:defRPr>
+            </a:lvl9pPr>
+          </a:lstStyle>
+          <a:p>
+            <a:fld id="{7475F232-FFFE-5E6C-5554-2F165DAD28C0}" type="slidenum">
+              <a:rPr lang="en-JP" smtClean="0"/>
+              <a:pPr/>
+              <a:t>20</a:t>
+            </a:fld>
+            <a:endParaRPr lang="en-JP" dirty="0"/>
+          </a:p>
+        </p:txBody>
+      </p:sp>
+      <p:sp>
+        <p:nvSpPr>
+          <p:cNvPr id="7" name="Text Placeholder 1">
+            <a:extLst>
+              <a:ext uri="{FF2B5EF4-FFF2-40B4-BE49-F238E27FC236}">
+                <a16:creationId xmlns:a16="http://schemas.microsoft.com/office/drawing/2014/main" id="{891697E6-BCDC-260C-B1D3-FAE5FAF76FC5}"/>
+              </a:ext>
+            </a:extLst>
+          </p:cNvPr>
+          <p:cNvSpPr txBox="1">
+            <a:spLocks/>
+          </p:cNvSpPr>
+          <p:nvPr/>
+        </p:nvSpPr>
+        <p:spPr>
+          <a:xfrm>
+            <a:off x="323528" y="707816"/>
+            <a:ext cx="8218099" cy="4305013"/>
+          </a:xfrm>
+          <a:prstGeom prst="rect">
+            <a:avLst/>
+          </a:prstGeom>
+          <a:noFill/>
+        </p:spPr>
+        <p:txBody>
+          <a:bodyPr vert="horz" lIns="91440" tIns="45720" rIns="91440" bIns="45720" rtlCol="0" anchor="t">
+            <a:noAutofit/>
+          </a:bodyPr>
+          <a:lstStyle>
+            <a:lvl1pPr marL="137160" indent="-137160" algn="l" defTabSz="685800" rtl="0" eaLnBrk="1" latinLnBrk="0" hangingPunct="1">
+              <a:lnSpc>
+                <a:spcPct val="90000"/>
+              </a:lnSpc>
+              <a:spcBef>
+                <a:spcPts val="900"/>
+              </a:spcBef>
+              <a:buClr>
+                <a:schemeClr val="accent1">
+                  <a:lumMod val="75000"/>
+                </a:schemeClr>
+              </a:buClr>
+              <a:buSzPct val="100000"/>
+              <a:buFont typeface="Arial" panose="020B0604020202020204" pitchFamily="34" charset="0"/>
+              <a:buChar char="•"/>
+              <a:defRPr kumimoji="1" sz="1500" b="1" kern="1200">
+                <a:solidFill>
+                  <a:schemeClr val="tx1"/>
+                </a:solidFill>
+                <a:latin typeface="游ゴシック Medium" panose="020B0500000000000000" pitchFamily="50" charset="-128"/>
+                <a:ea typeface="游ゴシック Medium" panose="020B0500000000000000" pitchFamily="50" charset="-128"/>
+                <a:cs typeface="+mn-cs"/>
+              </a:defRPr>
+            </a:lvl1pPr>
+            <a:lvl2pPr marL="342900" indent="-137160" algn="l" defTabSz="685800" rtl="0" eaLnBrk="1" latinLnBrk="0" hangingPunct="1">
+              <a:lnSpc>
+                <a:spcPct val="90000"/>
+              </a:lnSpc>
+              <a:spcBef>
+                <a:spcPts val="300"/>
+              </a:spcBef>
+              <a:spcAft>
+                <a:spcPts val="150"/>
+              </a:spcAft>
+              <a:buClr>
+                <a:schemeClr val="accent1">
+                  <a:lumMod val="75000"/>
+                </a:schemeClr>
+              </a:buClr>
+              <a:buSzPct val="100000"/>
+              <a:buFont typeface="Arial" panose="020B0604020202020204" pitchFamily="34" charset="0"/>
+              <a:buChar char="•"/>
+              <a:defRPr kumimoji="1" sz="1350" b="1" kern="1200">
+                <a:solidFill>
+                  <a:schemeClr val="tx1"/>
+                </a:solidFill>
+                <a:latin typeface="游ゴシック Medium" panose="020B0500000000000000" pitchFamily="50" charset="-128"/>
+                <a:ea typeface="游ゴシック Medium" panose="020B0500000000000000" pitchFamily="50" charset="-128"/>
+                <a:cs typeface="+mn-cs"/>
+              </a:defRPr>
+            </a:lvl2pPr>
+            <a:lvl3pPr marL="548640" indent="-137160" algn="l" defTabSz="685800" rtl="0" eaLnBrk="1" latinLnBrk="0" hangingPunct="1">
+              <a:lnSpc>
+                <a:spcPct val="90000"/>
+              </a:lnSpc>
+              <a:spcBef>
+                <a:spcPts val="300"/>
+              </a:spcBef>
+              <a:spcAft>
+                <a:spcPts val="150"/>
+              </a:spcAft>
+              <a:buClr>
+                <a:schemeClr val="accent1">
+                  <a:lumMod val="75000"/>
+                </a:schemeClr>
+              </a:buClr>
+              <a:buSzPct val="100000"/>
+              <a:buFont typeface="Arial" panose="020B0604020202020204" pitchFamily="34" charset="0"/>
+              <a:buChar char="•"/>
+              <a:defRPr kumimoji="1" sz="1200" b="1" kern="1200">
+                <a:solidFill>
+                  <a:schemeClr val="tx1"/>
+                </a:solidFill>
+                <a:latin typeface="游ゴシック Medium" panose="020B0500000000000000" pitchFamily="50" charset="-128"/>
+                <a:ea typeface="游ゴシック Medium" panose="020B0500000000000000" pitchFamily="50" charset="-128"/>
+                <a:cs typeface="+mn-cs"/>
+              </a:defRPr>
+            </a:lvl3pPr>
+            <a:lvl4pPr marL="754380" indent="-137160" algn="l" defTabSz="685800" rtl="0" eaLnBrk="1" latinLnBrk="0" hangingPunct="1">
+              <a:lnSpc>
+                <a:spcPct val="90000"/>
+              </a:lnSpc>
+              <a:spcBef>
+                <a:spcPts val="300"/>
+              </a:spcBef>
+              <a:spcAft>
+                <a:spcPts val="150"/>
+              </a:spcAft>
+              <a:buClr>
+                <a:schemeClr val="accent1">
+                  <a:lumMod val="75000"/>
+                </a:schemeClr>
+              </a:buClr>
+              <a:buSzPct val="100000"/>
+              <a:buFont typeface="Arial" panose="020B0604020202020204" pitchFamily="34" charset="0"/>
+              <a:buChar char="•"/>
+              <a:defRPr kumimoji="1" sz="1200" b="1" kern="1200">
+                <a:solidFill>
+                  <a:schemeClr val="tx1"/>
+                </a:solidFill>
+                <a:latin typeface="游ゴシック Medium" panose="020B0500000000000000" pitchFamily="50" charset="-128"/>
+                <a:ea typeface="游ゴシック Medium" panose="020B0500000000000000" pitchFamily="50" charset="-128"/>
+                <a:cs typeface="+mn-cs"/>
+              </a:defRPr>
+            </a:lvl4pPr>
+            <a:lvl5pPr marL="960120" indent="-137160" algn="l" defTabSz="685800" rtl="0" eaLnBrk="1" latinLnBrk="0" hangingPunct="1">
+              <a:lnSpc>
+                <a:spcPct val="90000"/>
+              </a:lnSpc>
+              <a:spcBef>
+                <a:spcPts val="300"/>
+              </a:spcBef>
+              <a:spcAft>
+                <a:spcPts val="150"/>
+              </a:spcAft>
+              <a:buClr>
+                <a:schemeClr val="accent1">
+                  <a:lumMod val="75000"/>
+                </a:schemeClr>
+              </a:buClr>
+              <a:buSzPct val="100000"/>
+              <a:buFont typeface="Arial" panose="020B0604020202020204" pitchFamily="34" charset="0"/>
+              <a:buChar char="•"/>
+              <a:defRPr kumimoji="1" sz="1200" b="1" kern="1200">
+                <a:solidFill>
+                  <a:schemeClr val="tx1"/>
+                </a:solidFill>
+                <a:latin typeface="游ゴシック Medium" panose="020B0500000000000000" pitchFamily="50" charset="-128"/>
+                <a:ea typeface="游ゴシック Medium" panose="020B0500000000000000" pitchFamily="50" charset="-128"/>
+                <a:cs typeface="+mn-cs"/>
+              </a:defRPr>
+            </a:lvl5pPr>
+            <a:lvl6pPr marL="1200000" indent="-171450" algn="l" defTabSz="685800" rtl="0" eaLnBrk="1" latinLnBrk="0" hangingPunct="1">
+              <a:lnSpc>
+                <a:spcPct val="90000"/>
+              </a:lnSpc>
+              <a:spcBef>
+                <a:spcPts val="300"/>
+              </a:spcBef>
+              <a:spcAft>
+                <a:spcPts val="150"/>
+              </a:spcAft>
+              <a:buClr>
+                <a:schemeClr val="accent1">
+                  <a:lumMod val="75000"/>
+                </a:schemeClr>
+              </a:buClr>
+              <a:buSzPct val="100000"/>
+              <a:buFont typeface="Arial" panose="020B0604020202020204" pitchFamily="34" charset="0"/>
+              <a:buChar char="•"/>
+              <a:defRPr kumimoji="1" sz="1200" kern="1200">
+                <a:solidFill>
+                  <a:schemeClr val="tx1"/>
+                </a:solidFill>
+                <a:latin typeface="+mn-lt"/>
+                <a:ea typeface="+mn-ea"/>
+                <a:cs typeface="+mn-cs"/>
+              </a:defRPr>
+            </a:lvl6pPr>
+            <a:lvl7pPr marL="1425000" indent="-171450" algn="l" defTabSz="685800" rtl="0" eaLnBrk="1" latinLnBrk="0" hangingPunct="1">
+              <a:lnSpc>
+                <a:spcPct val="90000"/>
+              </a:lnSpc>
+              <a:spcBef>
+                <a:spcPts val="300"/>
+              </a:spcBef>
+              <a:spcAft>
+                <a:spcPts val="150"/>
+              </a:spcAft>
+              <a:buClr>
+                <a:schemeClr val="accent1">
+                  <a:lumMod val="75000"/>
+                </a:schemeClr>
+              </a:buClr>
+              <a:buSzPct val="100000"/>
+              <a:buFont typeface="Arial" panose="020B0604020202020204" pitchFamily="34" charset="0"/>
+              <a:buChar char="•"/>
+              <a:defRPr kumimoji="1" sz="1200" kern="1200">
+                <a:solidFill>
+                  <a:schemeClr val="tx1"/>
+                </a:solidFill>
+                <a:latin typeface="+mn-lt"/>
+                <a:ea typeface="+mn-ea"/>
+                <a:cs typeface="+mn-cs"/>
+              </a:defRPr>
+            </a:lvl7pPr>
+            <a:lvl8pPr marL="1650000" indent="-171450" algn="l" defTabSz="685800" rtl="0" eaLnBrk="1" latinLnBrk="0" hangingPunct="1">
+              <a:lnSpc>
+                <a:spcPct val="90000"/>
+              </a:lnSpc>
+              <a:spcBef>
+                <a:spcPts val="300"/>
+              </a:spcBef>
+              <a:spcAft>
+                <a:spcPts val="150"/>
+              </a:spcAft>
+              <a:buClr>
+                <a:schemeClr val="accent1">
+                  <a:lumMod val="75000"/>
+                </a:schemeClr>
+              </a:buClr>
+              <a:buSzPct val="100000"/>
+              <a:buFont typeface="Arial" panose="020B0604020202020204" pitchFamily="34" charset="0"/>
+              <a:buChar char="•"/>
+              <a:defRPr kumimoji="1" sz="1200" kern="1200">
+                <a:solidFill>
+                  <a:schemeClr val="tx1"/>
+                </a:solidFill>
+                <a:latin typeface="+mn-lt"/>
+                <a:ea typeface="+mn-ea"/>
+                <a:cs typeface="+mn-cs"/>
+              </a:defRPr>
+            </a:lvl8pPr>
+            <a:lvl9pPr marL="1875000" indent="-171450" algn="l" defTabSz="685800" rtl="0" eaLnBrk="1" latinLnBrk="0" hangingPunct="1">
+              <a:lnSpc>
+                <a:spcPct val="90000"/>
+              </a:lnSpc>
+              <a:spcBef>
+                <a:spcPts val="300"/>
+              </a:spcBef>
+              <a:spcAft>
+                <a:spcPts val="150"/>
+              </a:spcAft>
+              <a:buClr>
+                <a:schemeClr val="accent1">
+                  <a:lumMod val="75000"/>
+                </a:schemeClr>
+              </a:buClr>
+              <a:buSzPct val="100000"/>
+              <a:buFont typeface="Arial" panose="020B0604020202020204" pitchFamily="34" charset="0"/>
+              <a:buChar char="•"/>
+              <a:defRPr kumimoji="1" sz="1200" kern="1200">
+                <a:solidFill>
+                  <a:schemeClr val="tx1"/>
+                </a:solidFill>
+                <a:latin typeface="+mn-lt"/>
+                <a:ea typeface="+mn-ea"/>
+                <a:cs typeface="+mn-cs"/>
+              </a:defRPr>
+            </a:lvl9pPr>
+          </a:lstStyle>
+          <a:p>
+            <a:pPr>
+              <a:buClr>
+                <a:srgbClr val="9E3611"/>
+              </a:buClr>
+            </a:pPr>
+            <a:r>
+              <a:rPr lang="en-US" sz="2000" b="0" dirty="0">
+                <a:ea typeface="游ゴシック Medium"/>
+                <a:cs typeface="Times New Roman"/>
+              </a:rPr>
+              <a:t>Improve 2D IR</a:t>
+            </a:r>
+            <a:endParaRPr lang="en-US" sz="1850" b="0" dirty="0">
+              <a:ea typeface="游ゴシック Medium"/>
+              <a:cs typeface="Times New Roman"/>
+            </a:endParaRPr>
+          </a:p>
+          <a:p>
+            <a:pPr>
+              <a:buClr>
+                <a:srgbClr val="9E3611"/>
+              </a:buClr>
+            </a:pPr>
+            <a:r>
+              <a:rPr lang="en-US" sz="2000" b="0" dirty="0">
+                <a:ea typeface="游ゴシック Medium"/>
+                <a:cs typeface="Times New Roman"/>
+              </a:rPr>
+              <a:t>Combine with PGO</a:t>
+            </a:r>
+          </a:p>
+          <a:p>
+            <a:pPr lvl="1">
+              <a:buClr>
+                <a:srgbClr val="9E3611"/>
+              </a:buClr>
+            </a:pPr>
+            <a:r>
+              <a:rPr lang="en-US" sz="1850" b="0" dirty="0">
+                <a:ea typeface="游ゴシック Medium"/>
+                <a:cs typeface="Times New Roman"/>
+              </a:rPr>
+              <a:t>Jitter?</a:t>
+            </a:r>
+          </a:p>
+          <a:p>
+            <a:pPr lvl="1">
+              <a:buClr>
+                <a:srgbClr val="9E3611"/>
+              </a:buClr>
+            </a:pPr>
+            <a:r>
+              <a:rPr lang="en-US" sz="1850" b="0" dirty="0">
+                <a:ea typeface="游ゴシック Medium"/>
+                <a:cs typeface="Times New Roman"/>
+              </a:rPr>
+              <a:t>Error?</a:t>
+            </a:r>
+          </a:p>
+          <a:p>
+            <a:pPr>
+              <a:buClr>
+                <a:srgbClr val="9E3611"/>
+              </a:buClr>
+            </a:pPr>
+            <a:r>
+              <a:rPr lang="en-US" sz="2000" b="0" dirty="0">
+                <a:ea typeface="游ゴシック Medium"/>
+                <a:cs typeface="Times New Roman"/>
+              </a:rPr>
+              <a:t>Try 3D IR</a:t>
+            </a:r>
+          </a:p>
+          <a:p>
+            <a:pPr>
+              <a:buClr>
+                <a:srgbClr val="9E3611"/>
+              </a:buClr>
+            </a:pPr>
+            <a:endParaRPr lang="en-US" sz="2000" b="0" dirty="0">
+              <a:ea typeface="游ゴシック Medium"/>
+              <a:cs typeface="Times New Roman"/>
+            </a:endParaRPr>
+          </a:p>
+          <a:p>
+            <a:pPr>
+              <a:buClr>
+                <a:srgbClr val="9E3611"/>
+              </a:buClr>
+            </a:pPr>
+            <a:r>
+              <a:rPr lang="en-US" sz="2000" b="0" dirty="0">
+                <a:ea typeface="游ゴシック Medium"/>
+                <a:cs typeface="Times New Roman"/>
+              </a:rPr>
+              <a:t>Write Master Thesis</a:t>
+            </a:r>
+          </a:p>
+        </p:txBody>
+      </p:sp>
+    </p:spTree>
+    <p:extLst>
+      <p:ext uri="{BB962C8B-B14F-4D97-AF65-F5344CB8AC3E}">
+        <p14:creationId xmlns:p14="http://schemas.microsoft.com/office/powerpoint/2010/main" val="396175466"/>
       </p:ext>
     </p:extLst>
   </p:cSld>
@@ -16659,7 +17976,7 @@
         <p:cNvPr id="1" name="">
           <a:extLst>
             <a:ext uri="{FF2B5EF4-FFF2-40B4-BE49-F238E27FC236}">
-              <a16:creationId xmlns:a16="http://schemas.microsoft.com/office/drawing/2014/main" id="{9849BFF6-F96D-759B-7CD5-FE7983037B18}"/>
+              <a16:creationId xmlns:a16="http://schemas.microsoft.com/office/drawing/2014/main" id="{B64F228E-1387-9C16-9C77-F6845F89E6C2}"/>
             </a:ext>
           </a:extLst>
         </p:cNvPr>
@@ -16679,7 +17996,7 @@
           <p:cNvPr id="4" name="Title 3">
             <a:extLst>
               <a:ext uri="{FF2B5EF4-FFF2-40B4-BE49-F238E27FC236}">
-                <a16:creationId xmlns:a16="http://schemas.microsoft.com/office/drawing/2014/main" id="{397579CF-050E-2E4C-565F-8F9AEE04871E}"/>
+                <a16:creationId xmlns:a16="http://schemas.microsoft.com/office/drawing/2014/main" id="{DFEB8BAA-5FED-BB5C-D4EC-7ACEF895C392}"/>
               </a:ext>
             </a:extLst>
           </p:cNvPr>
@@ -16705,17 +18022,150 @@
                 <a:ea typeface="游ゴシック Medium"/>
                 <a:cs typeface="Times New Roman"/>
               </a:rPr>
-              <a:t>   Image Registration: Results</a:t>
+              <a:t>  Image Registration: Results</a:t>
             </a:r>
           </a:p>
         </p:txBody>
       </p:sp>
       <p:sp>
         <p:nvSpPr>
-          <p:cNvPr id="5" name="Text Placeholder 1">
+          <p:cNvPr id="6" name="Slide Number Placeholder 2">
             <a:extLst>
               <a:ext uri="{FF2B5EF4-FFF2-40B4-BE49-F238E27FC236}">
-                <a16:creationId xmlns:a16="http://schemas.microsoft.com/office/drawing/2014/main" id="{EAB8BF09-3CC4-BE08-8058-C4E80F75A750}"/>
+                <a16:creationId xmlns:a16="http://schemas.microsoft.com/office/drawing/2014/main" id="{AAD4E245-0B4A-62C8-531E-BD4BEE7AE257}"/>
+              </a:ext>
+            </a:extLst>
+          </p:cNvPr>
+          <p:cNvSpPr txBox="1">
+            <a:spLocks/>
+          </p:cNvSpPr>
+          <p:nvPr/>
+        </p:nvSpPr>
+        <p:spPr>
+          <a:xfrm>
+            <a:off x="8483346" y="4704588"/>
+            <a:ext cx="480060" cy="273844"/>
+          </a:xfrm>
+          <a:prstGeom prst="rect">
+            <a:avLst/>
+          </a:prstGeom>
+          <a:noFill/>
+        </p:spPr>
+        <p:txBody>
+          <a:bodyPr vert="horz" lIns="91440" tIns="45720" rIns="91440" bIns="45720" rtlCol="0" anchor="ctr">
+            <a:normAutofit/>
+          </a:bodyPr>
+          <a:lstStyle>
+            <a:defPPr>
+              <a:defRPr lang="en-US"/>
+            </a:defPPr>
+            <a:lvl1pPr marL="0" algn="ctr" defTabSz="457200" rtl="0" eaLnBrk="1" latinLnBrk="0" hangingPunct="1">
+              <a:defRPr sz="1050" b="1" kern="1200">
+                <a:solidFill>
+                  <a:srgbClr val="FFFFFF"/>
+                </a:solidFill>
+                <a:latin typeface="+mj-lt"/>
+                <a:ea typeface="+mn-ea"/>
+                <a:cs typeface="+mn-cs"/>
+              </a:defRPr>
+            </a:lvl1pPr>
+            <a:lvl2pPr marL="457200" algn="l" defTabSz="457200" rtl="0" eaLnBrk="1" latinLnBrk="0" hangingPunct="1">
+              <a:defRPr sz="1800" kern="1200">
+                <a:solidFill>
+                  <a:schemeClr val="tx1"/>
+                </a:solidFill>
+                <a:latin typeface="+mn-lt"/>
+                <a:ea typeface="+mn-ea"/>
+                <a:cs typeface="+mn-cs"/>
+              </a:defRPr>
+            </a:lvl2pPr>
+            <a:lvl3pPr marL="914400" algn="l" defTabSz="457200" rtl="0" eaLnBrk="1" latinLnBrk="0" hangingPunct="1">
+              <a:defRPr sz="1800" kern="1200">
+                <a:solidFill>
+                  <a:schemeClr val="tx1"/>
+                </a:solidFill>
+                <a:latin typeface="+mn-lt"/>
+                <a:ea typeface="+mn-ea"/>
+                <a:cs typeface="+mn-cs"/>
+              </a:defRPr>
+            </a:lvl3pPr>
+            <a:lvl4pPr marL="1371600" algn="l" defTabSz="457200" rtl="0" eaLnBrk="1" latinLnBrk="0" hangingPunct="1">
+              <a:defRPr sz="1800" kern="1200">
+                <a:solidFill>
+                  <a:schemeClr val="tx1"/>
+                </a:solidFill>
+                <a:latin typeface="+mn-lt"/>
+                <a:ea typeface="+mn-ea"/>
+                <a:cs typeface="+mn-cs"/>
+              </a:defRPr>
+            </a:lvl4pPr>
+            <a:lvl5pPr marL="1828800" algn="l" defTabSz="457200" rtl="0" eaLnBrk="1" latinLnBrk="0" hangingPunct="1">
+              <a:defRPr sz="1800" kern="1200">
+                <a:solidFill>
+                  <a:schemeClr val="tx1"/>
+                </a:solidFill>
+                <a:latin typeface="+mn-lt"/>
+                <a:ea typeface="+mn-ea"/>
+                <a:cs typeface="+mn-cs"/>
+              </a:defRPr>
+            </a:lvl5pPr>
+            <a:lvl6pPr marL="2286000" algn="l" defTabSz="457200" rtl="0" eaLnBrk="1" latinLnBrk="0" hangingPunct="1">
+              <a:defRPr sz="1800" kern="1200">
+                <a:solidFill>
+                  <a:schemeClr val="tx1"/>
+                </a:solidFill>
+                <a:latin typeface="+mn-lt"/>
+                <a:ea typeface="+mn-ea"/>
+                <a:cs typeface="+mn-cs"/>
+              </a:defRPr>
+            </a:lvl6pPr>
+            <a:lvl7pPr marL="2743200" algn="l" defTabSz="457200" rtl="0" eaLnBrk="1" latinLnBrk="0" hangingPunct="1">
+              <a:defRPr sz="1800" kern="1200">
+                <a:solidFill>
+                  <a:schemeClr val="tx1"/>
+                </a:solidFill>
+                <a:latin typeface="+mn-lt"/>
+                <a:ea typeface="+mn-ea"/>
+                <a:cs typeface="+mn-cs"/>
+              </a:defRPr>
+            </a:lvl7pPr>
+            <a:lvl8pPr marL="3200400" algn="l" defTabSz="457200" rtl="0" eaLnBrk="1" latinLnBrk="0" hangingPunct="1">
+              <a:defRPr sz="1800" kern="1200">
+                <a:solidFill>
+                  <a:schemeClr val="tx1"/>
+                </a:solidFill>
+                <a:latin typeface="+mn-lt"/>
+                <a:ea typeface="+mn-ea"/>
+                <a:cs typeface="+mn-cs"/>
+              </a:defRPr>
+            </a:lvl8pPr>
+            <a:lvl9pPr marL="3657600" algn="l" defTabSz="457200" rtl="0" eaLnBrk="1" latinLnBrk="0" hangingPunct="1">
+              <a:defRPr sz="1800" kern="1200">
+                <a:solidFill>
+                  <a:schemeClr val="tx1"/>
+                </a:solidFill>
+                <a:latin typeface="+mn-lt"/>
+                <a:ea typeface="+mn-ea"/>
+                <a:cs typeface="+mn-cs"/>
+              </a:defRPr>
+            </a:lvl9pPr>
+          </a:lstStyle>
+          <a:p>
+            <a:fld id="{7475F232-FFFE-5E6C-5554-2F165DAD28C0}" type="slidenum">
+              <a:rPr lang="en-JP" smtClean="0"/>
+              <a:pPr/>
+              <a:t>6</a:t>
+            </a:fld>
+            <a:endParaRPr lang="en-JP" dirty="0"/>
+          </a:p>
+        </p:txBody>
+      </p:sp>
+      <p:sp>
+        <p:nvSpPr>
+          <p:cNvPr id="7" name="Text Placeholder 1">
+            <a:extLst>
+              <a:ext uri="{FF2B5EF4-FFF2-40B4-BE49-F238E27FC236}">
+                <a16:creationId xmlns:a16="http://schemas.microsoft.com/office/drawing/2014/main" id="{92757092-DA6E-3B0D-9EFA-3A6B70CF4FEF}"/>
               </a:ext>
             </a:extLst>
           </p:cNvPr>
@@ -16987,321 +18437,49 @@
               </a:buClr>
               <a:buNone/>
             </a:pPr>
-            <a:endParaRPr lang="en-US" sz="1850" b="0" dirty="0">
-              <a:ea typeface="游ゴシック Medium"/>
-              <a:cs typeface="Times New Roman"/>
-            </a:endParaRPr>
-          </a:p>
-          <a:p>
-            <a:pPr marL="0" indent="0">
-              <a:buClr>
-                <a:srgbClr val="9E3611"/>
-              </a:buClr>
-              <a:buNone/>
-            </a:pPr>
-            <a:endParaRPr lang="en-US" sz="1850" b="0" dirty="0">
-              <a:ea typeface="游ゴシック Medium"/>
-              <a:cs typeface="Times New Roman"/>
-            </a:endParaRPr>
-          </a:p>
-          <a:p>
-            <a:pPr marL="0" indent="0">
-              <a:buClr>
-                <a:srgbClr val="9E3611"/>
-              </a:buClr>
-              <a:buNone/>
-            </a:pPr>
-            <a:endParaRPr lang="en-US" sz="1850" b="0" dirty="0">
-              <a:ea typeface="游ゴシック Medium"/>
-              <a:cs typeface="Times New Roman"/>
-            </a:endParaRPr>
-          </a:p>
-          <a:p>
-            <a:pPr marL="0" indent="0">
-              <a:buClr>
-                <a:srgbClr val="9E3611"/>
-              </a:buClr>
-              <a:buNone/>
-            </a:pPr>
-            <a:endParaRPr lang="en-US" sz="1850" b="0" dirty="0">
-              <a:ea typeface="游ゴシック Medium"/>
-              <a:cs typeface="Times New Roman"/>
-            </a:endParaRPr>
-          </a:p>
-          <a:p>
-            <a:pPr marL="0" indent="0">
-              <a:buClr>
-                <a:srgbClr val="9E3611"/>
-              </a:buClr>
-              <a:buNone/>
-            </a:pPr>
-            <a:endParaRPr lang="en-US" sz="1850" b="0" dirty="0">
-              <a:ea typeface="游ゴシック Medium"/>
-              <a:cs typeface="Times New Roman"/>
-            </a:endParaRPr>
-          </a:p>
-          <a:p>
-            <a:pPr marL="0" indent="0">
-              <a:buClr>
-                <a:srgbClr val="9E3611"/>
-              </a:buClr>
-              <a:buNone/>
-            </a:pPr>
-            <a:endParaRPr lang="en-US" sz="1850" b="0" dirty="0">
-              <a:ea typeface="游ゴシック Medium"/>
-              <a:cs typeface="Times New Roman"/>
-            </a:endParaRPr>
-          </a:p>
-          <a:p>
-            <a:pPr marL="0" indent="0">
-              <a:buClr>
-                <a:srgbClr val="9E3611"/>
-              </a:buClr>
-              <a:buNone/>
-            </a:pPr>
-            <a:endParaRPr lang="en-US" sz="1850" b="0" dirty="0">
-              <a:ea typeface="游ゴシック Medium"/>
-              <a:cs typeface="Times New Roman"/>
-            </a:endParaRPr>
-          </a:p>
-          <a:p>
-            <a:pPr marL="0" indent="0">
-              <a:buClr>
-                <a:srgbClr val="9E3611"/>
-              </a:buClr>
-              <a:buNone/>
-            </a:pPr>
-            <a:endParaRPr lang="en-US" sz="1850" b="0" dirty="0">
-              <a:ea typeface="游ゴシック Medium"/>
-              <a:cs typeface="Times New Roman"/>
-            </a:endParaRPr>
-          </a:p>
-          <a:p>
-            <a:pPr marL="0" indent="0">
-              <a:buClr>
-                <a:srgbClr val="9E3611"/>
-              </a:buClr>
-              <a:buNone/>
-            </a:pPr>
-            <a:endParaRPr lang="en-US" sz="1850" b="0" dirty="0">
-              <a:ea typeface="游ゴシック Medium"/>
-              <a:cs typeface="Times New Roman"/>
-            </a:endParaRPr>
-          </a:p>
-          <a:p>
-            <a:pPr marL="0" indent="0">
-              <a:buClr>
-                <a:srgbClr val="9E3611"/>
-              </a:buClr>
-              <a:buNone/>
-            </a:pPr>
-            <a:endParaRPr lang="en-US" sz="1850" b="0" dirty="0">
-              <a:ea typeface="游ゴシック Medium"/>
-              <a:cs typeface="Times New Roman"/>
-            </a:endParaRPr>
-          </a:p>
-          <a:p>
-            <a:pPr marL="0" indent="0">
-              <a:buClr>
-                <a:srgbClr val="9E3611"/>
-              </a:buClr>
-              <a:buNone/>
-            </a:pPr>
-            <a:endParaRPr lang="en-US" sz="1850" b="0" dirty="0">
-              <a:ea typeface="游ゴシック Medium"/>
-              <a:cs typeface="Times New Roman"/>
-            </a:endParaRPr>
-          </a:p>
-          <a:p>
-            <a:pPr marL="0" indent="0">
-              <a:buClr>
-                <a:srgbClr val="9E3611"/>
-              </a:buClr>
-              <a:buNone/>
-            </a:pPr>
             <a:r>
-              <a:rPr lang="en-US" sz="1850" b="0" dirty="0">
+              <a:rPr lang="en-US" sz="2000" dirty="0">
                 <a:ea typeface="游ゴシック Medium"/>
                 <a:cs typeface="Times New Roman"/>
               </a:rPr>
-              <a:t>      Norm of translational vector		                    Angle of the rotation   </a:t>
+              <a:t>TUSREC24 validation data set, 72 scans</a:t>
             </a:r>
+          </a:p>
+          <a:p>
+            <a:pPr>
+              <a:buClr>
+                <a:srgbClr val="9E3611"/>
+              </a:buClr>
+            </a:pPr>
+            <a:r>
+              <a:rPr lang="en-US" sz="2000" b="0" dirty="0">
+                <a:ea typeface="游ゴシック Medium"/>
+                <a:cs typeface="Times New Roman"/>
+              </a:rPr>
+              <a:t>DualTrack24: FDR 5.1%, GPE 4.9mm</a:t>
+            </a:r>
+          </a:p>
+          <a:p>
+            <a:pPr>
+              <a:buClr>
+                <a:srgbClr val="9E3611"/>
+              </a:buClr>
+            </a:pPr>
+            <a:r>
+              <a:rPr lang="en-US" sz="2000" b="0" dirty="0">
+                <a:ea typeface="游ゴシック Medium"/>
+                <a:cs typeface="Times New Roman"/>
+              </a:rPr>
+              <a:t>IR: FDR 28.0%, GPE 9.9mm</a:t>
+            </a:r>
+            <a:endParaRPr lang="en-US" sz="2000" b="0" dirty="0"/>
           </a:p>
         </p:txBody>
       </p:sp>
-      <p:sp>
-        <p:nvSpPr>
-          <p:cNvPr id="6" name="Slide Number Placeholder 2">
-            <a:extLst>
-              <a:ext uri="{FF2B5EF4-FFF2-40B4-BE49-F238E27FC236}">
-                <a16:creationId xmlns:a16="http://schemas.microsoft.com/office/drawing/2014/main" id="{F26921FA-F22E-5477-6E36-22AFF44AB2E2}"/>
-              </a:ext>
-            </a:extLst>
-          </p:cNvPr>
-          <p:cNvSpPr txBox="1">
-            <a:spLocks/>
-          </p:cNvSpPr>
-          <p:nvPr/>
-        </p:nvSpPr>
-        <p:spPr>
-          <a:xfrm>
-            <a:off x="8483346" y="4704588"/>
-            <a:ext cx="480060" cy="273844"/>
-          </a:xfrm>
-          <a:prstGeom prst="rect">
-            <a:avLst/>
-          </a:prstGeom>
-          <a:noFill/>
-        </p:spPr>
-        <p:txBody>
-          <a:bodyPr vert="horz" lIns="91440" tIns="45720" rIns="91440" bIns="45720" rtlCol="0" anchor="ctr">
-            <a:normAutofit/>
-          </a:bodyPr>
-          <a:lstStyle>
-            <a:defPPr>
-              <a:defRPr lang="en-US"/>
-            </a:defPPr>
-            <a:lvl1pPr marL="0" algn="ctr" defTabSz="457200" rtl="0" eaLnBrk="1" latinLnBrk="0" hangingPunct="1">
-              <a:defRPr sz="1050" b="1" kern="1200">
-                <a:solidFill>
-                  <a:srgbClr val="FFFFFF"/>
-                </a:solidFill>
-                <a:latin typeface="+mj-lt"/>
-                <a:ea typeface="+mn-ea"/>
-                <a:cs typeface="+mn-cs"/>
-              </a:defRPr>
-            </a:lvl1pPr>
-            <a:lvl2pPr marL="457200" algn="l" defTabSz="457200" rtl="0" eaLnBrk="1" latinLnBrk="0" hangingPunct="1">
-              <a:defRPr sz="1800" kern="1200">
-                <a:solidFill>
-                  <a:schemeClr val="tx1"/>
-                </a:solidFill>
-                <a:latin typeface="+mn-lt"/>
-                <a:ea typeface="+mn-ea"/>
-                <a:cs typeface="+mn-cs"/>
-              </a:defRPr>
-            </a:lvl2pPr>
-            <a:lvl3pPr marL="914400" algn="l" defTabSz="457200" rtl="0" eaLnBrk="1" latinLnBrk="0" hangingPunct="1">
-              <a:defRPr sz="1800" kern="1200">
-                <a:solidFill>
-                  <a:schemeClr val="tx1"/>
-                </a:solidFill>
-                <a:latin typeface="+mn-lt"/>
-                <a:ea typeface="+mn-ea"/>
-                <a:cs typeface="+mn-cs"/>
-              </a:defRPr>
-            </a:lvl3pPr>
-            <a:lvl4pPr marL="1371600" algn="l" defTabSz="457200" rtl="0" eaLnBrk="1" latinLnBrk="0" hangingPunct="1">
-              <a:defRPr sz="1800" kern="1200">
-                <a:solidFill>
-                  <a:schemeClr val="tx1"/>
-                </a:solidFill>
-                <a:latin typeface="+mn-lt"/>
-                <a:ea typeface="+mn-ea"/>
-                <a:cs typeface="+mn-cs"/>
-              </a:defRPr>
-            </a:lvl4pPr>
-            <a:lvl5pPr marL="1828800" algn="l" defTabSz="457200" rtl="0" eaLnBrk="1" latinLnBrk="0" hangingPunct="1">
-              <a:defRPr sz="1800" kern="1200">
-                <a:solidFill>
-                  <a:schemeClr val="tx1"/>
-                </a:solidFill>
-                <a:latin typeface="+mn-lt"/>
-                <a:ea typeface="+mn-ea"/>
-                <a:cs typeface="+mn-cs"/>
-              </a:defRPr>
-            </a:lvl5pPr>
-            <a:lvl6pPr marL="2286000" algn="l" defTabSz="457200" rtl="0" eaLnBrk="1" latinLnBrk="0" hangingPunct="1">
-              <a:defRPr sz="1800" kern="1200">
-                <a:solidFill>
-                  <a:schemeClr val="tx1"/>
-                </a:solidFill>
-                <a:latin typeface="+mn-lt"/>
-                <a:ea typeface="+mn-ea"/>
-                <a:cs typeface="+mn-cs"/>
-              </a:defRPr>
-            </a:lvl6pPr>
-            <a:lvl7pPr marL="2743200" algn="l" defTabSz="457200" rtl="0" eaLnBrk="1" latinLnBrk="0" hangingPunct="1">
-              <a:defRPr sz="1800" kern="1200">
-                <a:solidFill>
-                  <a:schemeClr val="tx1"/>
-                </a:solidFill>
-                <a:latin typeface="+mn-lt"/>
-                <a:ea typeface="+mn-ea"/>
-                <a:cs typeface="+mn-cs"/>
-              </a:defRPr>
-            </a:lvl7pPr>
-            <a:lvl8pPr marL="3200400" algn="l" defTabSz="457200" rtl="0" eaLnBrk="1" latinLnBrk="0" hangingPunct="1">
-              <a:defRPr sz="1800" kern="1200">
-                <a:solidFill>
-                  <a:schemeClr val="tx1"/>
-                </a:solidFill>
-                <a:latin typeface="+mn-lt"/>
-                <a:ea typeface="+mn-ea"/>
-                <a:cs typeface="+mn-cs"/>
-              </a:defRPr>
-            </a:lvl8pPr>
-            <a:lvl9pPr marL="3657600" algn="l" defTabSz="457200" rtl="0" eaLnBrk="1" latinLnBrk="0" hangingPunct="1">
-              <a:defRPr sz="1800" kern="1200">
-                <a:solidFill>
-                  <a:schemeClr val="tx1"/>
-                </a:solidFill>
-                <a:latin typeface="+mn-lt"/>
-                <a:ea typeface="+mn-ea"/>
-                <a:cs typeface="+mn-cs"/>
-              </a:defRPr>
-            </a:lvl9pPr>
-          </a:lstStyle>
-          <a:p>
-            <a:fld id="{7475F232-FFFE-5E6C-5554-2F165DAD28C0}" type="slidenum">
-              <a:rPr lang="en-JP" smtClean="0"/>
-              <a:pPr/>
-              <a:t>6</a:t>
-            </a:fld>
-            <a:endParaRPr lang="en-JP" dirty="0"/>
-          </a:p>
-        </p:txBody>
-      </p:sp>
-      <p:pic>
-        <p:nvPicPr>
-          <p:cNvPr id="7" name="Picture 6" descr="A graph of a function">
-            <a:extLst>
-              <a:ext uri="{FF2B5EF4-FFF2-40B4-BE49-F238E27FC236}">
-                <a16:creationId xmlns:a16="http://schemas.microsoft.com/office/drawing/2014/main" id="{E7EE3D15-073E-79B7-95C9-3F77B319FEDF}"/>
-              </a:ext>
-            </a:extLst>
-          </p:cNvPr>
-          <p:cNvPicPr>
-            <a:picLocks noChangeAspect="1"/>
-          </p:cNvPicPr>
-          <p:nvPr/>
-        </p:nvPicPr>
-        <p:blipFill>
-          <a:blip r:embed="rId3">
-            <a:extLst>
-              <a:ext uri="{28A0092B-C50C-407E-A947-70E740481C1C}">
-                <a14:useLocalDpi xmlns:a14="http://schemas.microsoft.com/office/drawing/2010/main" val="0"/>
-              </a:ext>
-            </a:extLst>
-          </a:blip>
-          <a:stretch>
-            <a:fillRect/>
-          </a:stretch>
-        </p:blipFill>
-        <p:spPr>
-          <a:xfrm>
-            <a:off x="0" y="666750"/>
-            <a:ext cx="9144000" cy="3810000"/>
-          </a:xfrm>
-          <a:prstGeom prst="rect">
-            <a:avLst/>
-          </a:prstGeom>
-        </p:spPr>
-      </p:pic>
     </p:spTree>
     <p:extLst>
       <p:ext uri="{BB962C8B-B14F-4D97-AF65-F5344CB8AC3E}">
-        <p14:creationId xmlns:p14="http://schemas.microsoft.com/office/powerpoint/2010/main" val="813731333"/>
+        <p14:creationId xmlns:p14="http://schemas.microsoft.com/office/powerpoint/2010/main" val="1728081533"/>
       </p:ext>
     </p:extLst>
   </p:cSld>
@@ -17312,675 +18490,6 @@
 </file>
 
 <file path=ppt/slides/slide7.xml><?xml version="1.0" encoding="utf-8"?>
-<p:sld xmlns:a="http://schemas.openxmlformats.org/drawingml/2006/main" xmlns:r="http://schemas.openxmlformats.org/officeDocument/2006/relationships" xmlns:p="http://schemas.openxmlformats.org/presentationml/2006/main">
-  <p:cSld>
-    <p:spTree>
-      <p:nvGrpSpPr>
-        <p:cNvPr id="1" name="">
-          <a:extLst>
-            <a:ext uri="{FF2B5EF4-FFF2-40B4-BE49-F238E27FC236}">
-              <a16:creationId xmlns:a16="http://schemas.microsoft.com/office/drawing/2014/main" id="{682946F0-4886-E1AB-21AB-5E3D278DE9DC}"/>
-            </a:ext>
-          </a:extLst>
-        </p:cNvPr>
-        <p:cNvGrpSpPr/>
-        <p:nvPr/>
-      </p:nvGrpSpPr>
-      <p:grpSpPr>
-        <a:xfrm>
-          <a:off x="0" y="0"/>
-          <a:ext cx="0" cy="0"/>
-          <a:chOff x="0" y="0"/>
-          <a:chExt cx="0" cy="0"/>
-        </a:xfrm>
-      </p:grpSpPr>
-      <p:sp>
-        <p:nvSpPr>
-          <p:cNvPr id="4" name="Title 3">
-            <a:extLst>
-              <a:ext uri="{FF2B5EF4-FFF2-40B4-BE49-F238E27FC236}">
-                <a16:creationId xmlns:a16="http://schemas.microsoft.com/office/drawing/2014/main" id="{9604A049-4A1D-2A82-224B-3C431ED2206D}"/>
-              </a:ext>
-            </a:extLst>
-          </p:cNvPr>
-          <p:cNvSpPr>
-            <a:spLocks noGrp="1"/>
-          </p:cNvSpPr>
-          <p:nvPr>
-            <p:ph type="title" idx="2"/>
-          </p:nvPr>
-        </p:nvSpPr>
-        <p:spPr/>
-        <p:txBody>
-          <a:bodyPr/>
-          <a:lstStyle/>
-          <a:p>
-            <a:pPr marL="0">
-              <a:buClr>
-                <a:srgbClr val="9E3611"/>
-              </a:buClr>
-            </a:pPr>
-            <a:r>
-              <a:rPr lang="en-US" sz="2400" dirty="0">
-                <a:ea typeface="游ゴシック Medium"/>
-                <a:cs typeface="Times New Roman"/>
-              </a:rPr>
-              <a:t>   Image Registration: Results</a:t>
-            </a:r>
-          </a:p>
-        </p:txBody>
-      </p:sp>
-      <p:sp>
-        <p:nvSpPr>
-          <p:cNvPr id="5" name="Text Placeholder 1">
-            <a:extLst>
-              <a:ext uri="{FF2B5EF4-FFF2-40B4-BE49-F238E27FC236}">
-                <a16:creationId xmlns:a16="http://schemas.microsoft.com/office/drawing/2014/main" id="{3DD8E8B9-C7CA-94B6-5C83-2E0F0AD60C18}"/>
-              </a:ext>
-            </a:extLst>
-          </p:cNvPr>
-          <p:cNvSpPr txBox="1">
-            <a:spLocks/>
-          </p:cNvSpPr>
-          <p:nvPr/>
-        </p:nvSpPr>
-        <p:spPr>
-          <a:xfrm>
-            <a:off x="323528" y="707816"/>
-            <a:ext cx="8218099" cy="4305013"/>
-          </a:xfrm>
-          <a:prstGeom prst="rect">
-            <a:avLst/>
-          </a:prstGeom>
-          <a:noFill/>
-        </p:spPr>
-        <p:txBody>
-          <a:bodyPr vert="horz" lIns="91440" tIns="45720" rIns="91440" bIns="45720" rtlCol="0" anchor="t">
-            <a:noAutofit/>
-          </a:bodyPr>
-          <a:lstStyle>
-            <a:lvl1pPr marL="137160" indent="-137160" algn="l" defTabSz="685800" rtl="0" eaLnBrk="1" latinLnBrk="0" hangingPunct="1">
-              <a:lnSpc>
-                <a:spcPct val="90000"/>
-              </a:lnSpc>
-              <a:spcBef>
-                <a:spcPts val="900"/>
-              </a:spcBef>
-              <a:buClr>
-                <a:schemeClr val="accent1">
-                  <a:lumMod val="75000"/>
-                </a:schemeClr>
-              </a:buClr>
-              <a:buSzPct val="100000"/>
-              <a:buFont typeface="Arial" panose="020B0604020202020204" pitchFamily="34" charset="0"/>
-              <a:buChar char="•"/>
-              <a:defRPr kumimoji="1" sz="1500" b="1" kern="1200">
-                <a:solidFill>
-                  <a:schemeClr val="tx1"/>
-                </a:solidFill>
-                <a:latin typeface="游ゴシック Medium" panose="020B0500000000000000" pitchFamily="50" charset="-128"/>
-                <a:ea typeface="游ゴシック Medium" panose="020B0500000000000000" pitchFamily="50" charset="-128"/>
-                <a:cs typeface="+mn-cs"/>
-              </a:defRPr>
-            </a:lvl1pPr>
-            <a:lvl2pPr marL="342900" indent="-137160" algn="l" defTabSz="685800" rtl="0" eaLnBrk="1" latinLnBrk="0" hangingPunct="1">
-              <a:lnSpc>
-                <a:spcPct val="90000"/>
-              </a:lnSpc>
-              <a:spcBef>
-                <a:spcPts val="300"/>
-              </a:spcBef>
-              <a:spcAft>
-                <a:spcPts val="150"/>
-              </a:spcAft>
-              <a:buClr>
-                <a:schemeClr val="accent1">
-                  <a:lumMod val="75000"/>
-                </a:schemeClr>
-              </a:buClr>
-              <a:buSzPct val="100000"/>
-              <a:buFont typeface="Arial" panose="020B0604020202020204" pitchFamily="34" charset="0"/>
-              <a:buChar char="•"/>
-              <a:defRPr kumimoji="1" sz="1350" b="1" kern="1200">
-                <a:solidFill>
-                  <a:schemeClr val="tx1"/>
-                </a:solidFill>
-                <a:latin typeface="游ゴシック Medium" panose="020B0500000000000000" pitchFamily="50" charset="-128"/>
-                <a:ea typeface="游ゴシック Medium" panose="020B0500000000000000" pitchFamily="50" charset="-128"/>
-                <a:cs typeface="+mn-cs"/>
-              </a:defRPr>
-            </a:lvl2pPr>
-            <a:lvl3pPr marL="548640" indent="-137160" algn="l" defTabSz="685800" rtl="0" eaLnBrk="1" latinLnBrk="0" hangingPunct="1">
-              <a:lnSpc>
-                <a:spcPct val="90000"/>
-              </a:lnSpc>
-              <a:spcBef>
-                <a:spcPts val="300"/>
-              </a:spcBef>
-              <a:spcAft>
-                <a:spcPts val="150"/>
-              </a:spcAft>
-              <a:buClr>
-                <a:schemeClr val="accent1">
-                  <a:lumMod val="75000"/>
-                </a:schemeClr>
-              </a:buClr>
-              <a:buSzPct val="100000"/>
-              <a:buFont typeface="Arial" panose="020B0604020202020204" pitchFamily="34" charset="0"/>
-              <a:buChar char="•"/>
-              <a:defRPr kumimoji="1" sz="1200" b="1" kern="1200">
-                <a:solidFill>
-                  <a:schemeClr val="tx1"/>
-                </a:solidFill>
-                <a:latin typeface="游ゴシック Medium" panose="020B0500000000000000" pitchFamily="50" charset="-128"/>
-                <a:ea typeface="游ゴシック Medium" panose="020B0500000000000000" pitchFamily="50" charset="-128"/>
-                <a:cs typeface="+mn-cs"/>
-              </a:defRPr>
-            </a:lvl3pPr>
-            <a:lvl4pPr marL="754380" indent="-137160" algn="l" defTabSz="685800" rtl="0" eaLnBrk="1" latinLnBrk="0" hangingPunct="1">
-              <a:lnSpc>
-                <a:spcPct val="90000"/>
-              </a:lnSpc>
-              <a:spcBef>
-                <a:spcPts val="300"/>
-              </a:spcBef>
-              <a:spcAft>
-                <a:spcPts val="150"/>
-              </a:spcAft>
-              <a:buClr>
-                <a:schemeClr val="accent1">
-                  <a:lumMod val="75000"/>
-                </a:schemeClr>
-              </a:buClr>
-              <a:buSzPct val="100000"/>
-              <a:buFont typeface="Arial" panose="020B0604020202020204" pitchFamily="34" charset="0"/>
-              <a:buChar char="•"/>
-              <a:defRPr kumimoji="1" sz="1200" b="1" kern="1200">
-                <a:solidFill>
-                  <a:schemeClr val="tx1"/>
-                </a:solidFill>
-                <a:latin typeface="游ゴシック Medium" panose="020B0500000000000000" pitchFamily="50" charset="-128"/>
-                <a:ea typeface="游ゴシック Medium" panose="020B0500000000000000" pitchFamily="50" charset="-128"/>
-                <a:cs typeface="+mn-cs"/>
-              </a:defRPr>
-            </a:lvl4pPr>
-            <a:lvl5pPr marL="960120" indent="-137160" algn="l" defTabSz="685800" rtl="0" eaLnBrk="1" latinLnBrk="0" hangingPunct="1">
-              <a:lnSpc>
-                <a:spcPct val="90000"/>
-              </a:lnSpc>
-              <a:spcBef>
-                <a:spcPts val="300"/>
-              </a:spcBef>
-              <a:spcAft>
-                <a:spcPts val="150"/>
-              </a:spcAft>
-              <a:buClr>
-                <a:schemeClr val="accent1">
-                  <a:lumMod val="75000"/>
-                </a:schemeClr>
-              </a:buClr>
-              <a:buSzPct val="100000"/>
-              <a:buFont typeface="Arial" panose="020B0604020202020204" pitchFamily="34" charset="0"/>
-              <a:buChar char="•"/>
-              <a:defRPr kumimoji="1" sz="1200" b="1" kern="1200">
-                <a:solidFill>
-                  <a:schemeClr val="tx1"/>
-                </a:solidFill>
-                <a:latin typeface="游ゴシック Medium" panose="020B0500000000000000" pitchFamily="50" charset="-128"/>
-                <a:ea typeface="游ゴシック Medium" panose="020B0500000000000000" pitchFamily="50" charset="-128"/>
-                <a:cs typeface="+mn-cs"/>
-              </a:defRPr>
-            </a:lvl5pPr>
-            <a:lvl6pPr marL="1200000" indent="-171450" algn="l" defTabSz="685800" rtl="0" eaLnBrk="1" latinLnBrk="0" hangingPunct="1">
-              <a:lnSpc>
-                <a:spcPct val="90000"/>
-              </a:lnSpc>
-              <a:spcBef>
-                <a:spcPts val="300"/>
-              </a:spcBef>
-              <a:spcAft>
-                <a:spcPts val="150"/>
-              </a:spcAft>
-              <a:buClr>
-                <a:schemeClr val="accent1">
-                  <a:lumMod val="75000"/>
-                </a:schemeClr>
-              </a:buClr>
-              <a:buSzPct val="100000"/>
-              <a:buFont typeface="Arial" panose="020B0604020202020204" pitchFamily="34" charset="0"/>
-              <a:buChar char="•"/>
-              <a:defRPr kumimoji="1" sz="1200" kern="1200">
-                <a:solidFill>
-                  <a:schemeClr val="tx1"/>
-                </a:solidFill>
-                <a:latin typeface="+mn-lt"/>
-                <a:ea typeface="+mn-ea"/>
-                <a:cs typeface="+mn-cs"/>
-              </a:defRPr>
-            </a:lvl6pPr>
-            <a:lvl7pPr marL="1425000" indent="-171450" algn="l" defTabSz="685800" rtl="0" eaLnBrk="1" latinLnBrk="0" hangingPunct="1">
-              <a:lnSpc>
-                <a:spcPct val="90000"/>
-              </a:lnSpc>
-              <a:spcBef>
-                <a:spcPts val="300"/>
-              </a:spcBef>
-              <a:spcAft>
-                <a:spcPts val="150"/>
-              </a:spcAft>
-              <a:buClr>
-                <a:schemeClr val="accent1">
-                  <a:lumMod val="75000"/>
-                </a:schemeClr>
-              </a:buClr>
-              <a:buSzPct val="100000"/>
-              <a:buFont typeface="Arial" panose="020B0604020202020204" pitchFamily="34" charset="0"/>
-              <a:buChar char="•"/>
-              <a:defRPr kumimoji="1" sz="1200" kern="1200">
-                <a:solidFill>
-                  <a:schemeClr val="tx1"/>
-                </a:solidFill>
-                <a:latin typeface="+mn-lt"/>
-                <a:ea typeface="+mn-ea"/>
-                <a:cs typeface="+mn-cs"/>
-              </a:defRPr>
-            </a:lvl7pPr>
-            <a:lvl8pPr marL="1650000" indent="-171450" algn="l" defTabSz="685800" rtl="0" eaLnBrk="1" latinLnBrk="0" hangingPunct="1">
-              <a:lnSpc>
-                <a:spcPct val="90000"/>
-              </a:lnSpc>
-              <a:spcBef>
-                <a:spcPts val="300"/>
-              </a:spcBef>
-              <a:spcAft>
-                <a:spcPts val="150"/>
-              </a:spcAft>
-              <a:buClr>
-                <a:schemeClr val="accent1">
-                  <a:lumMod val="75000"/>
-                </a:schemeClr>
-              </a:buClr>
-              <a:buSzPct val="100000"/>
-              <a:buFont typeface="Arial" panose="020B0604020202020204" pitchFamily="34" charset="0"/>
-              <a:buChar char="•"/>
-              <a:defRPr kumimoji="1" sz="1200" kern="1200">
-                <a:solidFill>
-                  <a:schemeClr val="tx1"/>
-                </a:solidFill>
-                <a:latin typeface="+mn-lt"/>
-                <a:ea typeface="+mn-ea"/>
-                <a:cs typeface="+mn-cs"/>
-              </a:defRPr>
-            </a:lvl8pPr>
-            <a:lvl9pPr marL="1875000" indent="-171450" algn="l" defTabSz="685800" rtl="0" eaLnBrk="1" latinLnBrk="0" hangingPunct="1">
-              <a:lnSpc>
-                <a:spcPct val="90000"/>
-              </a:lnSpc>
-              <a:spcBef>
-                <a:spcPts val="300"/>
-              </a:spcBef>
-              <a:spcAft>
-                <a:spcPts val="150"/>
-              </a:spcAft>
-              <a:buClr>
-                <a:schemeClr val="accent1">
-                  <a:lumMod val="75000"/>
-                </a:schemeClr>
-              </a:buClr>
-              <a:buSzPct val="100000"/>
-              <a:buFont typeface="Arial" panose="020B0604020202020204" pitchFamily="34" charset="0"/>
-              <a:buChar char="•"/>
-              <a:defRPr kumimoji="1" sz="1200" kern="1200">
-                <a:solidFill>
-                  <a:schemeClr val="tx1"/>
-                </a:solidFill>
-                <a:latin typeface="+mn-lt"/>
-                <a:ea typeface="+mn-ea"/>
-                <a:cs typeface="+mn-cs"/>
-              </a:defRPr>
-            </a:lvl9pPr>
-          </a:lstStyle>
-          <a:p>
-            <a:pPr marL="0" indent="0">
-              <a:buClr>
-                <a:srgbClr val="9E3611"/>
-              </a:buClr>
-              <a:buNone/>
-            </a:pPr>
-            <a:endParaRPr lang="en-US" sz="1850" b="0" dirty="0">
-              <a:ea typeface="游ゴシック Medium"/>
-              <a:cs typeface="Times New Roman"/>
-            </a:endParaRPr>
-          </a:p>
-          <a:p>
-            <a:pPr marL="0" indent="0">
-              <a:buClr>
-                <a:srgbClr val="9E3611"/>
-              </a:buClr>
-              <a:buNone/>
-            </a:pPr>
-            <a:r>
-              <a:rPr lang="en-US" sz="1850" b="0" dirty="0">
-                <a:ea typeface="游ゴシック Medium"/>
-                <a:cs typeface="Times New Roman"/>
-              </a:rPr>
-              <a:t>Blue: GT</a:t>
-            </a:r>
-          </a:p>
-          <a:p>
-            <a:pPr marL="0" indent="0">
-              <a:buClr>
-                <a:srgbClr val="9E3611"/>
-              </a:buClr>
-              <a:buNone/>
-            </a:pPr>
-            <a:r>
-              <a:rPr lang="en-US" sz="1850" b="0" dirty="0">
-                <a:ea typeface="游ゴシック Medium"/>
-                <a:cs typeface="Times New Roman"/>
-              </a:rPr>
-              <a:t>Yellow: IR</a:t>
-            </a:r>
-          </a:p>
-          <a:p>
-            <a:pPr marL="0" indent="0">
-              <a:buClr>
-                <a:srgbClr val="9E3611"/>
-              </a:buClr>
-              <a:buNone/>
-            </a:pPr>
-            <a:endParaRPr lang="en-US" sz="1850" b="0" dirty="0">
-              <a:ea typeface="游ゴシック Medium"/>
-              <a:cs typeface="Times New Roman"/>
-            </a:endParaRPr>
-          </a:p>
-          <a:p>
-            <a:pPr marL="0" indent="0">
-              <a:buClr>
-                <a:srgbClr val="9E3611"/>
-              </a:buClr>
-              <a:buNone/>
-            </a:pPr>
-            <a:endParaRPr lang="en-US" sz="1850" b="0" dirty="0">
-              <a:ea typeface="游ゴシック Medium"/>
-              <a:cs typeface="Times New Roman"/>
-            </a:endParaRPr>
-          </a:p>
-          <a:p>
-            <a:pPr marL="0" indent="0">
-              <a:buClr>
-                <a:srgbClr val="9E3611"/>
-              </a:buClr>
-              <a:buNone/>
-            </a:pPr>
-            <a:endParaRPr lang="en-US" sz="1850" b="0" dirty="0">
-              <a:ea typeface="游ゴシック Medium"/>
-              <a:cs typeface="Times New Roman"/>
-            </a:endParaRPr>
-          </a:p>
-          <a:p>
-            <a:pPr marL="0" indent="0">
-              <a:buClr>
-                <a:srgbClr val="9E3611"/>
-              </a:buClr>
-              <a:buNone/>
-            </a:pPr>
-            <a:endParaRPr lang="en-US" sz="1850" b="0" dirty="0">
-              <a:ea typeface="游ゴシック Medium"/>
-              <a:cs typeface="Times New Roman"/>
-            </a:endParaRPr>
-          </a:p>
-          <a:p>
-            <a:pPr marL="0" indent="0">
-              <a:buClr>
-                <a:srgbClr val="9E3611"/>
-              </a:buClr>
-              <a:buNone/>
-            </a:pPr>
-            <a:endParaRPr lang="en-US" sz="1850" b="0" dirty="0">
-              <a:ea typeface="游ゴシック Medium"/>
-              <a:cs typeface="Times New Roman"/>
-            </a:endParaRPr>
-          </a:p>
-          <a:p>
-            <a:pPr marL="0" indent="0">
-              <a:buClr>
-                <a:srgbClr val="9E3611"/>
-              </a:buClr>
-              <a:buNone/>
-            </a:pPr>
-            <a:endParaRPr lang="en-US" sz="1850" b="0" dirty="0">
-              <a:ea typeface="游ゴシック Medium"/>
-              <a:cs typeface="Times New Roman"/>
-            </a:endParaRPr>
-          </a:p>
-          <a:p>
-            <a:pPr marL="0" indent="0">
-              <a:buClr>
-                <a:srgbClr val="9E3611"/>
-              </a:buClr>
-              <a:buNone/>
-            </a:pPr>
-            <a:endParaRPr lang="en-US" sz="1850" b="0" dirty="0">
-              <a:ea typeface="游ゴシック Medium"/>
-              <a:cs typeface="Times New Roman"/>
-            </a:endParaRPr>
-          </a:p>
-          <a:p>
-            <a:pPr marL="0" indent="0">
-              <a:buClr>
-                <a:srgbClr val="9E3611"/>
-              </a:buClr>
-              <a:buNone/>
-            </a:pPr>
-            <a:endParaRPr lang="en-US" sz="1850" b="0" dirty="0">
-              <a:ea typeface="游ゴシック Medium"/>
-              <a:cs typeface="Times New Roman"/>
-            </a:endParaRPr>
-          </a:p>
-          <a:p>
-            <a:pPr marL="0" indent="0">
-              <a:buClr>
-                <a:srgbClr val="9E3611"/>
-              </a:buClr>
-              <a:buNone/>
-            </a:pPr>
-            <a:endParaRPr lang="en-US" sz="1850" b="0" dirty="0">
-              <a:ea typeface="游ゴシック Medium"/>
-              <a:cs typeface="Times New Roman"/>
-            </a:endParaRPr>
-          </a:p>
-          <a:p>
-            <a:pPr marL="0" indent="0">
-              <a:buClr>
-                <a:srgbClr val="9E3611"/>
-              </a:buClr>
-              <a:buNone/>
-            </a:pPr>
-            <a:endParaRPr lang="en-US" sz="1850" b="0" dirty="0">
-              <a:ea typeface="游ゴシック Medium"/>
-              <a:cs typeface="Times New Roman"/>
-            </a:endParaRPr>
-          </a:p>
-        </p:txBody>
-      </p:sp>
-      <p:sp>
-        <p:nvSpPr>
-          <p:cNvPr id="6" name="Slide Number Placeholder 2">
-            <a:extLst>
-              <a:ext uri="{FF2B5EF4-FFF2-40B4-BE49-F238E27FC236}">
-                <a16:creationId xmlns:a16="http://schemas.microsoft.com/office/drawing/2014/main" id="{A38C8B24-24FF-6957-259C-F6EB4148B521}"/>
-              </a:ext>
-            </a:extLst>
-          </p:cNvPr>
-          <p:cNvSpPr txBox="1">
-            <a:spLocks/>
-          </p:cNvSpPr>
-          <p:nvPr/>
-        </p:nvSpPr>
-        <p:spPr>
-          <a:xfrm>
-            <a:off x="8483346" y="4704588"/>
-            <a:ext cx="480060" cy="273844"/>
-          </a:xfrm>
-          <a:prstGeom prst="rect">
-            <a:avLst/>
-          </a:prstGeom>
-          <a:noFill/>
-        </p:spPr>
-        <p:txBody>
-          <a:bodyPr vert="horz" lIns="91440" tIns="45720" rIns="91440" bIns="45720" rtlCol="0" anchor="ctr">
-            <a:normAutofit/>
-          </a:bodyPr>
-          <a:lstStyle>
-            <a:defPPr>
-              <a:defRPr lang="en-US"/>
-            </a:defPPr>
-            <a:lvl1pPr marL="0" algn="ctr" defTabSz="457200" rtl="0" eaLnBrk="1" latinLnBrk="0" hangingPunct="1">
-              <a:defRPr sz="1050" b="1" kern="1200">
-                <a:solidFill>
-                  <a:srgbClr val="FFFFFF"/>
-                </a:solidFill>
-                <a:latin typeface="+mj-lt"/>
-                <a:ea typeface="+mn-ea"/>
-                <a:cs typeface="+mn-cs"/>
-              </a:defRPr>
-            </a:lvl1pPr>
-            <a:lvl2pPr marL="457200" algn="l" defTabSz="457200" rtl="0" eaLnBrk="1" latinLnBrk="0" hangingPunct="1">
-              <a:defRPr sz="1800" kern="1200">
-                <a:solidFill>
-                  <a:schemeClr val="tx1"/>
-                </a:solidFill>
-                <a:latin typeface="+mn-lt"/>
-                <a:ea typeface="+mn-ea"/>
-                <a:cs typeface="+mn-cs"/>
-              </a:defRPr>
-            </a:lvl2pPr>
-            <a:lvl3pPr marL="914400" algn="l" defTabSz="457200" rtl="0" eaLnBrk="1" latinLnBrk="0" hangingPunct="1">
-              <a:defRPr sz="1800" kern="1200">
-                <a:solidFill>
-                  <a:schemeClr val="tx1"/>
-                </a:solidFill>
-                <a:latin typeface="+mn-lt"/>
-                <a:ea typeface="+mn-ea"/>
-                <a:cs typeface="+mn-cs"/>
-              </a:defRPr>
-            </a:lvl3pPr>
-            <a:lvl4pPr marL="1371600" algn="l" defTabSz="457200" rtl="0" eaLnBrk="1" latinLnBrk="0" hangingPunct="1">
-              <a:defRPr sz="1800" kern="1200">
-                <a:solidFill>
-                  <a:schemeClr val="tx1"/>
-                </a:solidFill>
-                <a:latin typeface="+mn-lt"/>
-                <a:ea typeface="+mn-ea"/>
-                <a:cs typeface="+mn-cs"/>
-              </a:defRPr>
-            </a:lvl4pPr>
-            <a:lvl5pPr marL="1828800" algn="l" defTabSz="457200" rtl="0" eaLnBrk="1" latinLnBrk="0" hangingPunct="1">
-              <a:defRPr sz="1800" kern="1200">
-                <a:solidFill>
-                  <a:schemeClr val="tx1"/>
-                </a:solidFill>
-                <a:latin typeface="+mn-lt"/>
-                <a:ea typeface="+mn-ea"/>
-                <a:cs typeface="+mn-cs"/>
-              </a:defRPr>
-            </a:lvl5pPr>
-            <a:lvl6pPr marL="2286000" algn="l" defTabSz="457200" rtl="0" eaLnBrk="1" latinLnBrk="0" hangingPunct="1">
-              <a:defRPr sz="1800" kern="1200">
-                <a:solidFill>
-                  <a:schemeClr val="tx1"/>
-                </a:solidFill>
-                <a:latin typeface="+mn-lt"/>
-                <a:ea typeface="+mn-ea"/>
-                <a:cs typeface="+mn-cs"/>
-              </a:defRPr>
-            </a:lvl6pPr>
-            <a:lvl7pPr marL="2743200" algn="l" defTabSz="457200" rtl="0" eaLnBrk="1" latinLnBrk="0" hangingPunct="1">
-              <a:defRPr sz="1800" kern="1200">
-                <a:solidFill>
-                  <a:schemeClr val="tx1"/>
-                </a:solidFill>
-                <a:latin typeface="+mn-lt"/>
-                <a:ea typeface="+mn-ea"/>
-                <a:cs typeface="+mn-cs"/>
-              </a:defRPr>
-            </a:lvl7pPr>
-            <a:lvl8pPr marL="3200400" algn="l" defTabSz="457200" rtl="0" eaLnBrk="1" latinLnBrk="0" hangingPunct="1">
-              <a:defRPr sz="1800" kern="1200">
-                <a:solidFill>
-                  <a:schemeClr val="tx1"/>
-                </a:solidFill>
-                <a:latin typeface="+mn-lt"/>
-                <a:ea typeface="+mn-ea"/>
-                <a:cs typeface="+mn-cs"/>
-              </a:defRPr>
-            </a:lvl8pPr>
-            <a:lvl9pPr marL="3657600" algn="l" defTabSz="457200" rtl="0" eaLnBrk="1" latinLnBrk="0" hangingPunct="1">
-              <a:defRPr sz="1800" kern="1200">
-                <a:solidFill>
-                  <a:schemeClr val="tx1"/>
-                </a:solidFill>
-                <a:latin typeface="+mn-lt"/>
-                <a:ea typeface="+mn-ea"/>
-                <a:cs typeface="+mn-cs"/>
-              </a:defRPr>
-            </a:lvl9pPr>
-          </a:lstStyle>
-          <a:p>
-            <a:fld id="{7475F232-FFFE-5E6C-5554-2F165DAD28C0}" type="slidenum">
-              <a:rPr lang="en-JP" smtClean="0"/>
-              <a:pPr/>
-              <a:t>7</a:t>
-            </a:fld>
-            <a:endParaRPr lang="en-JP" dirty="0"/>
-          </a:p>
-        </p:txBody>
-      </p:sp>
-      <p:pic>
-        <p:nvPicPr>
-          <p:cNvPr id="10" name="Picture 9">
-            <a:extLst>
-              <a:ext uri="{FF2B5EF4-FFF2-40B4-BE49-F238E27FC236}">
-                <a16:creationId xmlns:a16="http://schemas.microsoft.com/office/drawing/2014/main" id="{F40938B9-F821-E185-E3EE-A3237F47D80C}"/>
-              </a:ext>
-            </a:extLst>
-          </p:cNvPr>
-          <p:cNvPicPr>
-            <a:picLocks noChangeAspect="1"/>
-          </p:cNvPicPr>
-          <p:nvPr/>
-        </p:nvPicPr>
-        <p:blipFill>
-          <a:blip r:embed="rId3"/>
-          <a:stretch>
-            <a:fillRect/>
-          </a:stretch>
-        </p:blipFill>
-        <p:spPr>
-          <a:xfrm>
-            <a:off x="1647825" y="657388"/>
-            <a:ext cx="5848350" cy="4391025"/>
-          </a:xfrm>
-          <a:prstGeom prst="rect">
-            <a:avLst/>
-          </a:prstGeom>
-        </p:spPr>
-      </p:pic>
-    </p:spTree>
-    <p:extLst>
-      <p:ext uri="{BB962C8B-B14F-4D97-AF65-F5344CB8AC3E}">
-        <p14:creationId xmlns:p14="http://schemas.microsoft.com/office/powerpoint/2010/main" val="1907719231"/>
-      </p:ext>
-    </p:extLst>
-  </p:cSld>
-  <p:clrMapOvr>
-    <a:masterClrMapping/>
-  </p:clrMapOvr>
-</p:sld>
-</file>
-
-<file path=ppt/slides/slide8.xml><?xml version="1.0" encoding="utf-8"?>
 <p:sld xmlns:a="http://schemas.openxmlformats.org/drawingml/2006/main" xmlns:r="http://schemas.openxmlformats.org/officeDocument/2006/relationships" xmlns:p="http://schemas.openxmlformats.org/presentationml/2006/main">
   <p:cSld>
     <p:spTree>
@@ -18570,7 +19079,7 @@
             <a:fld id="{7475F232-FFFE-5E6C-5554-2F165DAD28C0}" type="slidenum">
               <a:rPr lang="en-JP" smtClean="0"/>
               <a:pPr/>
-              <a:t>8</a:t>
+              <a:t>7</a:t>
             </a:fld>
             <a:endParaRPr lang="en-JP" dirty="0"/>
           </a:p>
@@ -18661,7 +19170,7 @@
 </p:sld>
 </file>
 
-<file path=ppt/slides/slide9.xml><?xml version="1.0" encoding="utf-8"?>
+<file path=ppt/slides/slide8.xml><?xml version="1.0" encoding="utf-8"?>
 <p:sld xmlns:a="http://schemas.openxmlformats.org/drawingml/2006/main" xmlns:r="http://schemas.openxmlformats.org/officeDocument/2006/relationships" xmlns:p="http://schemas.openxmlformats.org/presentationml/2006/main">
   <p:cSld>
     <p:spTree>
@@ -18669,7 +19178,7 @@
         <p:cNvPr id="1" name="">
           <a:extLst>
             <a:ext uri="{FF2B5EF4-FFF2-40B4-BE49-F238E27FC236}">
-              <a16:creationId xmlns:a16="http://schemas.microsoft.com/office/drawing/2014/main" id="{0CDEE615-AAEB-85FD-6A44-E1614A639C07}"/>
+              <a16:creationId xmlns:a16="http://schemas.microsoft.com/office/drawing/2014/main" id="{682946F0-4886-E1AB-21AB-5E3D278DE9DC}"/>
             </a:ext>
           </a:extLst>
         </p:cNvPr>
@@ -18689,7 +19198,7 @@
           <p:cNvPr id="4" name="Title 3">
             <a:extLst>
               <a:ext uri="{FF2B5EF4-FFF2-40B4-BE49-F238E27FC236}">
-                <a16:creationId xmlns:a16="http://schemas.microsoft.com/office/drawing/2014/main" id="{859D0D0E-5139-8637-F4ED-74D6CAAA275C}"/>
+                <a16:creationId xmlns:a16="http://schemas.microsoft.com/office/drawing/2014/main" id="{9604A049-4A1D-2A82-224B-3C431ED2206D}"/>
               </a:ext>
             </a:extLst>
           </p:cNvPr>
@@ -18715,7 +19224,7 @@
                 <a:ea typeface="游ゴシック Medium"/>
                 <a:cs typeface="Times New Roman"/>
               </a:rPr>
-              <a:t>   Image Registration: Problem</a:t>
+              <a:t>   Image Registration: Results</a:t>
             </a:r>
           </a:p>
         </p:txBody>
@@ -18725,7 +19234,7 @@
           <p:cNvPr id="5" name="Text Placeholder 1">
             <a:extLst>
               <a:ext uri="{FF2B5EF4-FFF2-40B4-BE49-F238E27FC236}">
-                <a16:creationId xmlns:a16="http://schemas.microsoft.com/office/drawing/2014/main" id="{26618D5B-77FA-8994-A5A3-4939BDC58824}"/>
+                <a16:creationId xmlns:a16="http://schemas.microsoft.com/office/drawing/2014/main" id="{3DD8E8B9-C7CA-94B6-5C83-2E0F0AD60C18}"/>
               </a:ext>
             </a:extLst>
           </p:cNvPr>
@@ -18736,7 +19245,7 @@
         </p:nvSpPr>
         <p:spPr>
           <a:xfrm>
-            <a:off x="323528" y="587025"/>
+            <a:off x="323528" y="707816"/>
             <a:ext cx="8218099" cy="4305013"/>
           </a:xfrm>
           <a:prstGeom prst="rect">
@@ -18997,19 +19506,39 @@
               </a:buClr>
               <a:buNone/>
             </a:pPr>
+            <a:endParaRPr lang="en-US" sz="1850" b="0" dirty="0">
+              <a:ea typeface="游ゴシック Medium"/>
+              <a:cs typeface="Times New Roman"/>
+            </a:endParaRPr>
+          </a:p>
+          <a:p>
+            <a:pPr marL="0" indent="0">
+              <a:buClr>
+                <a:srgbClr val="9E3611"/>
+              </a:buClr>
+              <a:buNone/>
+            </a:pPr>
             <a:r>
-              <a:rPr lang="en-US" sz="2000" dirty="0">
+              <a:rPr lang="en-US" sz="1850" b="0" dirty="0">
                 <a:ea typeface="游ゴシック Medium"/>
                 <a:cs typeface="Times New Roman"/>
               </a:rPr>
-              <a:t>Problem</a:t>
+              <a:t>Blue: GT</a:t>
             </a:r>
+          </a:p>
+          <a:p>
+            <a:pPr marL="0" indent="0">
+              <a:buClr>
+                <a:srgbClr val="9E3611"/>
+              </a:buClr>
+              <a:buNone/>
+            </a:pPr>
             <a:r>
-              <a:rPr lang="en-US" sz="2000" b="0" dirty="0">
+              <a:rPr lang="en-US" sz="1850" b="0" dirty="0">
                 <a:ea typeface="游ゴシック Medium"/>
                 <a:cs typeface="Times New Roman"/>
               </a:rPr>
-              <a:t>:</a:t>
+              <a:t>Yellow: IR</a:t>
             </a:r>
           </a:p>
           <a:p>
@@ -19019,36 +19548,7 @@
               </a:buClr>
               <a:buNone/>
             </a:pPr>
-            <a:r>
-              <a:rPr lang="en-US" sz="2000" b="0" dirty="0">
-                <a:ea typeface="游ゴシック Medium"/>
-                <a:cs typeface="Times New Roman"/>
-              </a:rPr>
-              <a:t>2D IR does not account for out-of-plane motion (z axis) nor pitch and roll</a:t>
-            </a:r>
-          </a:p>
-          <a:p>
-            <a:pPr marL="0" indent="0">
-              <a:buClr>
-                <a:srgbClr val="9E3611"/>
-              </a:buClr>
-              <a:buNone/>
-            </a:pPr>
-            <a:r>
-              <a:rPr lang="en-US" sz="2000" b="0" dirty="0">
-                <a:ea typeface="游ゴシック Medium"/>
-                <a:cs typeface="Times New Roman"/>
-              </a:rPr>
-              <a:t>	 y                                                          </a:t>
-            </a:r>
-            <a:r>
-              <a:rPr lang="en-US" sz="2000" b="0" dirty="0" err="1">
-                <a:ea typeface="游ゴシック Medium"/>
-                <a:cs typeface="Times New Roman"/>
-              </a:rPr>
-              <a:t>y</a:t>
-            </a:r>
-            <a:endParaRPr lang="en-US" sz="2000" b="0" dirty="0">
+            <a:endParaRPr lang="en-US" sz="1850" b="0" dirty="0">
               <a:ea typeface="游ゴシック Medium"/>
               <a:cs typeface="Times New Roman"/>
             </a:endParaRPr>
@@ -19060,7 +19560,7 @@
               </a:buClr>
               <a:buNone/>
             </a:pPr>
-            <a:endParaRPr lang="en-US" sz="2000" b="0" dirty="0">
+            <a:endParaRPr lang="en-US" sz="1850" b="0" dirty="0">
               <a:ea typeface="游ゴシック Medium"/>
               <a:cs typeface="Times New Roman"/>
             </a:endParaRPr>
@@ -19072,13 +19572,10 @@
               </a:buClr>
               <a:buNone/>
             </a:pPr>
-            <a:r>
-              <a:rPr lang="en-US" sz="2000" b="0" dirty="0">
-                <a:ea typeface="游ゴシック Medium"/>
-                <a:cs typeface="Times New Roman"/>
-              </a:rPr>
-              <a:t>								       x						</a:t>
-            </a:r>
+            <a:endParaRPr lang="en-US" sz="1850" b="0" dirty="0">
+              <a:ea typeface="游ゴシック Medium"/>
+              <a:cs typeface="Times New Roman"/>
+            </a:endParaRPr>
           </a:p>
           <a:p>
             <a:pPr marL="0" indent="0">
@@ -19087,13 +19584,10 @@
               </a:buClr>
               <a:buNone/>
             </a:pPr>
-            <a:r>
-              <a:rPr lang="en-US" sz="2000" b="0" dirty="0">
-                <a:ea typeface="游ゴシック Medium"/>
-                <a:cs typeface="Times New Roman"/>
-              </a:rPr>
-              <a:t>		        x						z</a:t>
-            </a:r>
+            <a:endParaRPr lang="en-US" sz="1850" b="0" dirty="0">
+              <a:ea typeface="游ゴシック Medium"/>
+              <a:cs typeface="Times New Roman"/>
+            </a:endParaRPr>
           </a:p>
           <a:p>
             <a:pPr marL="0" indent="0">
@@ -19102,18 +19596,10 @@
               </a:buClr>
               <a:buNone/>
             </a:pPr>
-            <a:r>
-              <a:rPr lang="en-US" sz="2000" dirty="0">
-                <a:solidFill>
-                  <a:schemeClr val="accent1"/>
-                </a:solidFill>
-              </a:rPr>
-              <a:t>➔ </a:t>
-            </a:r>
-            <a:r>
-              <a:rPr lang="en-US" sz="2000" b="0" dirty="0"/>
-              <a:t>Features present in one picture are not necessarily present in the other (spawning feature problem)</a:t>
-            </a:r>
+            <a:endParaRPr lang="en-US" sz="1850" b="0" dirty="0">
+              <a:ea typeface="游ゴシック Medium"/>
+              <a:cs typeface="Times New Roman"/>
+            </a:endParaRPr>
           </a:p>
           <a:p>
             <a:pPr marL="0" indent="0">
@@ -19122,18 +19608,10 @@
               </a:buClr>
               <a:buNone/>
             </a:pPr>
-            <a:r>
-              <a:rPr lang="en-US" sz="2000" dirty="0">
-                <a:solidFill>
-                  <a:schemeClr val="accent1"/>
-                </a:solidFill>
-              </a:rPr>
-              <a:t>➔ </a:t>
-            </a:r>
-            <a:r>
-              <a:rPr lang="en-US" sz="2000" b="0" dirty="0"/>
-              <a:t>2D IR cannot find a transform which makes the two images align perfectly</a:t>
-            </a:r>
+            <a:endParaRPr lang="en-US" sz="1850" b="0" dirty="0">
+              <a:ea typeface="游ゴシック Medium"/>
+              <a:cs typeface="Times New Roman"/>
+            </a:endParaRPr>
           </a:p>
           <a:p>
             <a:pPr marL="0" indent="0">
@@ -19142,19 +19620,43 @@
               </a:buClr>
               <a:buNone/>
             </a:pPr>
-            <a:r>
-              <a:rPr lang="en-US" sz="2000" dirty="0">
-                <a:solidFill>
-                  <a:schemeClr val="accent1"/>
-                </a:solidFill>
-              </a:rPr>
-              <a:t>➔ </a:t>
-            </a:r>
-            <a:r>
-              <a:rPr lang="en-US" sz="2000" b="0" dirty="0"/>
-              <a:t>GT transform will not yield a perfect error metric</a:t>
-            </a:r>
-            <a:endParaRPr lang="en-US" sz="2000" b="0" dirty="0">
+            <a:endParaRPr lang="en-US" sz="1850" b="0" dirty="0">
+              <a:ea typeface="游ゴシック Medium"/>
+              <a:cs typeface="Times New Roman"/>
+            </a:endParaRPr>
+          </a:p>
+          <a:p>
+            <a:pPr marL="0" indent="0">
+              <a:buClr>
+                <a:srgbClr val="9E3611"/>
+              </a:buClr>
+              <a:buNone/>
+            </a:pPr>
+            <a:endParaRPr lang="en-US" sz="1850" b="0" dirty="0">
+              <a:ea typeface="游ゴシック Medium"/>
+              <a:cs typeface="Times New Roman"/>
+            </a:endParaRPr>
+          </a:p>
+          <a:p>
+            <a:pPr marL="0" indent="0">
+              <a:buClr>
+                <a:srgbClr val="9E3611"/>
+              </a:buClr>
+              <a:buNone/>
+            </a:pPr>
+            <a:endParaRPr lang="en-US" sz="1850" b="0" dirty="0">
+              <a:ea typeface="游ゴシック Medium"/>
+              <a:cs typeface="Times New Roman"/>
+            </a:endParaRPr>
+          </a:p>
+          <a:p>
+            <a:pPr marL="0" indent="0">
+              <a:buClr>
+                <a:srgbClr val="9E3611"/>
+              </a:buClr>
+              <a:buNone/>
+            </a:pPr>
+            <a:endParaRPr lang="en-US" sz="1850" b="0" dirty="0">
               <a:ea typeface="游ゴシック Medium"/>
               <a:cs typeface="Times New Roman"/>
             </a:endParaRPr>
@@ -19166,7 +19668,7 @@
           <p:cNvPr id="6" name="Slide Number Placeholder 2">
             <a:extLst>
               <a:ext uri="{FF2B5EF4-FFF2-40B4-BE49-F238E27FC236}">
-                <a16:creationId xmlns:a16="http://schemas.microsoft.com/office/drawing/2014/main" id="{3AB306FF-6212-2853-245A-1687794578FA}"/>
+                <a16:creationId xmlns:a16="http://schemas.microsoft.com/office/drawing/2014/main" id="{A38C8B24-24FF-6957-259C-F6EB4148B521}"/>
               </a:ext>
             </a:extLst>
           </p:cNvPr>
@@ -19288,510 +19790,706 @@
             <a:fld id="{7475F232-FFFE-5E6C-5554-2F165DAD28C0}" type="slidenum">
               <a:rPr lang="en-JP" smtClean="0"/>
               <a:pPr/>
-              <a:t>9</a:t>
+              <a:t>8</a:t>
             </a:fld>
             <a:endParaRPr lang="en-JP" dirty="0"/>
           </a:p>
         </p:txBody>
       </p:sp>
-      <p:sp>
-        <p:nvSpPr>
-          <p:cNvPr id="2" name="Rectangle 1">
+      <p:pic>
+        <p:nvPicPr>
+          <p:cNvPr id="10" name="Picture 9">
             <a:extLst>
               <a:ext uri="{FF2B5EF4-FFF2-40B4-BE49-F238E27FC236}">
-                <a16:creationId xmlns:a16="http://schemas.microsoft.com/office/drawing/2014/main" id="{B3492867-713B-53BD-0E58-DD806D3F62EE}"/>
+                <a16:creationId xmlns:a16="http://schemas.microsoft.com/office/drawing/2014/main" id="{F40938B9-F821-E185-E3EE-A3237F47D80C}"/>
               </a:ext>
             </a:extLst>
           </p:cNvPr>
-          <p:cNvSpPr/>
+          <p:cNvPicPr>
+            <a:picLocks noChangeAspect="1"/>
+          </p:cNvPicPr>
           <p:nvPr/>
-        </p:nvSpPr>
+        </p:nvPicPr>
+        <p:blipFill>
+          <a:blip r:embed="rId3"/>
+          <a:stretch>
+            <a:fillRect/>
+          </a:stretch>
+        </p:blipFill>
         <p:spPr>
           <a:xfrm>
-            <a:off x="1547664" y="1851670"/>
-            <a:ext cx="792088" cy="792088"/>
+            <a:off x="1647825" y="657388"/>
+            <a:ext cx="5848350" cy="4391025"/>
           </a:xfrm>
           <a:prstGeom prst="rect">
             <a:avLst/>
           </a:prstGeom>
         </p:spPr>
-        <p:style>
-          <a:lnRef idx="2">
-            <a:schemeClr val="accent1">
-              <a:shade val="15000"/>
-            </a:schemeClr>
-          </a:lnRef>
-          <a:fillRef idx="1">
-            <a:schemeClr val="accent1"/>
-          </a:fillRef>
-          <a:effectRef idx="0">
-            <a:schemeClr val="accent1"/>
-          </a:effectRef>
-          <a:fontRef idx="minor">
-            <a:schemeClr val="lt1"/>
-          </a:fontRef>
-        </p:style>
+      </p:pic>
+    </p:spTree>
+    <p:extLst>
+      <p:ext uri="{BB962C8B-B14F-4D97-AF65-F5344CB8AC3E}">
+        <p14:creationId xmlns:p14="http://schemas.microsoft.com/office/powerpoint/2010/main" val="1907719231"/>
+      </p:ext>
+    </p:extLst>
+  </p:cSld>
+  <p:clrMapOvr>
+    <a:masterClrMapping/>
+  </p:clrMapOvr>
+</p:sld>
+</file>
+
+<file path=ppt/slides/slide9.xml><?xml version="1.0" encoding="utf-8"?>
+<p:sld xmlns:a="http://schemas.openxmlformats.org/drawingml/2006/main" xmlns:r="http://schemas.openxmlformats.org/officeDocument/2006/relationships" xmlns:p="http://schemas.openxmlformats.org/presentationml/2006/main">
+  <p:cSld>
+    <p:spTree>
+      <p:nvGrpSpPr>
+        <p:cNvPr id="1" name="">
+          <a:extLst>
+            <a:ext uri="{FF2B5EF4-FFF2-40B4-BE49-F238E27FC236}">
+              <a16:creationId xmlns:a16="http://schemas.microsoft.com/office/drawing/2014/main" id="{9849BFF6-F96D-759B-7CD5-FE7983037B18}"/>
+            </a:ext>
+          </a:extLst>
+        </p:cNvPr>
+        <p:cNvGrpSpPr/>
+        <p:nvPr/>
+      </p:nvGrpSpPr>
+      <p:grpSpPr>
+        <a:xfrm>
+          <a:off x="0" y="0"/>
+          <a:ext cx="0" cy="0"/>
+          <a:chOff x="0" y="0"/>
+          <a:chExt cx="0" cy="0"/>
+        </a:xfrm>
+      </p:grpSpPr>
+      <p:sp>
+        <p:nvSpPr>
+          <p:cNvPr id="4" name="Title 3">
+            <a:extLst>
+              <a:ext uri="{FF2B5EF4-FFF2-40B4-BE49-F238E27FC236}">
+                <a16:creationId xmlns:a16="http://schemas.microsoft.com/office/drawing/2014/main" id="{397579CF-050E-2E4C-565F-8F9AEE04871E}"/>
+              </a:ext>
+            </a:extLst>
+          </p:cNvPr>
+          <p:cNvSpPr>
+            <a:spLocks noGrp="1"/>
+          </p:cNvSpPr>
+          <p:nvPr>
+            <p:ph type="title" idx="2"/>
+          </p:nvPr>
+        </p:nvSpPr>
+        <p:spPr/>
         <p:txBody>
-          <a:bodyPr rtlCol="0" anchor="ctr"/>
+          <a:bodyPr/>
           <a:lstStyle/>
           <a:p>
-            <a:pPr algn="ctr"/>
-            <a:endParaRPr lang="en-US"/>
+            <a:pPr marL="0">
+              <a:buClr>
+                <a:srgbClr val="9E3611"/>
+              </a:buClr>
+            </a:pPr>
+            <a:r>
+              <a:rPr lang="en-US" sz="2400" dirty="0">
+                <a:ea typeface="游ゴシック Medium"/>
+                <a:cs typeface="Times New Roman"/>
+              </a:rPr>
+              <a:t>   Image Registration: Results</a:t>
+            </a:r>
           </a:p>
         </p:txBody>
       </p:sp>
       <p:sp>
         <p:nvSpPr>
-          <p:cNvPr id="3" name="Rectangle 2">
+          <p:cNvPr id="5" name="Text Placeholder 1">
             <a:extLst>
               <a:ext uri="{FF2B5EF4-FFF2-40B4-BE49-F238E27FC236}">
-                <a16:creationId xmlns:a16="http://schemas.microsoft.com/office/drawing/2014/main" id="{C51DAF8C-1498-EDC2-5A45-DEAE5FC3278B}"/>
+                <a16:creationId xmlns:a16="http://schemas.microsoft.com/office/drawing/2014/main" id="{EAB8BF09-3CC4-BE08-8058-C4E80F75A750}"/>
               </a:ext>
             </a:extLst>
           </p:cNvPr>
-          <p:cNvSpPr/>
+          <p:cNvSpPr txBox="1">
+            <a:spLocks/>
+          </p:cNvSpPr>
           <p:nvPr/>
         </p:nvSpPr>
         <p:spPr>
           <a:xfrm>
-            <a:off x="2987824" y="1851670"/>
-            <a:ext cx="792088" cy="792088"/>
+            <a:off x="323528" y="707816"/>
+            <a:ext cx="8218099" cy="4305013"/>
+          </a:xfrm>
+          <a:prstGeom prst="rect">
+            <a:avLst/>
+          </a:prstGeom>
+          <a:noFill/>
+        </p:spPr>
+        <p:txBody>
+          <a:bodyPr vert="horz" lIns="91440" tIns="45720" rIns="91440" bIns="45720" rtlCol="0" anchor="t">
+            <a:noAutofit/>
+          </a:bodyPr>
+          <a:lstStyle>
+            <a:lvl1pPr marL="137160" indent="-137160" algn="l" defTabSz="685800" rtl="0" eaLnBrk="1" latinLnBrk="0" hangingPunct="1">
+              <a:lnSpc>
+                <a:spcPct val="90000"/>
+              </a:lnSpc>
+              <a:spcBef>
+                <a:spcPts val="900"/>
+              </a:spcBef>
+              <a:buClr>
+                <a:schemeClr val="accent1">
+                  <a:lumMod val="75000"/>
+                </a:schemeClr>
+              </a:buClr>
+              <a:buSzPct val="100000"/>
+              <a:buFont typeface="Arial" panose="020B0604020202020204" pitchFamily="34" charset="0"/>
+              <a:buChar char="•"/>
+              <a:defRPr kumimoji="1" sz="1500" b="1" kern="1200">
+                <a:solidFill>
+                  <a:schemeClr val="tx1"/>
+                </a:solidFill>
+                <a:latin typeface="游ゴシック Medium" panose="020B0500000000000000" pitchFamily="50" charset="-128"/>
+                <a:ea typeface="游ゴシック Medium" panose="020B0500000000000000" pitchFamily="50" charset="-128"/>
+                <a:cs typeface="+mn-cs"/>
+              </a:defRPr>
+            </a:lvl1pPr>
+            <a:lvl2pPr marL="342900" indent="-137160" algn="l" defTabSz="685800" rtl="0" eaLnBrk="1" latinLnBrk="0" hangingPunct="1">
+              <a:lnSpc>
+                <a:spcPct val="90000"/>
+              </a:lnSpc>
+              <a:spcBef>
+                <a:spcPts val="300"/>
+              </a:spcBef>
+              <a:spcAft>
+                <a:spcPts val="150"/>
+              </a:spcAft>
+              <a:buClr>
+                <a:schemeClr val="accent1">
+                  <a:lumMod val="75000"/>
+                </a:schemeClr>
+              </a:buClr>
+              <a:buSzPct val="100000"/>
+              <a:buFont typeface="Arial" panose="020B0604020202020204" pitchFamily="34" charset="0"/>
+              <a:buChar char="•"/>
+              <a:defRPr kumimoji="1" sz="1350" b="1" kern="1200">
+                <a:solidFill>
+                  <a:schemeClr val="tx1"/>
+                </a:solidFill>
+                <a:latin typeface="游ゴシック Medium" panose="020B0500000000000000" pitchFamily="50" charset="-128"/>
+                <a:ea typeface="游ゴシック Medium" panose="020B0500000000000000" pitchFamily="50" charset="-128"/>
+                <a:cs typeface="+mn-cs"/>
+              </a:defRPr>
+            </a:lvl2pPr>
+            <a:lvl3pPr marL="548640" indent="-137160" algn="l" defTabSz="685800" rtl="0" eaLnBrk="1" latinLnBrk="0" hangingPunct="1">
+              <a:lnSpc>
+                <a:spcPct val="90000"/>
+              </a:lnSpc>
+              <a:spcBef>
+                <a:spcPts val="300"/>
+              </a:spcBef>
+              <a:spcAft>
+                <a:spcPts val="150"/>
+              </a:spcAft>
+              <a:buClr>
+                <a:schemeClr val="accent1">
+                  <a:lumMod val="75000"/>
+                </a:schemeClr>
+              </a:buClr>
+              <a:buSzPct val="100000"/>
+              <a:buFont typeface="Arial" panose="020B0604020202020204" pitchFamily="34" charset="0"/>
+              <a:buChar char="•"/>
+              <a:defRPr kumimoji="1" sz="1200" b="1" kern="1200">
+                <a:solidFill>
+                  <a:schemeClr val="tx1"/>
+                </a:solidFill>
+                <a:latin typeface="游ゴシック Medium" panose="020B0500000000000000" pitchFamily="50" charset="-128"/>
+                <a:ea typeface="游ゴシック Medium" panose="020B0500000000000000" pitchFamily="50" charset="-128"/>
+                <a:cs typeface="+mn-cs"/>
+              </a:defRPr>
+            </a:lvl3pPr>
+            <a:lvl4pPr marL="754380" indent="-137160" algn="l" defTabSz="685800" rtl="0" eaLnBrk="1" latinLnBrk="0" hangingPunct="1">
+              <a:lnSpc>
+                <a:spcPct val="90000"/>
+              </a:lnSpc>
+              <a:spcBef>
+                <a:spcPts val="300"/>
+              </a:spcBef>
+              <a:spcAft>
+                <a:spcPts val="150"/>
+              </a:spcAft>
+              <a:buClr>
+                <a:schemeClr val="accent1">
+                  <a:lumMod val="75000"/>
+                </a:schemeClr>
+              </a:buClr>
+              <a:buSzPct val="100000"/>
+              <a:buFont typeface="Arial" panose="020B0604020202020204" pitchFamily="34" charset="0"/>
+              <a:buChar char="•"/>
+              <a:defRPr kumimoji="1" sz="1200" b="1" kern="1200">
+                <a:solidFill>
+                  <a:schemeClr val="tx1"/>
+                </a:solidFill>
+                <a:latin typeface="游ゴシック Medium" panose="020B0500000000000000" pitchFamily="50" charset="-128"/>
+                <a:ea typeface="游ゴシック Medium" panose="020B0500000000000000" pitchFamily="50" charset="-128"/>
+                <a:cs typeface="+mn-cs"/>
+              </a:defRPr>
+            </a:lvl4pPr>
+            <a:lvl5pPr marL="960120" indent="-137160" algn="l" defTabSz="685800" rtl="0" eaLnBrk="1" latinLnBrk="0" hangingPunct="1">
+              <a:lnSpc>
+                <a:spcPct val="90000"/>
+              </a:lnSpc>
+              <a:spcBef>
+                <a:spcPts val="300"/>
+              </a:spcBef>
+              <a:spcAft>
+                <a:spcPts val="150"/>
+              </a:spcAft>
+              <a:buClr>
+                <a:schemeClr val="accent1">
+                  <a:lumMod val="75000"/>
+                </a:schemeClr>
+              </a:buClr>
+              <a:buSzPct val="100000"/>
+              <a:buFont typeface="Arial" panose="020B0604020202020204" pitchFamily="34" charset="0"/>
+              <a:buChar char="•"/>
+              <a:defRPr kumimoji="1" sz="1200" b="1" kern="1200">
+                <a:solidFill>
+                  <a:schemeClr val="tx1"/>
+                </a:solidFill>
+                <a:latin typeface="游ゴシック Medium" panose="020B0500000000000000" pitchFamily="50" charset="-128"/>
+                <a:ea typeface="游ゴシック Medium" panose="020B0500000000000000" pitchFamily="50" charset="-128"/>
+                <a:cs typeface="+mn-cs"/>
+              </a:defRPr>
+            </a:lvl5pPr>
+            <a:lvl6pPr marL="1200000" indent="-171450" algn="l" defTabSz="685800" rtl="0" eaLnBrk="1" latinLnBrk="0" hangingPunct="1">
+              <a:lnSpc>
+                <a:spcPct val="90000"/>
+              </a:lnSpc>
+              <a:spcBef>
+                <a:spcPts val="300"/>
+              </a:spcBef>
+              <a:spcAft>
+                <a:spcPts val="150"/>
+              </a:spcAft>
+              <a:buClr>
+                <a:schemeClr val="accent1">
+                  <a:lumMod val="75000"/>
+                </a:schemeClr>
+              </a:buClr>
+              <a:buSzPct val="100000"/>
+              <a:buFont typeface="Arial" panose="020B0604020202020204" pitchFamily="34" charset="0"/>
+              <a:buChar char="•"/>
+              <a:defRPr kumimoji="1" sz="1200" kern="1200">
+                <a:solidFill>
+                  <a:schemeClr val="tx1"/>
+                </a:solidFill>
+                <a:latin typeface="+mn-lt"/>
+                <a:ea typeface="+mn-ea"/>
+                <a:cs typeface="+mn-cs"/>
+              </a:defRPr>
+            </a:lvl6pPr>
+            <a:lvl7pPr marL="1425000" indent="-171450" algn="l" defTabSz="685800" rtl="0" eaLnBrk="1" latinLnBrk="0" hangingPunct="1">
+              <a:lnSpc>
+                <a:spcPct val="90000"/>
+              </a:lnSpc>
+              <a:spcBef>
+                <a:spcPts val="300"/>
+              </a:spcBef>
+              <a:spcAft>
+                <a:spcPts val="150"/>
+              </a:spcAft>
+              <a:buClr>
+                <a:schemeClr val="accent1">
+                  <a:lumMod val="75000"/>
+                </a:schemeClr>
+              </a:buClr>
+              <a:buSzPct val="100000"/>
+              <a:buFont typeface="Arial" panose="020B0604020202020204" pitchFamily="34" charset="0"/>
+              <a:buChar char="•"/>
+              <a:defRPr kumimoji="1" sz="1200" kern="1200">
+                <a:solidFill>
+                  <a:schemeClr val="tx1"/>
+                </a:solidFill>
+                <a:latin typeface="+mn-lt"/>
+                <a:ea typeface="+mn-ea"/>
+                <a:cs typeface="+mn-cs"/>
+              </a:defRPr>
+            </a:lvl7pPr>
+            <a:lvl8pPr marL="1650000" indent="-171450" algn="l" defTabSz="685800" rtl="0" eaLnBrk="1" latinLnBrk="0" hangingPunct="1">
+              <a:lnSpc>
+                <a:spcPct val="90000"/>
+              </a:lnSpc>
+              <a:spcBef>
+                <a:spcPts val="300"/>
+              </a:spcBef>
+              <a:spcAft>
+                <a:spcPts val="150"/>
+              </a:spcAft>
+              <a:buClr>
+                <a:schemeClr val="accent1">
+                  <a:lumMod val="75000"/>
+                </a:schemeClr>
+              </a:buClr>
+              <a:buSzPct val="100000"/>
+              <a:buFont typeface="Arial" panose="020B0604020202020204" pitchFamily="34" charset="0"/>
+              <a:buChar char="•"/>
+              <a:defRPr kumimoji="1" sz="1200" kern="1200">
+                <a:solidFill>
+                  <a:schemeClr val="tx1"/>
+                </a:solidFill>
+                <a:latin typeface="+mn-lt"/>
+                <a:ea typeface="+mn-ea"/>
+                <a:cs typeface="+mn-cs"/>
+              </a:defRPr>
+            </a:lvl8pPr>
+            <a:lvl9pPr marL="1875000" indent="-171450" algn="l" defTabSz="685800" rtl="0" eaLnBrk="1" latinLnBrk="0" hangingPunct="1">
+              <a:lnSpc>
+                <a:spcPct val="90000"/>
+              </a:lnSpc>
+              <a:spcBef>
+                <a:spcPts val="300"/>
+              </a:spcBef>
+              <a:spcAft>
+                <a:spcPts val="150"/>
+              </a:spcAft>
+              <a:buClr>
+                <a:schemeClr val="accent1">
+                  <a:lumMod val="75000"/>
+                </a:schemeClr>
+              </a:buClr>
+              <a:buSzPct val="100000"/>
+              <a:buFont typeface="Arial" panose="020B0604020202020204" pitchFamily="34" charset="0"/>
+              <a:buChar char="•"/>
+              <a:defRPr kumimoji="1" sz="1200" kern="1200">
+                <a:solidFill>
+                  <a:schemeClr val="tx1"/>
+                </a:solidFill>
+                <a:latin typeface="+mn-lt"/>
+                <a:ea typeface="+mn-ea"/>
+                <a:cs typeface="+mn-cs"/>
+              </a:defRPr>
+            </a:lvl9pPr>
+          </a:lstStyle>
+          <a:p>
+            <a:pPr marL="0" indent="0">
+              <a:buClr>
+                <a:srgbClr val="9E3611"/>
+              </a:buClr>
+              <a:buNone/>
+            </a:pPr>
+            <a:endParaRPr lang="en-US" sz="1850" b="0" dirty="0">
+              <a:ea typeface="游ゴシック Medium"/>
+              <a:cs typeface="Times New Roman"/>
+            </a:endParaRPr>
+          </a:p>
+          <a:p>
+            <a:pPr marL="0" indent="0">
+              <a:buClr>
+                <a:srgbClr val="9E3611"/>
+              </a:buClr>
+              <a:buNone/>
+            </a:pPr>
+            <a:endParaRPr lang="en-US" sz="1850" b="0" dirty="0">
+              <a:ea typeface="游ゴシック Medium"/>
+              <a:cs typeface="Times New Roman"/>
+            </a:endParaRPr>
+          </a:p>
+          <a:p>
+            <a:pPr marL="0" indent="0">
+              <a:buClr>
+                <a:srgbClr val="9E3611"/>
+              </a:buClr>
+              <a:buNone/>
+            </a:pPr>
+            <a:endParaRPr lang="en-US" sz="1850" b="0" dirty="0">
+              <a:ea typeface="游ゴシック Medium"/>
+              <a:cs typeface="Times New Roman"/>
+            </a:endParaRPr>
+          </a:p>
+          <a:p>
+            <a:pPr marL="0" indent="0">
+              <a:buClr>
+                <a:srgbClr val="9E3611"/>
+              </a:buClr>
+              <a:buNone/>
+            </a:pPr>
+            <a:endParaRPr lang="en-US" sz="1850" b="0" dirty="0">
+              <a:ea typeface="游ゴシック Medium"/>
+              <a:cs typeface="Times New Roman"/>
+            </a:endParaRPr>
+          </a:p>
+          <a:p>
+            <a:pPr marL="0" indent="0">
+              <a:buClr>
+                <a:srgbClr val="9E3611"/>
+              </a:buClr>
+              <a:buNone/>
+            </a:pPr>
+            <a:endParaRPr lang="en-US" sz="1850" b="0" dirty="0">
+              <a:ea typeface="游ゴシック Medium"/>
+              <a:cs typeface="Times New Roman"/>
+            </a:endParaRPr>
+          </a:p>
+          <a:p>
+            <a:pPr marL="0" indent="0">
+              <a:buClr>
+                <a:srgbClr val="9E3611"/>
+              </a:buClr>
+              <a:buNone/>
+            </a:pPr>
+            <a:endParaRPr lang="en-US" sz="1850" b="0" dirty="0">
+              <a:ea typeface="游ゴシック Medium"/>
+              <a:cs typeface="Times New Roman"/>
+            </a:endParaRPr>
+          </a:p>
+          <a:p>
+            <a:pPr marL="0" indent="0">
+              <a:buClr>
+                <a:srgbClr val="9E3611"/>
+              </a:buClr>
+              <a:buNone/>
+            </a:pPr>
+            <a:endParaRPr lang="en-US" sz="1850" b="0" dirty="0">
+              <a:ea typeface="游ゴシック Medium"/>
+              <a:cs typeface="Times New Roman"/>
+            </a:endParaRPr>
+          </a:p>
+          <a:p>
+            <a:pPr marL="0" indent="0">
+              <a:buClr>
+                <a:srgbClr val="9E3611"/>
+              </a:buClr>
+              <a:buNone/>
+            </a:pPr>
+            <a:endParaRPr lang="en-US" sz="1850" b="0" dirty="0">
+              <a:ea typeface="游ゴシック Medium"/>
+              <a:cs typeface="Times New Roman"/>
+            </a:endParaRPr>
+          </a:p>
+          <a:p>
+            <a:pPr marL="0" indent="0">
+              <a:buClr>
+                <a:srgbClr val="9E3611"/>
+              </a:buClr>
+              <a:buNone/>
+            </a:pPr>
+            <a:endParaRPr lang="en-US" sz="1850" b="0" dirty="0">
+              <a:ea typeface="游ゴシック Medium"/>
+              <a:cs typeface="Times New Roman"/>
+            </a:endParaRPr>
+          </a:p>
+          <a:p>
+            <a:pPr marL="0" indent="0">
+              <a:buClr>
+                <a:srgbClr val="9E3611"/>
+              </a:buClr>
+              <a:buNone/>
+            </a:pPr>
+            <a:endParaRPr lang="en-US" sz="1850" b="0" dirty="0">
+              <a:ea typeface="游ゴシック Medium"/>
+              <a:cs typeface="Times New Roman"/>
+            </a:endParaRPr>
+          </a:p>
+          <a:p>
+            <a:pPr marL="0" indent="0">
+              <a:buClr>
+                <a:srgbClr val="9E3611"/>
+              </a:buClr>
+              <a:buNone/>
+            </a:pPr>
+            <a:endParaRPr lang="en-US" sz="1850" b="0" dirty="0">
+              <a:ea typeface="游ゴシック Medium"/>
+              <a:cs typeface="Times New Roman"/>
+            </a:endParaRPr>
+          </a:p>
+          <a:p>
+            <a:pPr marL="0" indent="0">
+              <a:buClr>
+                <a:srgbClr val="9E3611"/>
+              </a:buClr>
+              <a:buNone/>
+            </a:pPr>
+            <a:r>
+              <a:rPr lang="en-US" sz="1850" b="0" dirty="0">
+                <a:ea typeface="游ゴシック Medium"/>
+                <a:cs typeface="Times New Roman"/>
+              </a:rPr>
+              <a:t>      Norm of translational vector		                    Angle of the rotation   </a:t>
+            </a:r>
+          </a:p>
+        </p:txBody>
+      </p:sp>
+      <p:sp>
+        <p:nvSpPr>
+          <p:cNvPr id="6" name="Slide Number Placeholder 2">
+            <a:extLst>
+              <a:ext uri="{FF2B5EF4-FFF2-40B4-BE49-F238E27FC236}">
+                <a16:creationId xmlns:a16="http://schemas.microsoft.com/office/drawing/2014/main" id="{F26921FA-F22E-5477-6E36-22AFF44AB2E2}"/>
+              </a:ext>
+            </a:extLst>
+          </p:cNvPr>
+          <p:cNvSpPr txBox="1">
+            <a:spLocks/>
+          </p:cNvSpPr>
+          <p:nvPr/>
+        </p:nvSpPr>
+        <p:spPr>
+          <a:xfrm>
+            <a:off x="8483346" y="4704588"/>
+            <a:ext cx="480060" cy="273844"/>
+          </a:xfrm>
+          <a:prstGeom prst="rect">
+            <a:avLst/>
+          </a:prstGeom>
+          <a:noFill/>
+        </p:spPr>
+        <p:txBody>
+          <a:bodyPr vert="horz" lIns="91440" tIns="45720" rIns="91440" bIns="45720" rtlCol="0" anchor="ctr">
+            <a:normAutofit/>
+          </a:bodyPr>
+          <a:lstStyle>
+            <a:defPPr>
+              <a:defRPr lang="en-US"/>
+            </a:defPPr>
+            <a:lvl1pPr marL="0" algn="ctr" defTabSz="457200" rtl="0" eaLnBrk="1" latinLnBrk="0" hangingPunct="1">
+              <a:defRPr sz="1050" b="1" kern="1200">
+                <a:solidFill>
+                  <a:srgbClr val="FFFFFF"/>
+                </a:solidFill>
+                <a:latin typeface="+mj-lt"/>
+                <a:ea typeface="+mn-ea"/>
+                <a:cs typeface="+mn-cs"/>
+              </a:defRPr>
+            </a:lvl1pPr>
+            <a:lvl2pPr marL="457200" algn="l" defTabSz="457200" rtl="0" eaLnBrk="1" latinLnBrk="0" hangingPunct="1">
+              <a:defRPr sz="1800" kern="1200">
+                <a:solidFill>
+                  <a:schemeClr val="tx1"/>
+                </a:solidFill>
+                <a:latin typeface="+mn-lt"/>
+                <a:ea typeface="+mn-ea"/>
+                <a:cs typeface="+mn-cs"/>
+              </a:defRPr>
+            </a:lvl2pPr>
+            <a:lvl3pPr marL="914400" algn="l" defTabSz="457200" rtl="0" eaLnBrk="1" latinLnBrk="0" hangingPunct="1">
+              <a:defRPr sz="1800" kern="1200">
+                <a:solidFill>
+                  <a:schemeClr val="tx1"/>
+                </a:solidFill>
+                <a:latin typeface="+mn-lt"/>
+                <a:ea typeface="+mn-ea"/>
+                <a:cs typeface="+mn-cs"/>
+              </a:defRPr>
+            </a:lvl3pPr>
+            <a:lvl4pPr marL="1371600" algn="l" defTabSz="457200" rtl="0" eaLnBrk="1" latinLnBrk="0" hangingPunct="1">
+              <a:defRPr sz="1800" kern="1200">
+                <a:solidFill>
+                  <a:schemeClr val="tx1"/>
+                </a:solidFill>
+                <a:latin typeface="+mn-lt"/>
+                <a:ea typeface="+mn-ea"/>
+                <a:cs typeface="+mn-cs"/>
+              </a:defRPr>
+            </a:lvl4pPr>
+            <a:lvl5pPr marL="1828800" algn="l" defTabSz="457200" rtl="0" eaLnBrk="1" latinLnBrk="0" hangingPunct="1">
+              <a:defRPr sz="1800" kern="1200">
+                <a:solidFill>
+                  <a:schemeClr val="tx1"/>
+                </a:solidFill>
+                <a:latin typeface="+mn-lt"/>
+                <a:ea typeface="+mn-ea"/>
+                <a:cs typeface="+mn-cs"/>
+              </a:defRPr>
+            </a:lvl5pPr>
+            <a:lvl6pPr marL="2286000" algn="l" defTabSz="457200" rtl="0" eaLnBrk="1" latinLnBrk="0" hangingPunct="1">
+              <a:defRPr sz="1800" kern="1200">
+                <a:solidFill>
+                  <a:schemeClr val="tx1"/>
+                </a:solidFill>
+                <a:latin typeface="+mn-lt"/>
+                <a:ea typeface="+mn-ea"/>
+                <a:cs typeface="+mn-cs"/>
+              </a:defRPr>
+            </a:lvl6pPr>
+            <a:lvl7pPr marL="2743200" algn="l" defTabSz="457200" rtl="0" eaLnBrk="1" latinLnBrk="0" hangingPunct="1">
+              <a:defRPr sz="1800" kern="1200">
+                <a:solidFill>
+                  <a:schemeClr val="tx1"/>
+                </a:solidFill>
+                <a:latin typeface="+mn-lt"/>
+                <a:ea typeface="+mn-ea"/>
+                <a:cs typeface="+mn-cs"/>
+              </a:defRPr>
+            </a:lvl7pPr>
+            <a:lvl8pPr marL="3200400" algn="l" defTabSz="457200" rtl="0" eaLnBrk="1" latinLnBrk="0" hangingPunct="1">
+              <a:defRPr sz="1800" kern="1200">
+                <a:solidFill>
+                  <a:schemeClr val="tx1"/>
+                </a:solidFill>
+                <a:latin typeface="+mn-lt"/>
+                <a:ea typeface="+mn-ea"/>
+                <a:cs typeface="+mn-cs"/>
+              </a:defRPr>
+            </a:lvl8pPr>
+            <a:lvl9pPr marL="3657600" algn="l" defTabSz="457200" rtl="0" eaLnBrk="1" latinLnBrk="0" hangingPunct="1">
+              <a:defRPr sz="1800" kern="1200">
+                <a:solidFill>
+                  <a:schemeClr val="tx1"/>
+                </a:solidFill>
+                <a:latin typeface="+mn-lt"/>
+                <a:ea typeface="+mn-ea"/>
+                <a:cs typeface="+mn-cs"/>
+              </a:defRPr>
+            </a:lvl9pPr>
+          </a:lstStyle>
+          <a:p>
+            <a:fld id="{7475F232-FFFE-5E6C-5554-2F165DAD28C0}" type="slidenum">
+              <a:rPr lang="en-JP" smtClean="0"/>
+              <a:pPr/>
+              <a:t>9</a:t>
+            </a:fld>
+            <a:endParaRPr lang="en-JP" dirty="0"/>
+          </a:p>
+        </p:txBody>
+      </p:sp>
+      <p:pic>
+        <p:nvPicPr>
+          <p:cNvPr id="7" name="Picture 6" descr="A graph of a function">
+            <a:extLst>
+              <a:ext uri="{FF2B5EF4-FFF2-40B4-BE49-F238E27FC236}">
+                <a16:creationId xmlns:a16="http://schemas.microsoft.com/office/drawing/2014/main" id="{E7EE3D15-073E-79B7-95C9-3F77B319FEDF}"/>
+              </a:ext>
+            </a:extLst>
+          </p:cNvPr>
+          <p:cNvPicPr>
+            <a:picLocks noChangeAspect="1"/>
+          </p:cNvPicPr>
+          <p:nvPr/>
+        </p:nvPicPr>
+        <p:blipFill>
+          <a:blip r:embed="rId3">
+            <a:extLst>
+              <a:ext uri="{28A0092B-C50C-407E-A947-70E740481C1C}">
+                <a14:useLocalDpi xmlns:a14="http://schemas.microsoft.com/office/drawing/2010/main" val="0"/>
+              </a:ext>
+            </a:extLst>
+          </a:blip>
+          <a:stretch>
+            <a:fillRect/>
+          </a:stretch>
+        </p:blipFill>
+        <p:spPr>
+          <a:xfrm>
+            <a:off x="0" y="666750"/>
+            <a:ext cx="9144000" cy="3810000"/>
           </a:xfrm>
           <a:prstGeom prst="rect">
             <a:avLst/>
           </a:prstGeom>
         </p:spPr>
-        <p:style>
-          <a:lnRef idx="2">
-            <a:schemeClr val="accent1">
-              <a:shade val="15000"/>
-            </a:schemeClr>
-          </a:lnRef>
-          <a:fillRef idx="1">
-            <a:schemeClr val="accent1"/>
-          </a:fillRef>
-          <a:effectRef idx="0">
-            <a:schemeClr val="accent1"/>
-          </a:effectRef>
-          <a:fontRef idx="minor">
-            <a:schemeClr val="lt1"/>
-          </a:fontRef>
-        </p:style>
-        <p:txBody>
-          <a:bodyPr rtlCol="0" anchor="ctr"/>
-          <a:lstStyle/>
-          <a:p>
-            <a:pPr algn="ctr"/>
-            <a:endParaRPr lang="en-US"/>
-          </a:p>
-        </p:txBody>
-      </p:sp>
-      <p:sp>
-        <p:nvSpPr>
-          <p:cNvPr id="8" name="Rectangle 7">
-            <a:extLst>
-              <a:ext uri="{FF2B5EF4-FFF2-40B4-BE49-F238E27FC236}">
-                <a16:creationId xmlns:a16="http://schemas.microsoft.com/office/drawing/2014/main" id="{492FE8E0-B909-D391-C20A-98A17EFCAFA1}"/>
-              </a:ext>
-            </a:extLst>
-          </p:cNvPr>
-          <p:cNvSpPr/>
-          <p:nvPr/>
-        </p:nvSpPr>
-        <p:spPr>
-          <a:xfrm>
-            <a:off x="5521545" y="1851670"/>
-            <a:ext cx="792088" cy="792088"/>
-          </a:xfrm>
-          <a:prstGeom prst="rect">
-            <a:avLst/>
-          </a:prstGeom>
-          <a:scene3d>
-            <a:camera prst="orthographicFront">
-              <a:rot lat="19799999" lon="3299968" rev="0"/>
-            </a:camera>
-            <a:lightRig rig="threePt" dir="t"/>
-          </a:scene3d>
-        </p:spPr>
-        <p:style>
-          <a:lnRef idx="2">
-            <a:schemeClr val="accent1">
-              <a:shade val="15000"/>
-            </a:schemeClr>
-          </a:lnRef>
-          <a:fillRef idx="1">
-            <a:schemeClr val="accent1"/>
-          </a:fillRef>
-          <a:effectRef idx="0">
-            <a:schemeClr val="accent1"/>
-          </a:effectRef>
-          <a:fontRef idx="minor">
-            <a:schemeClr val="lt1"/>
-          </a:fontRef>
-        </p:style>
-        <p:txBody>
-          <a:bodyPr rtlCol="0" anchor="ctr"/>
-          <a:lstStyle/>
-          <a:p>
-            <a:pPr algn="ctr"/>
-            <a:endParaRPr lang="en-US"/>
-          </a:p>
-        </p:txBody>
-      </p:sp>
-      <p:sp>
-        <p:nvSpPr>
-          <p:cNvPr id="9" name="Rectangle 8">
-            <a:extLst>
-              <a:ext uri="{FF2B5EF4-FFF2-40B4-BE49-F238E27FC236}">
-                <a16:creationId xmlns:a16="http://schemas.microsoft.com/office/drawing/2014/main" id="{D2923DA5-5419-E853-70EE-478CB5895B8E}"/>
-              </a:ext>
-            </a:extLst>
-          </p:cNvPr>
-          <p:cNvSpPr/>
-          <p:nvPr/>
-        </p:nvSpPr>
-        <p:spPr>
-          <a:xfrm>
-            <a:off x="6516216" y="1851670"/>
-            <a:ext cx="792088" cy="792088"/>
-          </a:xfrm>
-          <a:prstGeom prst="rect">
-            <a:avLst/>
-          </a:prstGeom>
-          <a:scene3d>
-            <a:camera prst="orthographicFront">
-              <a:rot lat="19799999" lon="3299968" rev="0"/>
-            </a:camera>
-            <a:lightRig rig="threePt" dir="t"/>
-          </a:scene3d>
-        </p:spPr>
-        <p:style>
-          <a:lnRef idx="2">
-            <a:schemeClr val="accent1">
-              <a:shade val="15000"/>
-            </a:schemeClr>
-          </a:lnRef>
-          <a:fillRef idx="1">
-            <a:schemeClr val="accent1"/>
-          </a:fillRef>
-          <a:effectRef idx="0">
-            <a:schemeClr val="accent1"/>
-          </a:effectRef>
-          <a:fontRef idx="minor">
-            <a:schemeClr val="lt1"/>
-          </a:fontRef>
-        </p:style>
-        <p:txBody>
-          <a:bodyPr rtlCol="0" anchor="ctr"/>
-          <a:lstStyle/>
-          <a:p>
-            <a:pPr algn="ctr"/>
-            <a:endParaRPr lang="en-US"/>
-          </a:p>
-        </p:txBody>
-      </p:sp>
-      <p:cxnSp>
-        <p:nvCxnSpPr>
-          <p:cNvPr id="11" name="Straight Arrow Connector 10">
-            <a:extLst>
-              <a:ext uri="{FF2B5EF4-FFF2-40B4-BE49-F238E27FC236}">
-                <a16:creationId xmlns:a16="http://schemas.microsoft.com/office/drawing/2014/main" id="{2E0FC7E9-0368-4B6E-EE65-2103BB15D0F2}"/>
-              </a:ext>
-            </a:extLst>
-          </p:cNvPr>
-          <p:cNvCxnSpPr>
-            <a:cxnSpLocks/>
-          </p:cNvCxnSpPr>
-          <p:nvPr/>
-        </p:nvCxnSpPr>
-        <p:spPr>
-          <a:xfrm>
-            <a:off x="2411760" y="2251425"/>
-            <a:ext cx="504056" cy="0"/>
-          </a:xfrm>
-          <a:prstGeom prst="straightConnector1">
-            <a:avLst/>
-          </a:prstGeom>
-          <a:ln>
-            <a:headEnd type="triangle"/>
-            <a:tailEnd type="triangle"/>
-          </a:ln>
-        </p:spPr>
-        <p:style>
-          <a:lnRef idx="1">
-            <a:schemeClr val="accent1"/>
-          </a:lnRef>
-          <a:fillRef idx="0">
-            <a:schemeClr val="accent1"/>
-          </a:fillRef>
-          <a:effectRef idx="0">
-            <a:schemeClr val="accent1"/>
-          </a:effectRef>
-          <a:fontRef idx="minor">
-            <a:schemeClr val="tx1"/>
-          </a:fontRef>
-        </p:style>
-      </p:cxnSp>
-      <p:cxnSp>
-        <p:nvCxnSpPr>
-          <p:cNvPr id="13" name="Straight Arrow Connector 12">
-            <a:extLst>
-              <a:ext uri="{FF2B5EF4-FFF2-40B4-BE49-F238E27FC236}">
-                <a16:creationId xmlns:a16="http://schemas.microsoft.com/office/drawing/2014/main" id="{45AAC163-8BF5-3C22-18DA-3D11C3110ECE}"/>
-              </a:ext>
-            </a:extLst>
-          </p:cNvPr>
-          <p:cNvCxnSpPr>
-            <a:cxnSpLocks/>
-          </p:cNvCxnSpPr>
-          <p:nvPr/>
-        </p:nvCxnSpPr>
-        <p:spPr>
-          <a:xfrm>
-            <a:off x="6156176" y="2265019"/>
-            <a:ext cx="504056" cy="0"/>
-          </a:xfrm>
-          <a:prstGeom prst="straightConnector1">
-            <a:avLst/>
-          </a:prstGeom>
-          <a:ln>
-            <a:headEnd type="triangle"/>
-            <a:tailEnd type="triangle"/>
-          </a:ln>
-        </p:spPr>
-        <p:style>
-          <a:lnRef idx="1">
-            <a:schemeClr val="accent1"/>
-          </a:lnRef>
-          <a:fillRef idx="0">
-            <a:schemeClr val="accent1"/>
-          </a:fillRef>
-          <a:effectRef idx="0">
-            <a:schemeClr val="accent1"/>
-          </a:effectRef>
-          <a:fontRef idx="minor">
-            <a:schemeClr val="tx1"/>
-          </a:fontRef>
-        </p:style>
-      </p:cxnSp>
-      <p:cxnSp>
-        <p:nvCxnSpPr>
-          <p:cNvPr id="17" name="Straight Arrow Connector 16">
-            <a:extLst>
-              <a:ext uri="{FF2B5EF4-FFF2-40B4-BE49-F238E27FC236}">
-                <a16:creationId xmlns:a16="http://schemas.microsoft.com/office/drawing/2014/main" id="{E1CF09BC-FC37-0628-91C8-391B321031B7}"/>
-              </a:ext>
-            </a:extLst>
-          </p:cNvPr>
-          <p:cNvCxnSpPr/>
-          <p:nvPr/>
-        </p:nvCxnSpPr>
-        <p:spPr>
-          <a:xfrm flipV="1">
-            <a:off x="1187624" y="1851670"/>
-            <a:ext cx="0" cy="1008112"/>
-          </a:xfrm>
-          <a:prstGeom prst="straightConnector1">
-            <a:avLst/>
-          </a:prstGeom>
-          <a:ln>
-            <a:solidFill>
-              <a:schemeClr val="tx1"/>
-            </a:solidFill>
-            <a:tailEnd type="triangle"/>
-          </a:ln>
-        </p:spPr>
-        <p:style>
-          <a:lnRef idx="1">
-            <a:schemeClr val="accent1"/>
-          </a:lnRef>
-          <a:fillRef idx="0">
-            <a:schemeClr val="accent1"/>
-          </a:fillRef>
-          <a:effectRef idx="0">
-            <a:schemeClr val="accent1"/>
-          </a:effectRef>
-          <a:fontRef idx="minor">
-            <a:schemeClr val="tx1"/>
-          </a:fontRef>
-        </p:style>
-      </p:cxnSp>
-      <p:cxnSp>
-        <p:nvCxnSpPr>
-          <p:cNvPr id="20" name="Straight Arrow Connector 19">
-            <a:extLst>
-              <a:ext uri="{FF2B5EF4-FFF2-40B4-BE49-F238E27FC236}">
-                <a16:creationId xmlns:a16="http://schemas.microsoft.com/office/drawing/2014/main" id="{F0E52777-E938-7B27-8B01-5E90D1C2E7C4}"/>
-              </a:ext>
-            </a:extLst>
-          </p:cNvPr>
-          <p:cNvCxnSpPr/>
-          <p:nvPr/>
-        </p:nvCxnSpPr>
-        <p:spPr>
-          <a:xfrm>
-            <a:off x="1187624" y="2859782"/>
-            <a:ext cx="1152128" cy="0"/>
-          </a:xfrm>
-          <a:prstGeom prst="straightConnector1">
-            <a:avLst/>
-          </a:prstGeom>
-          <a:ln>
-            <a:solidFill>
-              <a:schemeClr val="tx1"/>
-            </a:solidFill>
-            <a:tailEnd type="triangle"/>
-          </a:ln>
-        </p:spPr>
-        <p:style>
-          <a:lnRef idx="1">
-            <a:schemeClr val="accent1"/>
-          </a:lnRef>
-          <a:fillRef idx="0">
-            <a:schemeClr val="accent1"/>
-          </a:fillRef>
-          <a:effectRef idx="0">
-            <a:schemeClr val="accent1"/>
-          </a:effectRef>
-          <a:fontRef idx="minor">
-            <a:schemeClr val="tx1"/>
-          </a:fontRef>
-        </p:style>
-      </p:cxnSp>
-      <p:cxnSp>
-        <p:nvCxnSpPr>
-          <p:cNvPr id="21" name="Straight Arrow Connector 20">
-            <a:extLst>
-              <a:ext uri="{FF2B5EF4-FFF2-40B4-BE49-F238E27FC236}">
-                <a16:creationId xmlns:a16="http://schemas.microsoft.com/office/drawing/2014/main" id="{EDE11D03-01C0-AC1D-769E-8F550BC2D25F}"/>
-              </a:ext>
-            </a:extLst>
-          </p:cNvPr>
-          <p:cNvCxnSpPr/>
-          <p:nvPr/>
-        </p:nvCxnSpPr>
-        <p:spPr>
-          <a:xfrm flipV="1">
-            <a:off x="5580112" y="1853233"/>
-            <a:ext cx="0" cy="1008112"/>
-          </a:xfrm>
-          <a:prstGeom prst="straightConnector1">
-            <a:avLst/>
-          </a:prstGeom>
-          <a:ln>
-            <a:solidFill>
-              <a:schemeClr val="tx1"/>
-            </a:solidFill>
-            <a:tailEnd type="triangle"/>
-          </a:ln>
-        </p:spPr>
-        <p:style>
-          <a:lnRef idx="1">
-            <a:schemeClr val="accent1"/>
-          </a:lnRef>
-          <a:fillRef idx="0">
-            <a:schemeClr val="accent1"/>
-          </a:fillRef>
-          <a:effectRef idx="0">
-            <a:schemeClr val="accent1"/>
-          </a:effectRef>
-          <a:fontRef idx="minor">
-            <a:schemeClr val="tx1"/>
-          </a:fontRef>
-        </p:style>
-      </p:cxnSp>
-      <p:cxnSp>
-        <p:nvCxnSpPr>
-          <p:cNvPr id="22" name="Straight Arrow Connector 21">
-            <a:extLst>
-              <a:ext uri="{FF2B5EF4-FFF2-40B4-BE49-F238E27FC236}">
-                <a16:creationId xmlns:a16="http://schemas.microsoft.com/office/drawing/2014/main" id="{7FBF172C-0E26-7B99-3F0D-7FB62ADDDD75}"/>
-              </a:ext>
-            </a:extLst>
-          </p:cNvPr>
-          <p:cNvCxnSpPr>
-            <a:cxnSpLocks/>
-          </p:cNvCxnSpPr>
-          <p:nvPr/>
-        </p:nvCxnSpPr>
-        <p:spPr>
-          <a:xfrm flipV="1">
-            <a:off x="5580112" y="2355726"/>
-            <a:ext cx="792088" cy="522755"/>
-          </a:xfrm>
-          <a:prstGeom prst="straightConnector1">
-            <a:avLst/>
-          </a:prstGeom>
-          <a:ln>
-            <a:solidFill>
-              <a:schemeClr val="tx1"/>
-            </a:solidFill>
-            <a:tailEnd type="triangle"/>
-          </a:ln>
-        </p:spPr>
-        <p:style>
-          <a:lnRef idx="1">
-            <a:schemeClr val="accent1"/>
-          </a:lnRef>
-          <a:fillRef idx="0">
-            <a:schemeClr val="accent1"/>
-          </a:fillRef>
-          <a:effectRef idx="0">
-            <a:schemeClr val="accent1"/>
-          </a:effectRef>
-          <a:fontRef idx="minor">
-            <a:schemeClr val="tx1"/>
-          </a:fontRef>
-        </p:style>
-      </p:cxnSp>
-      <p:cxnSp>
-        <p:nvCxnSpPr>
-          <p:cNvPr id="25" name="Straight Arrow Connector 24">
-            <a:extLst>
-              <a:ext uri="{FF2B5EF4-FFF2-40B4-BE49-F238E27FC236}">
-                <a16:creationId xmlns:a16="http://schemas.microsoft.com/office/drawing/2014/main" id="{8819258C-7F9D-E6B6-5ECB-484EF04F58E4}"/>
-              </a:ext>
-            </a:extLst>
-          </p:cNvPr>
-          <p:cNvCxnSpPr>
-            <a:cxnSpLocks/>
-          </p:cNvCxnSpPr>
-          <p:nvPr/>
-        </p:nvCxnSpPr>
-        <p:spPr>
-          <a:xfrm>
-            <a:off x="5588496" y="2878481"/>
-            <a:ext cx="927720" cy="0"/>
-          </a:xfrm>
-          <a:prstGeom prst="straightConnector1">
-            <a:avLst/>
-          </a:prstGeom>
-          <a:ln>
-            <a:solidFill>
-              <a:schemeClr val="tx1"/>
-            </a:solidFill>
-            <a:tailEnd type="triangle"/>
-          </a:ln>
-        </p:spPr>
-        <p:style>
-          <a:lnRef idx="1">
-            <a:schemeClr val="accent1"/>
-          </a:lnRef>
-          <a:fillRef idx="0">
-            <a:schemeClr val="accent1"/>
-          </a:fillRef>
-          <a:effectRef idx="0">
-            <a:schemeClr val="accent1"/>
-          </a:effectRef>
-          <a:fontRef idx="minor">
-            <a:schemeClr val="tx1"/>
-          </a:fontRef>
-        </p:style>
-      </p:cxnSp>
+      </p:pic>
     </p:spTree>
     <p:extLst>
       <p:ext uri="{BB962C8B-B14F-4D97-AF65-F5344CB8AC3E}">
-        <p14:creationId xmlns:p14="http://schemas.microsoft.com/office/powerpoint/2010/main" val="3197450399"/>
+        <p14:creationId xmlns:p14="http://schemas.microsoft.com/office/powerpoint/2010/main" val="813731333"/>
       </p:ext>
     </p:extLst>
   </p:cSld>

--- a/documents/presentations/Jannis_Meyer_Presentation_06_07_2026_extended.pptx
+++ b/documents/presentations/Jannis_Meyer_Presentation_06_07_2026_extended.pptx
@@ -3430,7 +3430,7 @@
           <a:p>
             <a:fld id="{8664C608-40B1-4030-A28D-5B74BC98ADCE}" type="datetimeFigureOut">
               <a:rPr lang="en-US" dirty="0"/>
-              <a:t>7/16/2026</a:t>
+              <a:t>7/17/2026</a:t>
             </a:fld>
             <a:endParaRPr lang="en-US" dirty="0"/>
           </a:p>
@@ -10466,7 +10466,7 @@
           <p:nvPr>
             <p:extLst>
               <p:ext uri="{D42A27DB-BD31-4B8C-83A1-F6EECF244321}">
-                <p14:modId xmlns:p14="http://schemas.microsoft.com/office/powerpoint/2010/main" val="1877078275"/>
+                <p14:modId xmlns:p14="http://schemas.microsoft.com/office/powerpoint/2010/main" val="4209200672"/>
               </p:ext>
             </p:extLst>
           </p:nvPr>
@@ -21012,67 +21012,6 @@
 </file>
 
 <file path=customXml/item1.xml><?xml version="1.0" encoding="utf-8"?>
-<p:properties xmlns:p="http://schemas.microsoft.com/office/2006/metadata/properties" xmlns:xsi="http://www.w3.org/2001/XMLSchema-instance" xmlns:pc="http://schemas.microsoft.com/office/infopath/2007/PartnerControls">
-  <documentManagement>
-    <TaxCatchAll xmlns="bbdc8989-56fb-4b1d-a38b-166581c893ff" xsi:nil="true"/>
-    <lcf76f155ced4ddcb4097134ff3c332f xmlns="f61654bb-b7fc-45ad-85e3-d08f7c4a7ee2">
-      <Terms xmlns="http://schemas.microsoft.com/office/infopath/2007/PartnerControls"/>
-    </lcf76f155ced4ddcb4097134ff3c332f>
-    <Title0 xmlns="f61654bb-b7fc-45ad-85e3-d08f7c4a7ee2" xsi:nil="true"/>
-    <Year xmlns="f61654bb-b7fc-45ad-85e3-d08f7c4a7ee2" xsi:nil="true"/>
-    <Author0 xmlns="f61654bb-b7fc-45ad-85e3-d08f7c4a7ee2" xsi:nil="true"/>
-    <Authors xmlns="f61654bb-b7fc-45ad-85e3-d08f7c4a7ee2" xsi:nil="true"/>
-    <NotebookType xmlns="f61654bb-b7fc-45ad-85e3-d08f7c4a7ee2" xsi:nil="true"/>
-    <Templates xmlns="f61654bb-b7fc-45ad-85e3-d08f7c4a7ee2" xsi:nil="true"/>
-    <AppVersion xmlns="f61654bb-b7fc-45ad-85e3-d08f7c4a7ee2" xsi:nil="true"/>
-    <IsNotebookLocked xmlns="f61654bb-b7fc-45ad-85e3-d08f7c4a7ee2" xsi:nil="true"/>
-    <Self_Registration_Enabled xmlns="f61654bb-b7fc-45ad-85e3-d08f7c4a7ee2" xsi:nil="true"/>
-    <Has_Leaders_Only_SectionGroup xmlns="f61654bb-b7fc-45ad-85e3-d08f7c4a7ee2" xsi:nil="true"/>
-    <Invited_Members xmlns="f61654bb-b7fc-45ad-85e3-d08f7c4a7ee2" xsi:nil="true"/>
-    <Is_Collaboration_Space_Locked xmlns="f61654bb-b7fc-45ad-85e3-d08f7c4a7ee2" xsi:nil="true"/>
-    <LMS_Mappings xmlns="f61654bb-b7fc-45ad-85e3-d08f7c4a7ee2" xsi:nil="true"/>
-    <Invited_Leaders xmlns="f61654bb-b7fc-45ad-85e3-d08f7c4a7ee2" xsi:nil="true"/>
-    <Math_Settings xmlns="f61654bb-b7fc-45ad-85e3-d08f7c4a7ee2" xsi:nil="true"/>
-    <Members xmlns="f61654bb-b7fc-45ad-85e3-d08f7c4a7ee2">
-      <UserInfo>
-        <DisplayName/>
-        <AccountId xsi:nil="true"/>
-        <AccountType/>
-      </UserInfo>
-    </Members>
-    <DefaultSectionNames xmlns="f61654bb-b7fc-45ad-85e3-d08f7c4a7ee2" xsi:nil="true"/>
-    <TeamsChannelId xmlns="f61654bb-b7fc-45ad-85e3-d08f7c4a7ee2" xsi:nil="true"/>
-    <FolderType xmlns="f61654bb-b7fc-45ad-85e3-d08f7c4a7ee2" xsi:nil="true"/>
-    <Leaders xmlns="f61654bb-b7fc-45ad-85e3-d08f7c4a7ee2">
-      <UserInfo>
-        <DisplayName/>
-        <AccountId xsi:nil="true"/>
-        <AccountType/>
-      </UserInfo>
-    </Leaders>
-    <Distribution_Groups xmlns="f61654bb-b7fc-45ad-85e3-d08f7c4a7ee2" xsi:nil="true"/>
-    <Member_Groups xmlns="f61654bb-b7fc-45ad-85e3-d08f7c4a7ee2">
-      <UserInfo>
-        <DisplayName/>
-        <AccountId xsi:nil="true"/>
-        <AccountType/>
-      </UserInfo>
-    </Member_Groups>
-    <Teams_Channel_Section_Location xmlns="f61654bb-b7fc-45ad-85e3-d08f7c4a7ee2" xsi:nil="true"/>
-    <CultureName xmlns="f61654bb-b7fc-45ad-85e3-d08f7c4a7ee2" xsi:nil="true"/>
-    <Owner xmlns="f61654bb-b7fc-45ad-85e3-d08f7c4a7ee2">
-      <UserInfo>
-        <DisplayName/>
-        <AccountId xsi:nil="true"/>
-        <AccountType/>
-      </UserInfo>
-    </Owner>
-    <_x30a2__x30c3__x30d7__x30ed__x30fc__x30c9__x65e5__x4ed8_ xmlns="f61654bb-b7fc-45ad-85e3-d08f7c4a7ee2" xsi:nil="true"/>
-  </documentManagement>
-</p:properties>
-</file>
-
-<file path=customXml/item2.xml><?xml version="1.0" encoding="utf-8"?>
 <ct:contentTypeSchema xmlns:ct="http://schemas.microsoft.com/office/2006/metadata/contentType" xmlns:ma="http://schemas.microsoft.com/office/2006/metadata/properties/metaAttributes" ct:_="" ma:_="" ma:contentTypeName="ドキュメント" ma:contentTypeID="0x010100352A53F757E5E848A18782864458E644" ma:contentTypeVersion="43" ma:contentTypeDescription="新しいドキュメントを作成します。" ma:contentTypeScope="" ma:versionID="e58177412e1512208a553d6b419372bf">
   <xsd:schema xmlns:xsd="http://www.w3.org/2001/XMLSchema" xmlns:xs="http://www.w3.org/2001/XMLSchema" xmlns:p="http://schemas.microsoft.com/office/2006/metadata/properties" xmlns:ns2="f61654bb-b7fc-45ad-85e3-d08f7c4a7ee2" xmlns:ns3="bbdc8989-56fb-4b1d-a38b-166581c893ff" targetNamespace="http://schemas.microsoft.com/office/2006/metadata/properties" ma:root="true" ma:fieldsID="41a5810d8518a876aecc1f17313a65be" ns2:_="" ns3:_="">
     <xsd:import namespace="f61654bb-b7fc-45ad-85e3-d08f7c4a7ee2"/>
@@ -21543,6 +21482,67 @@
 </ct:contentTypeSchema>
 </file>
 
+<file path=customXml/item2.xml><?xml version="1.0" encoding="utf-8"?>
+<p:properties xmlns:p="http://schemas.microsoft.com/office/2006/metadata/properties" xmlns:xsi="http://www.w3.org/2001/XMLSchema-instance" xmlns:pc="http://schemas.microsoft.com/office/infopath/2007/PartnerControls">
+  <documentManagement>
+    <TaxCatchAll xmlns="bbdc8989-56fb-4b1d-a38b-166581c893ff" xsi:nil="true"/>
+    <lcf76f155ced4ddcb4097134ff3c332f xmlns="f61654bb-b7fc-45ad-85e3-d08f7c4a7ee2">
+      <Terms xmlns="http://schemas.microsoft.com/office/infopath/2007/PartnerControls"/>
+    </lcf76f155ced4ddcb4097134ff3c332f>
+    <Title0 xmlns="f61654bb-b7fc-45ad-85e3-d08f7c4a7ee2" xsi:nil="true"/>
+    <Year xmlns="f61654bb-b7fc-45ad-85e3-d08f7c4a7ee2" xsi:nil="true"/>
+    <Author0 xmlns="f61654bb-b7fc-45ad-85e3-d08f7c4a7ee2" xsi:nil="true"/>
+    <Authors xmlns="f61654bb-b7fc-45ad-85e3-d08f7c4a7ee2" xsi:nil="true"/>
+    <NotebookType xmlns="f61654bb-b7fc-45ad-85e3-d08f7c4a7ee2" xsi:nil="true"/>
+    <Templates xmlns="f61654bb-b7fc-45ad-85e3-d08f7c4a7ee2" xsi:nil="true"/>
+    <AppVersion xmlns="f61654bb-b7fc-45ad-85e3-d08f7c4a7ee2" xsi:nil="true"/>
+    <IsNotebookLocked xmlns="f61654bb-b7fc-45ad-85e3-d08f7c4a7ee2" xsi:nil="true"/>
+    <Self_Registration_Enabled xmlns="f61654bb-b7fc-45ad-85e3-d08f7c4a7ee2" xsi:nil="true"/>
+    <Has_Leaders_Only_SectionGroup xmlns="f61654bb-b7fc-45ad-85e3-d08f7c4a7ee2" xsi:nil="true"/>
+    <Invited_Members xmlns="f61654bb-b7fc-45ad-85e3-d08f7c4a7ee2" xsi:nil="true"/>
+    <Is_Collaboration_Space_Locked xmlns="f61654bb-b7fc-45ad-85e3-d08f7c4a7ee2" xsi:nil="true"/>
+    <LMS_Mappings xmlns="f61654bb-b7fc-45ad-85e3-d08f7c4a7ee2" xsi:nil="true"/>
+    <Invited_Leaders xmlns="f61654bb-b7fc-45ad-85e3-d08f7c4a7ee2" xsi:nil="true"/>
+    <Math_Settings xmlns="f61654bb-b7fc-45ad-85e3-d08f7c4a7ee2" xsi:nil="true"/>
+    <Members xmlns="f61654bb-b7fc-45ad-85e3-d08f7c4a7ee2">
+      <UserInfo>
+        <DisplayName/>
+        <AccountId xsi:nil="true"/>
+        <AccountType/>
+      </UserInfo>
+    </Members>
+    <DefaultSectionNames xmlns="f61654bb-b7fc-45ad-85e3-d08f7c4a7ee2" xsi:nil="true"/>
+    <TeamsChannelId xmlns="f61654bb-b7fc-45ad-85e3-d08f7c4a7ee2" xsi:nil="true"/>
+    <FolderType xmlns="f61654bb-b7fc-45ad-85e3-d08f7c4a7ee2" xsi:nil="true"/>
+    <Leaders xmlns="f61654bb-b7fc-45ad-85e3-d08f7c4a7ee2">
+      <UserInfo>
+        <DisplayName/>
+        <AccountId xsi:nil="true"/>
+        <AccountType/>
+      </UserInfo>
+    </Leaders>
+    <Distribution_Groups xmlns="f61654bb-b7fc-45ad-85e3-d08f7c4a7ee2" xsi:nil="true"/>
+    <Member_Groups xmlns="f61654bb-b7fc-45ad-85e3-d08f7c4a7ee2">
+      <UserInfo>
+        <DisplayName/>
+        <AccountId xsi:nil="true"/>
+        <AccountType/>
+      </UserInfo>
+    </Member_Groups>
+    <Teams_Channel_Section_Location xmlns="f61654bb-b7fc-45ad-85e3-d08f7c4a7ee2" xsi:nil="true"/>
+    <CultureName xmlns="f61654bb-b7fc-45ad-85e3-d08f7c4a7ee2" xsi:nil="true"/>
+    <Owner xmlns="f61654bb-b7fc-45ad-85e3-d08f7c4a7ee2">
+      <UserInfo>
+        <DisplayName/>
+        <AccountId xsi:nil="true"/>
+        <AccountType/>
+      </UserInfo>
+    </Owner>
+    <_x30a2__x30c3__x30d7__x30ed__x30fc__x30c9__x65e5__x4ed8_ xmlns="f61654bb-b7fc-45ad-85e3-d08f7c4a7ee2" xsi:nil="true"/>
+  </documentManagement>
+</p:properties>
+</file>
+
 <file path=customXml/item3.xml><?xml version="1.0" encoding="utf-8"?>
 <?mso-contentType ?>
 <FormTemplates xmlns="http://schemas.microsoft.com/sharepoint/v3/contenttype/forms">
@@ -21553,23 +21553,6 @@
 </file>
 
 <file path=customXml/itemProps1.xml><?xml version="1.0" encoding="utf-8"?>
-<ds:datastoreItem xmlns:ds="http://schemas.openxmlformats.org/officeDocument/2006/customXml" ds:itemID="{726A834E-B1B5-46FD-BC6A-86110B9E53A8}">
-  <ds:schemaRefs>
-    <ds:schemaRef ds:uri="f61654bb-b7fc-45ad-85e3-d08f7c4a7ee2"/>
-    <ds:schemaRef ds:uri="http://schemas.microsoft.com/office/infopath/2007/PartnerControls"/>
-    <ds:schemaRef ds:uri="http://purl.org/dc/dcmitype/"/>
-    <ds:schemaRef ds:uri="http://purl.org/dc/elements/1.1/"/>
-    <ds:schemaRef ds:uri="bbdc8989-56fb-4b1d-a38b-166581c893ff"/>
-    <ds:schemaRef ds:uri="http://purl.org/dc/terms/"/>
-    <ds:schemaRef ds:uri="http://schemas.microsoft.com/office/2006/documentManagement/types"/>
-    <ds:schemaRef ds:uri="http://www.w3.org/XML/1998/namespace"/>
-    <ds:schemaRef ds:uri="http://schemas.openxmlformats.org/package/2006/metadata/core-properties"/>
-    <ds:schemaRef ds:uri="http://schemas.microsoft.com/office/2006/metadata/properties"/>
-  </ds:schemaRefs>
-</ds:datastoreItem>
-</file>
-
-<file path=customXml/itemProps2.xml><?xml version="1.0" encoding="utf-8"?>
 <ds:datastoreItem xmlns:ds="http://schemas.openxmlformats.org/officeDocument/2006/customXml" ds:itemID="{F2D09310-C45E-477D-9B05-494A1C2D1783}">
   <ds:schemaRefs>
     <ds:schemaRef ds:uri="http://schemas.microsoft.com/office/2006/metadata/contentType"/>
@@ -21588,6 +21571,23 @@
 </ds:datastoreItem>
 </file>
 
+<file path=customXml/itemProps2.xml><?xml version="1.0" encoding="utf-8"?>
+<ds:datastoreItem xmlns:ds="http://schemas.openxmlformats.org/officeDocument/2006/customXml" ds:itemID="{726A834E-B1B5-46FD-BC6A-86110B9E53A8}">
+  <ds:schemaRefs>
+    <ds:schemaRef ds:uri="f61654bb-b7fc-45ad-85e3-d08f7c4a7ee2"/>
+    <ds:schemaRef ds:uri="http://schemas.microsoft.com/office/infopath/2007/PartnerControls"/>
+    <ds:schemaRef ds:uri="http://purl.org/dc/dcmitype/"/>
+    <ds:schemaRef ds:uri="http://purl.org/dc/elements/1.1/"/>
+    <ds:schemaRef ds:uri="bbdc8989-56fb-4b1d-a38b-166581c893ff"/>
+    <ds:schemaRef ds:uri="http://purl.org/dc/terms/"/>
+    <ds:schemaRef ds:uri="http://schemas.microsoft.com/office/2006/documentManagement/types"/>
+    <ds:schemaRef ds:uri="http://www.w3.org/XML/1998/namespace"/>
+    <ds:schemaRef ds:uri="http://schemas.openxmlformats.org/package/2006/metadata/core-properties"/>
+    <ds:schemaRef ds:uri="http://schemas.microsoft.com/office/2006/metadata/properties"/>
+  </ds:schemaRefs>
+</ds:datastoreItem>
+</file>
+
 <file path=customXml/itemProps3.xml><?xml version="1.0" encoding="utf-8"?>
 <ds:datastoreItem xmlns:ds="http://schemas.openxmlformats.org/officeDocument/2006/customXml" ds:itemID="{0A8BCAEC-5EDD-4F8B-8062-E645C37DABB6}">
   <ds:schemaRefs>
